--- a/docs/ship_energy_research/船舶控制与节能算法调研汇报.pptx
+++ b/docs/ship_energy_research/船舶控制与节能算法调研汇报.pptx
@@ -18,6 +18,7 @@
     <p:sldId id="266" r:id="rId17"/>
     <p:sldId id="267" r:id="rId18"/>
     <p:sldId id="268" r:id="rId19"/>
+    <p:sldId id="269" r:id="rId20"/>
   </p:sldIdLst>
   <p:sldSz cx="12191695" cy="6858000" type="screen4x3"/>
   <p:notesSz cx="6858000" cy="9144000"/>
@@ -3904,6 +3905,48 @@
           </a:graphicData>
         </a:graphic>
       </p:graphicFrame>
+      <p:sp>
+        <p:nvSpPr>
+          <p:cNvPr id="5" name="TextBox 4"/>
+          <p:cNvSpPr txBox="1"/>
+          <p:nvPr/>
+        </p:nvSpPr>
+        <p:spPr>
+          <a:xfrm>
+            <a:off x="11475720" y="6473952"/>
+            <a:ext cx="640080" cy="320040"/>
+          </a:xfrm>
+          <a:prstGeom prst="rect">
+            <a:avLst/>
+          </a:prstGeom>
+          <a:noFill/>
+        </p:spPr>
+        <p:txBody>
+          <a:bodyPr wrap="square" anchor="t">
+            <a:spAutoFit/>
+          </a:bodyPr>
+          <a:lstStyle/>
+          <a:p>
+            <a:pPr algn="r">
+              <a:lnSpc>
+                <a:spcPct val="115000"/>
+              </a:lnSpc>
+              <a:spcAft>
+                <a:spcPts val="600"/>
+              </a:spcAft>
+            </a:pPr>
+            <a:r>
+              <a:rPr sz="1100" b="0">
+                <a:solidFill>
+                  <a:srgbClr val="666666"/>
+                </a:solidFill>
+                <a:latin typeface="Noto Sans CJK SC"/>
+              </a:rPr>
+              <a:t>10 / 14</a:t>
+            </a:r>
+          </a:p>
+        </p:txBody>
+      </p:sp>
     </p:spTree>
   </p:cSld>
   <p:clrMapOvr>
@@ -4244,6 +4287,48 @@
                 <a:latin typeface="Noto Sans CJK SC"/>
               </a:rPr>
               <a:t>    – 印证：门槛不在算力，在模型获取与整定</a:t>
+            </a:r>
+          </a:p>
+        </p:txBody>
+      </p:sp>
+      <p:sp>
+        <p:nvSpPr>
+          <p:cNvPr id="7" name="TextBox 6"/>
+          <p:cNvSpPr txBox="1"/>
+          <p:nvPr/>
+        </p:nvSpPr>
+        <p:spPr>
+          <a:xfrm>
+            <a:off x="11475720" y="6473952"/>
+            <a:ext cx="640080" cy="320040"/>
+          </a:xfrm>
+          <a:prstGeom prst="rect">
+            <a:avLst/>
+          </a:prstGeom>
+          <a:noFill/>
+        </p:spPr>
+        <p:txBody>
+          <a:bodyPr wrap="square" anchor="t">
+            <a:spAutoFit/>
+          </a:bodyPr>
+          <a:lstStyle/>
+          <a:p>
+            <a:pPr algn="r">
+              <a:lnSpc>
+                <a:spcPct val="115000"/>
+              </a:lnSpc>
+              <a:spcAft>
+                <a:spcPts val="600"/>
+              </a:spcAft>
+            </a:pPr>
+            <a:r>
+              <a:rPr sz="1100" b="0">
+                <a:solidFill>
+                  <a:srgbClr val="666666"/>
+                </a:solidFill>
+                <a:latin typeface="Noto Sans CJK SC"/>
+              </a:rPr>
+              <a:t>11 / 14</a:t>
             </a:r>
           </a:p>
         </p:txBody>
@@ -4819,7 +4904,7 @@
                 </a:solidFill>
                 <a:latin typeface="Noto Sans CJK SC"/>
               </a:rPr>
-              <a:t>核心逻辑：节能大头在决策层（航速/航线 3–50%），控制层贡献 0.1–1% 但几乎零成本；</a:t>
+              <a:t>核心逻辑：节能大头在决策层（气象航线 3–10%、减速航行主机口径可达 50%），控制层贡献 0.1–1% 但几乎零成本；</a:t>
             </a:r>
           </a:p>
           <a:p>
@@ -4839,6 +4924,48 @@
                 <a:latin typeface="Noto Sans CJK SC"/>
               </a:rPr>
               <a:t>先把 PD 整定与辨识流程工具化，再让 MPC 平滑接管性能增强。</a:t>
+            </a:r>
+          </a:p>
+        </p:txBody>
+      </p:sp>
+      <p:sp>
+        <p:nvSpPr>
+          <p:cNvPr id="6" name="TextBox 5"/>
+          <p:cNvSpPr txBox="1"/>
+          <p:nvPr/>
+        </p:nvSpPr>
+        <p:spPr>
+          <a:xfrm>
+            <a:off x="11475720" y="6473952"/>
+            <a:ext cx="640080" cy="320040"/>
+          </a:xfrm>
+          <a:prstGeom prst="rect">
+            <a:avLst/>
+          </a:prstGeom>
+          <a:noFill/>
+        </p:spPr>
+        <p:txBody>
+          <a:bodyPr wrap="square" anchor="t">
+            <a:spAutoFit/>
+          </a:bodyPr>
+          <a:lstStyle/>
+          <a:p>
+            <a:pPr algn="r">
+              <a:lnSpc>
+                <a:spcPct val="115000"/>
+              </a:lnSpc>
+              <a:spcAft>
+                <a:spcPts val="600"/>
+              </a:spcAft>
+            </a:pPr>
+            <a:r>
+              <a:rPr sz="1100" b="0">
+                <a:solidFill>
+                  <a:srgbClr val="666666"/>
+                </a:solidFill>
+                <a:latin typeface="Noto Sans CJK SC"/>
+              </a:rPr>
+              <a:t>12 / 14</a:t>
             </a:r>
           </a:p>
         </p:txBody>
@@ -4852,6 +4979,562 @@
 </file>
 
 <file path=ppt/slides/slide13.xml><?xml version="1.0" encoding="utf-8"?>
+<p:sld xmlns:a="http://schemas.openxmlformats.org/drawingml/2006/main" xmlns:p="http://schemas.openxmlformats.org/presentationml/2006/main" xmlns:r="http://schemas.openxmlformats.org/officeDocument/2006/relationships">
+  <p:cSld>
+    <p:spTree>
+      <p:nvGrpSpPr>
+        <p:cNvPr id="1" name=""/>
+        <p:cNvGrpSpPr/>
+        <p:nvPr/>
+      </p:nvGrpSpPr>
+      <p:grpSpPr/>
+      <p:sp>
+        <p:nvSpPr>
+          <p:cNvPr id="2" name="Rectangle 1"/>
+          <p:cNvSpPr/>
+          <p:nvPr/>
+        </p:nvSpPr>
+        <p:spPr>
+          <a:xfrm>
+            <a:off x="0" y="0"/>
+            <a:ext cx="12191695" cy="109728"/>
+          </a:xfrm>
+          <a:prstGeom prst="rect">
+            <a:avLst/>
+          </a:prstGeom>
+          <a:solidFill>
+            <a:srgbClr val="1F77B4"/>
+          </a:solidFill>
+          <a:ln>
+            <a:noFill/>
+          </a:ln>
+        </p:spPr>
+        <p:style>
+          <a:lnRef idx="1">
+            <a:schemeClr val="accent1"/>
+          </a:lnRef>
+          <a:fillRef idx="3">
+            <a:schemeClr val="accent1"/>
+          </a:fillRef>
+          <a:effectRef idx="2">
+            <a:schemeClr val="accent1"/>
+          </a:effectRef>
+          <a:fontRef idx="minor">
+            <a:schemeClr val="lt1"/>
+          </a:fontRef>
+        </p:style>
+        <p:txBody>
+          <a:bodyPr rtlCol="0" anchor="ctr"/>
+          <a:lstStyle/>
+          <a:p>
+            <a:pPr algn="ctr"/>
+          </a:p>
+        </p:txBody>
+      </p:sp>
+      <p:sp>
+        <p:nvSpPr>
+          <p:cNvPr id="3" name="TextBox 2"/>
+          <p:cNvSpPr txBox="1"/>
+          <p:nvPr/>
+        </p:nvSpPr>
+        <p:spPr>
+          <a:xfrm>
+            <a:off x="457200" y="256032"/>
+            <a:ext cx="11247120" cy="822960"/>
+          </a:xfrm>
+          <a:prstGeom prst="rect">
+            <a:avLst/>
+          </a:prstGeom>
+          <a:noFill/>
+        </p:spPr>
+        <p:txBody>
+          <a:bodyPr wrap="square" anchor="t">
+            <a:spAutoFit/>
+          </a:bodyPr>
+          <a:lstStyle/>
+          <a:p>
+            <a:pPr algn="l">
+              <a:lnSpc>
+                <a:spcPct val="115000"/>
+              </a:lnSpc>
+              <a:spcAft>
+                <a:spcPts val="600"/>
+              </a:spcAft>
+            </a:pPr>
+            <a:r>
+              <a:rPr sz="3000" b="1">
+                <a:solidFill>
+                  <a:srgbClr val="1B2A4A"/>
+                </a:solidFill>
+                <a:latin typeface="Noto Sans CJK SC"/>
+              </a:rPr>
+              <a:t>主要数据来源</a:t>
+            </a:r>
+          </a:p>
+        </p:txBody>
+      </p:sp>
+      <p:sp>
+        <p:nvSpPr>
+          <p:cNvPr id="4" name="TextBox 3"/>
+          <p:cNvSpPr txBox="1"/>
+          <p:nvPr/>
+        </p:nvSpPr>
+        <p:spPr>
+          <a:xfrm>
+            <a:off x="475488" y="914400"/>
+            <a:ext cx="11247120" cy="457200"/>
+          </a:xfrm>
+          <a:prstGeom prst="rect">
+            <a:avLst/>
+          </a:prstGeom>
+          <a:noFill/>
+        </p:spPr>
+        <p:txBody>
+          <a:bodyPr wrap="square" anchor="t">
+            <a:spAutoFit/>
+          </a:bodyPr>
+          <a:lstStyle/>
+          <a:p>
+            <a:pPr algn="l">
+              <a:lnSpc>
+                <a:spcPct val="115000"/>
+              </a:lnSpc>
+              <a:spcAft>
+                <a:spcPts val="600"/>
+              </a:spcAft>
+            </a:pPr>
+            <a:r>
+              <a:rPr sz="1400" b="0">
+                <a:solidFill>
+                  <a:srgbClr val="666666"/>
+                </a:solidFill>
+                <a:latin typeface="Noto Sans CJK SC"/>
+              </a:rPr>
+              <a:t>完整 45 条参考文献见调研文档；所有定量数据经两轮原文核对</a:t>
+            </a:r>
+          </a:p>
+        </p:txBody>
+      </p:sp>
+      <p:sp>
+        <p:nvSpPr>
+          <p:cNvPr id="5" name="TextBox 4"/>
+          <p:cNvSpPr txBox="1"/>
+          <p:nvPr/>
+        </p:nvSpPr>
+        <p:spPr>
+          <a:xfrm>
+            <a:off x="548640" y="1554480"/>
+            <a:ext cx="5577840" cy="5029200"/>
+          </a:xfrm>
+          <a:prstGeom prst="rect">
+            <a:avLst/>
+          </a:prstGeom>
+          <a:noFill/>
+        </p:spPr>
+        <p:txBody>
+          <a:bodyPr wrap="square" anchor="t">
+            <a:spAutoFit/>
+          </a:bodyPr>
+          <a:lstStyle/>
+          <a:p>
+            <a:pPr algn="l">
+              <a:lnSpc>
+                <a:spcPct val="115000"/>
+              </a:lnSpc>
+              <a:spcAft>
+                <a:spcPts val="800"/>
+              </a:spcAft>
+            </a:pPr>
+            <a:r>
+              <a:rPr sz="1300" b="1">
+                <a:solidFill>
+                  <a:srgbClr val="1F77B4"/>
+                </a:solidFill>
+                <a:latin typeface="Noto Sans CJK SC"/>
+              </a:rPr>
+              <a:t>▪ 控制对比研究</a:t>
+            </a:r>
+          </a:p>
+          <a:p>
+            <a:pPr algn="l">
+              <a:lnSpc>
+                <a:spcPct val="115000"/>
+              </a:lnSpc>
+              <a:spcAft>
+                <a:spcPts val="400"/>
+              </a:spcAft>
+            </a:pPr>
+            <a:r>
+              <a:rPr sz="1150" b="0">
+                <a:solidFill>
+                  <a:srgbClr val="1B2A4A"/>
+                </a:solidFill>
+                <a:latin typeface="Noto Sans CJK SC"/>
+              </a:rPr>
+              <a:t>    – Jannaty et al., 2023, Kadikma 14(3)</a:t>
+            </a:r>
+          </a:p>
+          <a:p>
+            <a:pPr algn="l">
+              <a:lnSpc>
+                <a:spcPct val="115000"/>
+              </a:lnSpc>
+              <a:spcAft>
+                <a:spcPts val="400"/>
+              </a:spcAft>
+            </a:pPr>
+            <a:r>
+              <a:rPr sz="1150" b="0">
+                <a:solidFill>
+                  <a:srgbClr val="1B2A4A"/>
+                </a:solidFill>
+                <a:latin typeface="Noto Sans CJK SC"/>
+              </a:rPr>
+              <a:t>    – Zhang et al., 2025, Ocean Engineering 334:121592</a:t>
+            </a:r>
+          </a:p>
+          <a:p>
+            <a:pPr algn="l">
+              <a:lnSpc>
+                <a:spcPct val="115000"/>
+              </a:lnSpc>
+              <a:spcAft>
+                <a:spcPts val="400"/>
+              </a:spcAft>
+            </a:pPr>
+            <a:r>
+              <a:rPr sz="1150" b="0">
+                <a:solidFill>
+                  <a:srgbClr val="1B2A4A"/>
+                </a:solidFill>
+                <a:latin typeface="Noto Sans CJK SC"/>
+              </a:rPr>
+              <a:t>    – He et al., 2023, Ocean Engineering（船模实验）</a:t>
+            </a:r>
+          </a:p>
+          <a:p>
+            <a:pPr algn="l">
+              <a:lnSpc>
+                <a:spcPct val="115000"/>
+              </a:lnSpc>
+              <a:spcAft>
+                <a:spcPts val="400"/>
+              </a:spcAft>
+            </a:pPr>
+            <a:r>
+              <a:rPr sz="1150" b="0">
+                <a:solidFill>
+                  <a:srgbClr val="1B2A4A"/>
+                </a:solidFill>
+                <a:latin typeface="Noto Sans CJK SC"/>
+              </a:rPr>
+              <a:t>    – Zheng et al., 2025, JMSE 13(5):851（自动舵综述）</a:t>
+            </a:r>
+          </a:p>
+          <a:p>
+            <a:pPr algn="l">
+              <a:lnSpc>
+                <a:spcPct val="115000"/>
+              </a:lnSpc>
+              <a:spcAft>
+                <a:spcPts val="800"/>
+              </a:spcAft>
+            </a:pPr>
+            <a:r>
+              <a:rPr sz="1300" b="1">
+                <a:solidFill>
+                  <a:srgbClr val="1F77B4"/>
+                </a:solidFill>
+                <a:latin typeface="Noto Sans CJK SC"/>
+              </a:rPr>
+              <a:t>▪ 整定 / 实时 / 稳定性</a:t>
+            </a:r>
+          </a:p>
+          <a:p>
+            <a:pPr algn="l">
+              <a:lnSpc>
+                <a:spcPct val="115000"/>
+              </a:lnSpc>
+              <a:spcAft>
+                <a:spcPts val="400"/>
+              </a:spcAft>
+            </a:pPr>
+            <a:r>
+              <a:rPr sz="1150" b="0">
+                <a:solidFill>
+                  <a:srgbClr val="1B2A4A"/>
+                </a:solidFill>
+                <a:latin typeface="Noto Sans CJK SC"/>
+              </a:rPr>
+              <a:t>    – Christensen et al., 2025, arXiv:2509.11235</a:t>
+            </a:r>
+          </a:p>
+          <a:p>
+            <a:pPr algn="l">
+              <a:lnSpc>
+                <a:spcPct val="115000"/>
+              </a:lnSpc>
+              <a:spcAft>
+                <a:spcPts val="400"/>
+              </a:spcAft>
+            </a:pPr>
+            <a:r>
+              <a:rPr sz="1150" b="0">
+                <a:solidFill>
+                  <a:srgbClr val="1B2A4A"/>
+                </a:solidFill>
+                <a:latin typeface="Noto Sans CJK SC"/>
+              </a:rPr>
+              <a:t>    – Hu et al., 2024, JMSE 12(1):94（acados 实测）</a:t>
+            </a:r>
+          </a:p>
+          <a:p>
+            <a:pPr algn="l">
+              <a:lnSpc>
+                <a:spcPct val="115000"/>
+              </a:lnSpc>
+              <a:spcAft>
+                <a:spcPts val="400"/>
+              </a:spcAft>
+            </a:pPr>
+            <a:r>
+              <a:rPr sz="1150" b="0">
+                <a:solidFill>
+                  <a:srgbClr val="1B2A4A"/>
+                </a:solidFill>
+                <a:latin typeface="Noto Sans CJK SC"/>
+              </a:rPr>
+              <a:t>    – Mayne et al., 2000, Automatica 36(6)</a:t>
+            </a:r>
+          </a:p>
+        </p:txBody>
+      </p:sp>
+      <p:sp>
+        <p:nvSpPr>
+          <p:cNvPr id="6" name="TextBox 5"/>
+          <p:cNvSpPr txBox="1"/>
+          <p:nvPr/>
+        </p:nvSpPr>
+        <p:spPr>
+          <a:xfrm>
+            <a:off x="6309360" y="1554480"/>
+            <a:ext cx="5577840" cy="5029200"/>
+          </a:xfrm>
+          <a:prstGeom prst="rect">
+            <a:avLst/>
+          </a:prstGeom>
+          <a:noFill/>
+        </p:spPr>
+        <p:txBody>
+          <a:bodyPr wrap="square" anchor="t">
+            <a:spAutoFit/>
+          </a:bodyPr>
+          <a:lstStyle/>
+          <a:p>
+            <a:pPr algn="l">
+              <a:lnSpc>
+                <a:spcPct val="115000"/>
+              </a:lnSpc>
+              <a:spcAft>
+                <a:spcPts val="800"/>
+              </a:spcAft>
+            </a:pPr>
+            <a:r>
+              <a:rPr sz="1300" b="1">
+                <a:solidFill>
+                  <a:srgbClr val="2CA02C"/>
+                </a:solidFill>
+                <a:latin typeface="Noto Sans CJK SC"/>
+              </a:rPr>
+              <a:t>▪ 节能算法</a:t>
+            </a:r>
+          </a:p>
+          <a:p>
+            <a:pPr algn="l">
+              <a:lnSpc>
+                <a:spcPct val="115000"/>
+              </a:lnSpc>
+              <a:spcAft>
+                <a:spcPts val="400"/>
+              </a:spcAft>
+            </a:pPr>
+            <a:r>
+              <a:rPr sz="1150" b="0">
+                <a:solidFill>
+                  <a:srgbClr val="1B2A4A"/>
+                </a:solidFill>
+                <a:latin typeface="Noto Sans CJK SC"/>
+              </a:rPr>
+              <a:t>    – Pelić et al., 2023, JMSE 11(3):675</a:t>
+            </a:r>
+          </a:p>
+          <a:p>
+            <a:pPr algn="l">
+              <a:lnSpc>
+                <a:spcPct val="115000"/>
+              </a:lnSpc>
+              <a:spcAft>
+                <a:spcPts val="400"/>
+              </a:spcAft>
+            </a:pPr>
+            <a:r>
+              <a:rPr sz="1150" b="0">
+                <a:solidFill>
+                  <a:srgbClr val="1B2A4A"/>
+                </a:solidFill>
+                <a:latin typeface="Noto Sans CJK SC"/>
+              </a:rPr>
+              <a:t>    – Du et al., 2019, TR-B 121:88–114</a:t>
+            </a:r>
+          </a:p>
+          <a:p>
+            <a:pPr algn="l">
+              <a:lnSpc>
+                <a:spcPct val="115000"/>
+              </a:lnSpc>
+              <a:spcAft>
+                <a:spcPts val="400"/>
+              </a:spcAft>
+            </a:pPr>
+            <a:r>
+              <a:rPr sz="1150" b="0">
+                <a:solidFill>
+                  <a:srgbClr val="1B2A4A"/>
+                </a:solidFill>
+                <a:latin typeface="Noto Sans CJK SC"/>
+              </a:rPr>
+              <a:t>    – IMO GreenVoyage2050 / GloMEEP 官方评估</a:t>
+            </a:r>
+          </a:p>
+          <a:p>
+            <a:pPr algn="l">
+              <a:lnSpc>
+                <a:spcPct val="115000"/>
+              </a:lnSpc>
+              <a:spcAft>
+                <a:spcPts val="400"/>
+              </a:spcAft>
+            </a:pPr>
+            <a:r>
+              <a:rPr sz="1150" b="0">
+                <a:solidFill>
+                  <a:srgbClr val="1B2A4A"/>
+                </a:solidFill>
+                <a:latin typeface="Noto Sans CJK SC"/>
+              </a:rPr>
+              <a:t>    – ClassNK-NAPA 全尺度试航（2014）</a:t>
+            </a:r>
+          </a:p>
+          <a:p>
+            <a:pPr algn="l">
+              <a:lnSpc>
+                <a:spcPct val="115000"/>
+              </a:lnSpc>
+              <a:spcAft>
+                <a:spcPts val="800"/>
+              </a:spcAft>
+            </a:pPr>
+            <a:r>
+              <a:rPr sz="1300" b="1">
+                <a:solidFill>
+                  <a:srgbClr val="2CA02C"/>
+                </a:solidFill>
+                <a:latin typeface="Noto Sans CJK SC"/>
+              </a:rPr>
+              <a:t>▪ 部署案例与法规</a:t>
+            </a:r>
+          </a:p>
+          <a:p>
+            <a:pPr algn="l">
+              <a:lnSpc>
+                <a:spcPct val="115000"/>
+              </a:lnSpc>
+              <a:spcAft>
+                <a:spcPts val="400"/>
+              </a:spcAft>
+            </a:pPr>
+            <a:r>
+              <a:rPr sz="1150" b="0">
+                <a:solidFill>
+                  <a:srgbClr val="1B2A4A"/>
+                </a:solidFill>
+                <a:latin typeface="Noto Sans CJK SC"/>
+              </a:rPr>
+              <a:t>    – ABB / Wärtsilä-Eniram / Yara / Kongsberg / NAPA / DeepSea / Anschütz / Orca AI 官方资料</a:t>
+            </a:r>
+          </a:p>
+          <a:p>
+            <a:pPr algn="l">
+              <a:lnSpc>
+                <a:spcPct val="115000"/>
+              </a:lnSpc>
+              <a:spcAft>
+                <a:spcPts val="400"/>
+              </a:spcAft>
+            </a:pPr>
+            <a:r>
+              <a:rPr sz="1150" b="0">
+                <a:solidFill>
+                  <a:srgbClr val="1B2A4A"/>
+                </a:solidFill>
+                <a:latin typeface="Noto Sans CJK SC"/>
+              </a:rPr>
+              <a:t>    – IMO EEXI/CII 官方 FAQ（MEPC.328(76) 等）</a:t>
+            </a:r>
+          </a:p>
+        </p:txBody>
+      </p:sp>
+      <p:sp>
+        <p:nvSpPr>
+          <p:cNvPr id="7" name="TextBox 6"/>
+          <p:cNvSpPr txBox="1"/>
+          <p:nvPr/>
+        </p:nvSpPr>
+        <p:spPr>
+          <a:xfrm>
+            <a:off x="11475720" y="6473952"/>
+            <a:ext cx="640080" cy="320040"/>
+          </a:xfrm>
+          <a:prstGeom prst="rect">
+            <a:avLst/>
+          </a:prstGeom>
+          <a:noFill/>
+        </p:spPr>
+        <p:txBody>
+          <a:bodyPr wrap="square" anchor="t">
+            <a:spAutoFit/>
+          </a:bodyPr>
+          <a:lstStyle/>
+          <a:p>
+            <a:pPr algn="r">
+              <a:lnSpc>
+                <a:spcPct val="115000"/>
+              </a:lnSpc>
+              <a:spcAft>
+                <a:spcPts val="600"/>
+              </a:spcAft>
+            </a:pPr>
+            <a:r>
+              <a:rPr sz="1100" b="0">
+                <a:solidFill>
+                  <a:srgbClr val="666666"/>
+                </a:solidFill>
+                <a:latin typeface="Noto Sans CJK SC"/>
+              </a:rPr>
+              <a:t>13 / 14</a:t>
+            </a:r>
+          </a:p>
+        </p:txBody>
+      </p:sp>
+    </p:spTree>
+  </p:cSld>
+  <p:clrMapOvr>
+    <a:masterClrMapping/>
+  </p:clrMapOvr>
+</p:sld>
+</file>
+
+<file path=ppt/slides/slide14.xml><?xml version="1.0" encoding="utf-8"?>
 <p:sld xmlns:a="http://schemas.openxmlformats.org/drawingml/2006/main" xmlns:p="http://schemas.openxmlformats.org/presentationml/2006/main" xmlns:r="http://schemas.openxmlformats.org/officeDocument/2006/relationships">
   <p:cSld>
     <p:spTree>
@@ -5228,6 +5911,48 @@
           </a:p>
         </p:txBody>
       </p:sp>
+      <p:sp>
+        <p:nvSpPr>
+          <p:cNvPr id="5" name="TextBox 4"/>
+          <p:cNvSpPr txBox="1"/>
+          <p:nvPr/>
+        </p:nvSpPr>
+        <p:spPr>
+          <a:xfrm>
+            <a:off x="11475720" y="6473952"/>
+            <a:ext cx="640080" cy="320040"/>
+          </a:xfrm>
+          <a:prstGeom prst="rect">
+            <a:avLst/>
+          </a:prstGeom>
+          <a:noFill/>
+        </p:spPr>
+        <p:txBody>
+          <a:bodyPr wrap="square" anchor="t">
+            <a:spAutoFit/>
+          </a:bodyPr>
+          <a:lstStyle/>
+          <a:p>
+            <a:pPr algn="r">
+              <a:lnSpc>
+                <a:spcPct val="115000"/>
+              </a:lnSpc>
+              <a:spcAft>
+                <a:spcPts val="600"/>
+              </a:spcAft>
+            </a:pPr>
+            <a:r>
+              <a:rPr sz="1100" b="0">
+                <a:solidFill>
+                  <a:srgbClr val="666666"/>
+                </a:solidFill>
+                <a:latin typeface="Noto Sans CJK SC"/>
+              </a:rPr>
+              <a:t>2 / 14</a:t>
+            </a:r>
+          </a:p>
+        </p:txBody>
+      </p:sp>
     </p:spTree>
   </p:cSld>
   <p:clrMapOvr>
@@ -5524,7 +6249,7 @@
                 </a:solidFill>
                 <a:latin typeface="Noto Sans CJK SC"/>
               </a:rPr>
-              <a:t>    – 嵌入式 QP 求解器成熟：实测 7 ms @ 20 Hz（acados）</a:t>
+              <a:t>    – 嵌入式 QP 求解器成熟：水下机器人实测 7 ms @ 20 Hz（acados，JMSE 2024）</a:t>
             </a:r>
           </a:p>
           <a:p>
@@ -5629,6 +6354,48 @@
                 <a:latin typeface="Noto Sans CJK SC"/>
               </a:rPr>
               <a:t>船舶节能分层架构总览</a:t>
+            </a:r>
+          </a:p>
+        </p:txBody>
+      </p:sp>
+      <p:sp>
+        <p:nvSpPr>
+          <p:cNvPr id="8" name="TextBox 7"/>
+          <p:cNvSpPr txBox="1"/>
+          <p:nvPr/>
+        </p:nvSpPr>
+        <p:spPr>
+          <a:xfrm>
+            <a:off x="11475720" y="6473952"/>
+            <a:ext cx="640080" cy="320040"/>
+          </a:xfrm>
+          <a:prstGeom prst="rect">
+            <a:avLst/>
+          </a:prstGeom>
+          <a:noFill/>
+        </p:spPr>
+        <p:txBody>
+          <a:bodyPr wrap="square" anchor="t">
+            <a:spAutoFit/>
+          </a:bodyPr>
+          <a:lstStyle/>
+          <a:p>
+            <a:pPr algn="r">
+              <a:lnSpc>
+                <a:spcPct val="115000"/>
+              </a:lnSpc>
+              <a:spcAft>
+                <a:spcPts val="600"/>
+              </a:spcAft>
+            </a:pPr>
+            <a:r>
+              <a:rPr sz="1100" b="0">
+                <a:solidFill>
+                  <a:srgbClr val="666666"/>
+                </a:solidFill>
+                <a:latin typeface="Noto Sans CJK SC"/>
+              </a:rPr>
+              <a:t>3 / 14</a:t>
             </a:r>
           </a:p>
         </p:txBody>
@@ -5992,6 +6759,48 @@
                 <a:latin typeface="Noto Sans CJK SC"/>
               </a:rPr>
               <a:t>    – 代价函数可计入操舵能量（省油）</a:t>
+            </a:r>
+          </a:p>
+        </p:txBody>
+      </p:sp>
+      <p:sp>
+        <p:nvSpPr>
+          <p:cNvPr id="7" name="TextBox 6"/>
+          <p:cNvSpPr txBox="1"/>
+          <p:nvPr/>
+        </p:nvSpPr>
+        <p:spPr>
+          <a:xfrm>
+            <a:off x="11475720" y="6473952"/>
+            <a:ext cx="640080" cy="320040"/>
+          </a:xfrm>
+          <a:prstGeom prst="rect">
+            <a:avLst/>
+          </a:prstGeom>
+          <a:noFill/>
+        </p:spPr>
+        <p:txBody>
+          <a:bodyPr wrap="square" anchor="t">
+            <a:spAutoFit/>
+          </a:bodyPr>
+          <a:lstStyle/>
+          <a:p>
+            <a:pPr algn="r">
+              <a:lnSpc>
+                <a:spcPct val="115000"/>
+              </a:lnSpc>
+              <a:spcAft>
+                <a:spcPts val="600"/>
+              </a:spcAft>
+            </a:pPr>
+            <a:r>
+              <a:rPr sz="1100" b="0">
+                <a:solidFill>
+                  <a:srgbClr val="666666"/>
+                </a:solidFill>
+                <a:latin typeface="Noto Sans CJK SC"/>
+              </a:rPr>
+              <a:t>4 / 14</a:t>
             </a:r>
           </a:p>
         </p:txBody>
@@ -6620,7 +7429,68 @@
                 </a:solidFill>
                 <a:latin typeface="Noto Sans CJK SC"/>
               </a:rPr>
-              <a:t>⚠ 证据边界：对比几乎全部来自仿真/水池船模；预测模型与仿真模型同源会高估 MPC 优势（He et al., 2023 明确警示）</a:t>
+              <a:t>［证据边界］对比几乎全部来自仿真/水池船模；预测模型与仿真模型同源会高估 MPC 优势（He 2023 警示）；</a:t>
+            </a:r>
+          </a:p>
+          <a:p>
+            <a:pPr algn="l">
+              <a:lnSpc>
+                <a:spcPct val="115000"/>
+              </a:lnSpc>
+              <a:spcAft>
+                <a:spcPts val="600"/>
+              </a:spcAft>
+            </a:pPr>
+            <a:r>
+              <a:rPr sz="1300" b="0">
+                <a:solidFill>
+                  <a:srgbClr val="D62728"/>
+                </a:solidFill>
+                <a:latin typeface="Noto Sans CJK SC"/>
+              </a:rPr>
+              <a:t>Zhang 2025 中舵机控制投入指标（AACE）在直道/弯道工况 PID 反优——「占优」限跟踪精度维度</a:t>
+            </a:r>
+          </a:p>
+        </p:txBody>
+      </p:sp>
+      <p:sp>
+        <p:nvSpPr>
+          <p:cNvPr id="8" name="TextBox 7"/>
+          <p:cNvSpPr txBox="1"/>
+          <p:nvPr/>
+        </p:nvSpPr>
+        <p:spPr>
+          <a:xfrm>
+            <a:off x="11475720" y="6473952"/>
+            <a:ext cx="640080" cy="320040"/>
+          </a:xfrm>
+          <a:prstGeom prst="rect">
+            <a:avLst/>
+          </a:prstGeom>
+          <a:noFill/>
+        </p:spPr>
+        <p:txBody>
+          <a:bodyPr wrap="square" anchor="t">
+            <a:spAutoFit/>
+          </a:bodyPr>
+          <a:lstStyle/>
+          <a:p>
+            <a:pPr algn="r">
+              <a:lnSpc>
+                <a:spcPct val="115000"/>
+              </a:lnSpc>
+              <a:spcAft>
+                <a:spcPts val="600"/>
+              </a:spcAft>
+            </a:pPr>
+            <a:r>
+              <a:rPr sz="1100" b="0">
+                <a:solidFill>
+                  <a:srgbClr val="666666"/>
+                </a:solidFill>
+                <a:latin typeface="Noto Sans CJK SC"/>
+              </a:rPr>
+              <a:t>5 / 14</a:t>
             </a:r>
           </a:p>
         </p:txBody>
@@ -6984,6 +7854,48 @@
                 <a:latin typeface="Noto Sans CJK SC"/>
               </a:rPr>
               <a:t>▪ 注：雷达图为基于文献证据的主观打分示意</a:t>
+            </a:r>
+          </a:p>
+        </p:txBody>
+      </p:sp>
+      <p:sp>
+        <p:nvSpPr>
+          <p:cNvPr id="7" name="TextBox 6"/>
+          <p:cNvSpPr txBox="1"/>
+          <p:nvPr/>
+        </p:nvSpPr>
+        <p:spPr>
+          <a:xfrm>
+            <a:off x="11475720" y="6473952"/>
+            <a:ext cx="640080" cy="320040"/>
+          </a:xfrm>
+          <a:prstGeom prst="rect">
+            <a:avLst/>
+          </a:prstGeom>
+          <a:noFill/>
+        </p:spPr>
+        <p:txBody>
+          <a:bodyPr wrap="square" anchor="t">
+            <a:spAutoFit/>
+          </a:bodyPr>
+          <a:lstStyle/>
+          <a:p>
+            <a:pPr algn="r">
+              <a:lnSpc>
+                <a:spcPct val="115000"/>
+              </a:lnSpc>
+              <a:spcAft>
+                <a:spcPts val="600"/>
+              </a:spcAft>
+            </a:pPr>
+            <a:r>
+              <a:rPr sz="1100" b="0">
+                <a:solidFill>
+                  <a:srgbClr val="666666"/>
+                </a:solidFill>
+                <a:latin typeface="Noto Sans CJK SC"/>
+              </a:rPr>
+              <a:t>6 / 14</a:t>
             </a:r>
           </a:p>
         </p:txBody>
@@ -7641,6 +8553,48 @@
           </a:p>
         </p:txBody>
       </p:sp>
+      <p:sp>
+        <p:nvSpPr>
+          <p:cNvPr id="6" name="TextBox 5"/>
+          <p:cNvSpPr txBox="1"/>
+          <p:nvPr/>
+        </p:nvSpPr>
+        <p:spPr>
+          <a:xfrm>
+            <a:off x="11475720" y="6473952"/>
+            <a:ext cx="640080" cy="320040"/>
+          </a:xfrm>
+          <a:prstGeom prst="rect">
+            <a:avLst/>
+          </a:prstGeom>
+          <a:noFill/>
+        </p:spPr>
+        <p:txBody>
+          <a:bodyPr wrap="square" anchor="t">
+            <a:spAutoFit/>
+          </a:bodyPr>
+          <a:lstStyle/>
+          <a:p>
+            <a:pPr algn="r">
+              <a:lnSpc>
+                <a:spcPct val="115000"/>
+              </a:lnSpc>
+              <a:spcAft>
+                <a:spcPts val="600"/>
+              </a:spcAft>
+            </a:pPr>
+            <a:r>
+              <a:rPr sz="1100" b="0">
+                <a:solidFill>
+                  <a:srgbClr val="666666"/>
+                </a:solidFill>
+                <a:latin typeface="Noto Sans CJK SC"/>
+              </a:rPr>
+              <a:t>7 / 14</a:t>
+            </a:r>
+          </a:p>
+        </p:txBody>
+      </p:sp>
     </p:spTree>
   </p:cSld>
   <p:clrMapOvr>
@@ -7810,6 +8764,48 @@
           </a:prstGeom>
         </p:spPr>
       </p:pic>
+      <p:sp>
+        <p:nvSpPr>
+          <p:cNvPr id="6" name="TextBox 5"/>
+          <p:cNvSpPr txBox="1"/>
+          <p:nvPr/>
+        </p:nvSpPr>
+        <p:spPr>
+          <a:xfrm>
+            <a:off x="11475720" y="6473952"/>
+            <a:ext cx="640080" cy="320040"/>
+          </a:xfrm>
+          <a:prstGeom prst="rect">
+            <a:avLst/>
+          </a:prstGeom>
+          <a:noFill/>
+        </p:spPr>
+        <p:txBody>
+          <a:bodyPr wrap="square" anchor="t">
+            <a:spAutoFit/>
+          </a:bodyPr>
+          <a:lstStyle/>
+          <a:p>
+            <a:pPr algn="r">
+              <a:lnSpc>
+                <a:spcPct val="115000"/>
+              </a:lnSpc>
+              <a:spcAft>
+                <a:spcPts val="600"/>
+              </a:spcAft>
+            </a:pPr>
+            <a:r>
+              <a:rPr sz="1100" b="0">
+                <a:solidFill>
+                  <a:srgbClr val="666666"/>
+                </a:solidFill>
+                <a:latin typeface="Noto Sans CJK SC"/>
+              </a:rPr>
+              <a:t>8 / 14</a:t>
+            </a:r>
+          </a:p>
+        </p:txBody>
+      </p:sp>
     </p:spTree>
   </p:cSld>
   <p:clrMapOvr>
@@ -8439,6 +9435,48 @@
           </a:graphicData>
         </a:graphic>
       </p:graphicFrame>
+      <p:sp>
+        <p:nvSpPr>
+          <p:cNvPr id="6" name="TextBox 5"/>
+          <p:cNvSpPr txBox="1"/>
+          <p:nvPr/>
+        </p:nvSpPr>
+        <p:spPr>
+          <a:xfrm>
+            <a:off x="11475720" y="6473952"/>
+            <a:ext cx="640080" cy="320040"/>
+          </a:xfrm>
+          <a:prstGeom prst="rect">
+            <a:avLst/>
+          </a:prstGeom>
+          <a:noFill/>
+        </p:spPr>
+        <p:txBody>
+          <a:bodyPr wrap="square" anchor="t">
+            <a:spAutoFit/>
+          </a:bodyPr>
+          <a:lstStyle/>
+          <a:p>
+            <a:pPr algn="r">
+              <a:lnSpc>
+                <a:spcPct val="115000"/>
+              </a:lnSpc>
+              <a:spcAft>
+                <a:spcPts val="600"/>
+              </a:spcAft>
+            </a:pPr>
+            <a:r>
+              <a:rPr sz="1100" b="0">
+                <a:solidFill>
+                  <a:srgbClr val="666666"/>
+                </a:solidFill>
+                <a:latin typeface="Noto Sans CJK SC"/>
+              </a:rPr>
+              <a:t>9 / 14</a:t>
+            </a:r>
+          </a:p>
+        </p:txBody>
+      </p:sp>
     </p:spTree>
   </p:cSld>
   <p:clrMapOvr>

--- a/docs/ship_energy_research/船舶控制与节能算法调研汇报.pptx
+++ b/docs/ship_energy_research/船舶控制与节能算法调研汇报.pptx
@@ -19,6 +19,12 @@
     <p:sldId id="267" r:id="rId18"/>
     <p:sldId id="268" r:id="rId19"/>
     <p:sldId id="269" r:id="rId20"/>
+    <p:sldId id="270" r:id="rId21"/>
+    <p:sldId id="271" r:id="rId22"/>
+    <p:sldId id="272" r:id="rId23"/>
+    <p:sldId id="273" r:id="rId24"/>
+    <p:sldId id="274" r:id="rId25"/>
+    <p:sldId id="275" r:id="rId26"/>
   </p:sldIdLst>
   <p:sldSz cx="12191695" cy="6858000" type="screen4x3"/>
   <p:notesSz cx="6858000" cy="9144000"/>
@@ -3368,7 +3374,7 @@
                 </a:solidFill>
                 <a:latin typeface="Noto Sans CJK SC"/>
               </a:rPr>
-              <a:t>节能方案优缺点（二）：操作层与控制层</a:t>
+              <a:t>MPC vs PD 部署优缺点小结</a:t>
             </a:r>
           </a:p>
         </p:txBody>
@@ -3383,7 +3389,7 @@
         </p:nvGraphicFramePr>
         <p:xfrm>
           <a:off x="457200" y="1463040"/>
-          <a:ext cx="11338559" cy="4846320"/>
+          <a:ext cx="11338558" cy="3566160"/>
         </p:xfrm>
         <a:graphic>
           <a:graphicData uri="http://schemas.openxmlformats.org/drawingml/2006/table">
@@ -3392,30 +3398,29 @@
                 <a:tableStyleId>{5C22544A-7EE6-4342-B048-85BDC9FD1C3A}</a:tableStyleId>
               </a:tblPr>
               <a:tblGrid>
-                <a:gridCol w="1939490"/>
-                <a:gridCol w="3878981"/>
-                <a:gridCol w="2685448"/>
-                <a:gridCol w="2834640"/>
+                <a:gridCol w="1790298"/>
+                <a:gridCol w="4376286"/>
+                <a:gridCol w="5171974"/>
               </a:tblGrid>
-              <a:tr h="1211580">
-                <a:tc>
-                  <a:txBody>
-                    <a:bodyPr/>
-                    <a:lstStyle/>
-                    <a:p>
-                      <a:pPr>
-                        <a:lnSpc>
-                          <a:spcPct val="105000"/>
-                        </a:lnSpc>
-                      </a:pPr>
-                      <a:r>
-                        <a:rPr sz="1250" b="1">
+              <a:tr h="594360">
+                <a:tc>
+                  <a:txBody>
+                    <a:bodyPr/>
+                    <a:lstStyle/>
+                    <a:p>
+                      <a:pPr>
+                        <a:lnSpc>
+                          <a:spcPct val="105000"/>
+                        </a:lnSpc>
+                      </a:pPr>
+                      <a:r>
+                        <a:rPr sz="1350" b="1">
                           <a:solidFill>
                             <a:srgbClr val="FFFFFF"/>
                           </a:solidFill>
                           <a:latin typeface="Noto Sans CJK SC"/>
                         </a:rPr>
-                        <a:t>方案</a:t>
+                        <a:t>维度</a:t>
                       </a:r>
                     </a:p>
                   </a:txBody>
@@ -3436,13 +3441,13 @@
                         </a:lnSpc>
                       </a:pPr>
                       <a:r>
-                        <a:rPr sz="1250" b="1">
+                        <a:rPr sz="1350" b="1">
                           <a:solidFill>
                             <a:srgbClr val="FFFFFF"/>
                           </a:solidFill>
                           <a:latin typeface="Noto Sans CJK SC"/>
                         </a:rPr>
-                        <a:t>代表数据（已核对）</a:t>
+                        <a:t>传统 PD/PID</a:t>
                       </a:r>
                     </a:p>
                   </a:txBody>
@@ -3463,13 +3468,13 @@
                         </a:lnSpc>
                       </a:pPr>
                       <a:r>
-                        <a:rPr sz="1250" b="1">
+                        <a:rPr sz="1350" b="1">
                           <a:solidFill>
                             <a:srgbClr val="FFFFFF"/>
                           </a:solidFill>
                           <a:latin typeface="Noto Sans CJK SC"/>
                         </a:rPr>
-                        <a:t>优点</a:t>
+                        <a:t>MPC</a:t>
                       </a:r>
                     </a:p>
                   </a:txBody>
@@ -3479,69 +3484,26 @@
                     </a:solidFill>
                   </a:tcPr>
                 </a:tc>
-                <a:tc>
-                  <a:txBody>
-                    <a:bodyPr/>
-                    <a:lstStyle/>
-                    <a:p>
-                      <a:pPr>
-                        <a:lnSpc>
-                          <a:spcPct val="105000"/>
-                        </a:lnSpc>
-                      </a:pPr>
-                      <a:r>
-                        <a:rPr sz="1250" b="1">
-                          <a:solidFill>
-                            <a:srgbClr val="FFFFFF"/>
-                          </a:solidFill>
-                          <a:latin typeface="Noto Sans CJK SC"/>
-                        </a:rPr>
-                        <a:t>缺点</a:t>
-                      </a:r>
-                    </a:p>
-                  </a:txBody>
-                  <a:tcPr marL="54864" marR="54864" marT="27432" marB="27432" anchor="ctr">
-                    <a:solidFill>
-                      <a:srgbClr val="1F77B4"/>
-                    </a:solidFill>
-                  </a:tcPr>
-                </a:tc>
               </a:tr>
-              <a:tr h="1211580">
-                <a:tc>
-                  <a:txBody>
-                    <a:bodyPr/>
-                    <a:lstStyle/>
-                    <a:p>
-                      <a:pPr>
-                        <a:lnSpc>
-                          <a:spcPct val="105000"/>
-                        </a:lnSpc>
-                      </a:pPr>
-                      <a:r>
-                        <a:rPr sz="1200" b="0">
-                          <a:solidFill>
-                            <a:srgbClr val="1B2A4A"/>
-                          </a:solidFill>
-                          <a:latin typeface="Noto Sans CJK SC"/>
-                        </a:rPr>
-                        <a:t>MPC 能量管理</a:t>
-                      </a:r>
-                    </a:p>
-                    <a:p>
-                      <a:pPr>
-                        <a:lnSpc>
-                          <a:spcPct val="105000"/>
-                        </a:lnSpc>
-                      </a:pPr>
-                      <a:r>
-                        <a:rPr sz="1200" b="0">
-                          <a:solidFill>
-                            <a:srgbClr val="1B2A4A"/>
-                          </a:solidFill>
-                          <a:latin typeface="Noto Sans CJK SC"/>
-                        </a:rPr>
-                        <a:t>(混合动力 EMS)</a:t>
+              <a:tr h="594360">
+                <a:tc>
+                  <a:txBody>
+                    <a:bodyPr/>
+                    <a:lstStyle/>
+                    <a:p>
+                      <a:pPr>
+                        <a:lnSpc>
+                          <a:spcPct val="105000"/>
+                        </a:lnSpc>
+                      </a:pPr>
+                      <a:r>
+                        <a:rPr sz="1300" b="0">
+                          <a:solidFill>
+                            <a:srgbClr val="1B2A4A"/>
+                          </a:solidFill>
+                          <a:latin typeface="Noto Sans CJK SC"/>
+                        </a:rPr>
+                        <a:t>控制效果</a:t>
                       </a:r>
                     </a:p>
                   </a:txBody>
@@ -3558,29 +3520,13 @@
                         </a:lnSpc>
                       </a:pPr>
                       <a:r>
-                        <a:rPr sz="1200" b="0">
-                          <a:solidFill>
-                            <a:srgbClr val="1B2A4A"/>
-                          </a:solidFill>
-                          <a:latin typeface="Noto Sans CJK SC"/>
-                        </a:rPr>
-                        <a:t>双层 MPC 比传统 MPC 再省 17.2%（Zhang 2022）</a:t>
-                      </a:r>
-                    </a:p>
-                    <a:p>
-                      <a:pPr>
-                        <a:lnSpc>
-                          <a:spcPct val="105000"/>
-                        </a:lnSpc>
-                      </a:pPr>
-                      <a:r>
-                        <a:rPr sz="1200" b="0">
-                          <a:solidFill>
-                            <a:srgbClr val="1B2A4A"/>
-                          </a:solidFill>
-                          <a:latin typeface="Noto Sans CJK SC"/>
-                        </a:rPr>
-                        <a:t>客滚船 MPC-EMS 节油 4.85%（周妍 2024）</a:t>
+                        <a:rPr sz="1300" b="0">
+                          <a:solidFill>
+                            <a:srgbClr val="1B2A4A"/>
+                          </a:solidFill>
+                          <a:latin typeface="Noto Sans CJK SC"/>
+                        </a:rPr>
+                        <a:t>无前瞻、海浪下易无效操舵</a:t>
                       </a:r>
                     </a:p>
                   </a:txBody>
@@ -3597,77 +3543,38 @@
                         </a:lnSpc>
                       </a:pPr>
                       <a:r>
-                        <a:rPr sz="1200" b="0">
-                          <a:solidFill>
-                            <a:srgbClr val="1B2A4A"/>
-                          </a:solidFill>
-                          <a:latin typeface="Noto Sans CJK SC"/>
-                        </a:rPr>
-                        <a:t>滚动时域天然适合负载预测；多目标可编码</a:t>
+                        <a:rPr sz="1300" b="0">
+                          <a:solidFill>
+                            <a:srgbClr val="1B2A4A"/>
+                          </a:solidFill>
+                          <a:latin typeface="Noto Sans CJK SC"/>
+                        </a:rPr>
+                        <a:t>响应快、超调小、抗扰强、特定工况舵动作更少</a:t>
                       </a:r>
                     </a:p>
                   </a:txBody>
                   <a:tcPr marL="54864" marR="54864" marT="27432" marB="27432" anchor="ctr"/>
                 </a:tc>
-                <a:tc>
-                  <a:txBody>
-                    <a:bodyPr/>
-                    <a:lstStyle/>
-                    <a:p>
-                      <a:pPr>
-                        <a:lnSpc>
-                          <a:spcPct val="105000"/>
-                        </a:lnSpc>
-                      </a:pPr>
-                      <a:r>
-                        <a:rPr sz="1200" b="0">
-                          <a:solidFill>
-                            <a:srgbClr val="1B2A4A"/>
-                          </a:solidFill>
-                          <a:latin typeface="Noto Sans CJK SC"/>
-                        </a:rPr>
-                        <a:t>全部仿真验证无实船数据；仅限混合动力船型</a:t>
-                      </a:r>
-                    </a:p>
-                  </a:txBody>
-                  <a:tcPr marL="54864" marR="54864" marT="27432" marB="27432" anchor="ctr"/>
-                </a:tc>
               </a:tr>
-              <a:tr h="1211580">
-                <a:tc>
-                  <a:txBody>
-                    <a:bodyPr/>
-                    <a:lstStyle/>
-                    <a:p>
-                      <a:pPr>
-                        <a:lnSpc>
-                          <a:spcPct val="105000"/>
-                        </a:lnSpc>
-                      </a:pPr>
-                      <a:r>
-                        <a:rPr sz="1200" b="0">
-                          <a:solidFill>
-                            <a:srgbClr val="1B2A4A"/>
-                          </a:solidFill>
-                          <a:latin typeface="Noto Sans CJK SC"/>
-                        </a:rPr>
-                        <a:t>自动舵节能</a:t>
-                      </a:r>
-                    </a:p>
-                    <a:p>
-                      <a:pPr>
-                        <a:lnSpc>
-                          <a:spcPct val="105000"/>
-                        </a:lnSpc>
-                      </a:pPr>
-                      <a:r>
-                        <a:rPr sz="1200" b="0">
-                          <a:solidFill>
-                            <a:srgbClr val="1B2A4A"/>
-                          </a:solidFill>
-                          <a:latin typeface="Noto Sans CJK SC"/>
-                        </a:rPr>
-                        <a:t>(减少无效操舵)</a:t>
+              <a:tr h="594360">
+                <a:tc>
+                  <a:txBody>
+                    <a:bodyPr/>
+                    <a:lstStyle/>
+                    <a:p>
+                      <a:pPr>
+                        <a:lnSpc>
+                          <a:spcPct val="105000"/>
+                        </a:lnSpc>
+                      </a:pPr>
+                      <a:r>
+                        <a:rPr sz="1300" b="0">
+                          <a:solidFill>
+                            <a:srgbClr val="1B2A4A"/>
+                          </a:solidFill>
+                          <a:latin typeface="Noto Sans CJK SC"/>
+                        </a:rPr>
+                        <a:t>调试难度</a:t>
                       </a:r>
                     </a:p>
                   </a:txBody>
@@ -3688,29 +3595,13 @@
                         </a:lnSpc>
                       </a:pPr>
                       <a:r>
-                        <a:rPr sz="1200" b="0">
-                          <a:solidFill>
-                            <a:srgbClr val="1B2A4A"/>
-                          </a:solidFill>
-                          <a:latin typeface="Noto Sans CJK SC"/>
-                        </a:rPr>
-                        <a:t>IMO：0.1–1.0%；ABS：最高 1%、改造成本 $2 万</a:t>
-                      </a:r>
-                    </a:p>
-                    <a:p>
-                      <a:pPr>
-                        <a:lnSpc>
-                          <a:spcPct val="105000"/>
-                        </a:lnSpc>
-                      </a:pPr>
-                      <a:r>
-                        <a:rPr sz="1200" b="0">
-                          <a:solidFill>
-                            <a:srgbClr val="1B2A4A"/>
-                          </a:solidFill>
-                          <a:latin typeface="Noto Sans CJK SC"/>
-                        </a:rPr>
-                        <a:t>MRAS 实船试验 1–3%（van Amerongen 经典）</a:t>
+                        <a:rPr sz="1300" b="0">
+                          <a:solidFill>
+                            <a:srgbClr val="1B2A4A"/>
+                          </a:solidFill>
+                          <a:latin typeface="Noto Sans CJK SC"/>
+                        </a:rPr>
+                        <a:t>整定规则成熟，船员可现场整定</a:t>
                       </a:r>
                     </a:p>
                   </a:txBody>
@@ -3731,13 +3622,13 @@
                         </a:lnSpc>
                       </a:pPr>
                       <a:r>
-                        <a:rPr sz="1200" b="0">
-                          <a:solidFill>
-                            <a:srgbClr val="1B2A4A"/>
-                          </a:solidFill>
-                          <a:latin typeface="Noto Sans CJK SC"/>
-                        </a:rPr>
-                        <a:t>实施成本最低（软件级）；兼降舵机磨损</a:t>
+                        <a:rPr sz="1300" b="0">
+                          <a:solidFill>
+                            <a:srgbClr val="1B2A4A"/>
+                          </a:solidFill>
+                          <a:latin typeface="Noto Sans CJK SC"/>
+                        </a:rPr>
+                        <a:t>模型辨识是硬门槛；权重多靠 trial-and-error</a:t>
                       </a:r>
                     </a:p>
                   </a:txBody>
@@ -3747,24 +3638,97 @@
                     </a:solidFill>
                   </a:tcPr>
                 </a:tc>
-                <a:tc>
-                  <a:txBody>
-                    <a:bodyPr/>
-                    <a:lstStyle/>
-                    <a:p>
-                      <a:pPr>
-                        <a:lnSpc>
-                          <a:spcPct val="105000"/>
-                        </a:lnSpc>
-                      </a:pPr>
-                      <a:r>
-                        <a:rPr sz="1200" b="0">
-                          <a:solidFill>
-                            <a:srgbClr val="1B2A4A"/>
-                          </a:solidFill>
-                          <a:latin typeface="Noto Sans CJK SC"/>
-                        </a:rPr>
-                        <a:t>单项幅度最小；收益依赖海况</a:t>
+              </a:tr>
+              <a:tr h="594360">
+                <a:tc>
+                  <a:txBody>
+                    <a:bodyPr/>
+                    <a:lstStyle/>
+                    <a:p>
+                      <a:pPr>
+                        <a:lnSpc>
+                          <a:spcPct val="105000"/>
+                        </a:lnSpc>
+                      </a:pPr>
+                      <a:r>
+                        <a:rPr sz="1300" b="0">
+                          <a:solidFill>
+                            <a:srgbClr val="1B2A4A"/>
+                          </a:solidFill>
+                          <a:latin typeface="Noto Sans CJK SC"/>
+                        </a:rPr>
+                        <a:t>实时计算</a:t>
+                      </a:r>
+                    </a:p>
+                  </a:txBody>
+                  <a:tcPr marL="54864" marR="54864" marT="27432" marB="27432" anchor="ctr"/>
+                </a:tc>
+                <a:tc>
+                  <a:txBody>
+                    <a:bodyPr/>
+                    <a:lstStyle/>
+                    <a:p>
+                      <a:pPr>
+                        <a:lnSpc>
+                          <a:spcPct val="105000"/>
+                        </a:lnSpc>
+                      </a:pPr>
+                      <a:r>
+                        <a:rPr sz="1300" b="0">
+                          <a:solidFill>
+                            <a:srgbClr val="1B2A4A"/>
+                          </a:solidFill>
+                          <a:latin typeface="Noto Sans CJK SC"/>
+                        </a:rPr>
+                        <a:t>几次乘加，单片机即可</a:t>
+                      </a:r>
+                    </a:p>
+                  </a:txBody>
+                  <a:tcPr marL="54864" marR="54864" marT="27432" marB="27432" anchor="ctr"/>
+                </a:tc>
+                <a:tc>
+                  <a:txBody>
+                    <a:bodyPr/>
+                    <a:lstStyle/>
+                    <a:p>
+                      <a:pPr>
+                        <a:lnSpc>
+                          <a:spcPct val="105000"/>
+                        </a:lnSpc>
+                      </a:pPr>
+                      <a:r>
+                        <a:rPr sz="1300" b="0">
+                          <a:solidFill>
+                            <a:srgbClr val="1B2A4A"/>
+                          </a:solidFill>
+                          <a:latin typeface="Noto Sans CJK SC"/>
+                        </a:rPr>
+                        <a:t>每周期解 QP/NLP；船舶慢动态下可行（实测 7 ms）</a:t>
+                      </a:r>
+                    </a:p>
+                  </a:txBody>
+                  <a:tcPr marL="54864" marR="54864" marT="27432" marB="27432" anchor="ctr"/>
+                </a:tc>
+              </a:tr>
+              <a:tr h="594360">
+                <a:tc>
+                  <a:txBody>
+                    <a:bodyPr/>
+                    <a:lstStyle/>
+                    <a:p>
+                      <a:pPr>
+                        <a:lnSpc>
+                          <a:spcPct val="105000"/>
+                        </a:lnSpc>
+                      </a:pPr>
+                      <a:r>
+                        <a:rPr sz="1300" b="0">
+                          <a:solidFill>
+                            <a:srgbClr val="1B2A4A"/>
+                          </a:solidFill>
+                          <a:latin typeface="Noto Sans CJK SC"/>
+                        </a:rPr>
+                        <a:t>约束/安全</a:t>
                       </a:r>
                     </a:p>
                   </a:txBody>
@@ -3774,42 +3738,80 @@
                     </a:solidFill>
                   </a:tcPr>
                 </a:tc>
+                <a:tc>
+                  <a:txBody>
+                    <a:bodyPr/>
+                    <a:lstStyle/>
+                    <a:p>
+                      <a:pPr>
+                        <a:lnSpc>
+                          <a:spcPct val="105000"/>
+                        </a:lnSpc>
+                      </a:pPr>
+                      <a:r>
+                        <a:rPr sz="1300" b="0">
+                          <a:solidFill>
+                            <a:srgbClr val="1B2A4A"/>
+                          </a:solidFill>
+                          <a:latin typeface="Noto Sans CJK SC"/>
+                        </a:rPr>
+                        <a:t>事后饱和截断，约束下退化</a:t>
+                      </a:r>
+                    </a:p>
+                  </a:txBody>
+                  <a:tcPr marL="54864" marR="54864" marT="27432" marB="27432" anchor="ctr">
+                    <a:solidFill>
+                      <a:srgbClr val="EEF3FA"/>
+                    </a:solidFill>
+                  </a:tcPr>
+                </a:tc>
+                <a:tc>
+                  <a:txBody>
+                    <a:bodyPr/>
+                    <a:lstStyle/>
+                    <a:p>
+                      <a:pPr>
+                        <a:lnSpc>
+                          <a:spcPct val="105000"/>
+                        </a:lnSpc>
+                      </a:pPr>
+                      <a:r>
+                        <a:rPr sz="1300" b="0">
+                          <a:solidFill>
+                            <a:srgbClr val="1B2A4A"/>
+                          </a:solidFill>
+                          <a:latin typeface="Noto Sans CJK SC"/>
+                        </a:rPr>
+                        <a:t>舵角/舵速约束显式满足；稳定性需专门构造</a:t>
+                      </a:r>
+                    </a:p>
+                  </a:txBody>
+                  <a:tcPr marL="54864" marR="54864" marT="27432" marB="27432" anchor="ctr">
+                    <a:solidFill>
+                      <a:srgbClr val="EEF3FA"/>
+                    </a:solidFill>
+                  </a:tcPr>
+                </a:tc>
               </a:tr>
-              <a:tr h="1211580">
-                <a:tc>
-                  <a:txBody>
-                    <a:bodyPr/>
-                    <a:lstStyle/>
-                    <a:p>
-                      <a:pPr>
-                        <a:lnSpc>
-                          <a:spcPct val="105000"/>
-                        </a:lnSpc>
-                      </a:pPr>
-                      <a:r>
-                        <a:rPr sz="1200" b="0">
-                          <a:solidFill>
-                            <a:srgbClr val="1B2A4A"/>
-                          </a:solidFill>
-                          <a:latin typeface="Noto Sans CJK SC"/>
-                        </a:rPr>
-                        <a:t>双舵 Toe Angle</a:t>
-                      </a:r>
-                    </a:p>
-                    <a:p>
-                      <a:pPr>
-                        <a:lnSpc>
-                          <a:spcPct val="105000"/>
-                        </a:lnSpc>
-                      </a:pPr>
-                      <a:r>
-                        <a:rPr sz="1200" b="0">
-                          <a:solidFill>
-                            <a:srgbClr val="1B2A4A"/>
-                          </a:solidFill>
-                          <a:latin typeface="Noto Sans CJK SC"/>
-                        </a:rPr>
-                        <a:t>(舵系水动力优化)</a:t>
+              <a:tr h="594360">
+                <a:tc>
+                  <a:txBody>
+                    <a:bodyPr/>
+                    <a:lstStyle/>
+                    <a:p>
+                      <a:pPr>
+                        <a:lnSpc>
+                          <a:spcPct val="105000"/>
+                        </a:lnSpc>
+                      </a:pPr>
+                      <a:r>
+                        <a:rPr sz="1300" b="0">
+                          <a:solidFill>
+                            <a:srgbClr val="1B2A4A"/>
+                          </a:solidFill>
+                          <a:latin typeface="Noto Sans CJK SC"/>
+                        </a:rPr>
+                        <a:t>认证与维护</a:t>
                       </a:r>
                     </a:p>
                   </a:txBody>
@@ -3826,29 +3828,13 @@
                         </a:lnSpc>
                       </a:pPr>
                       <a:r>
-                        <a:rPr sz="1200" b="0">
-                          <a:solidFill>
-                            <a:srgbClr val="1B2A4A"/>
-                          </a:solidFill>
-                          <a:latin typeface="Noto Sans CJK SC"/>
-                        </a:rPr>
-                        <a:t>Anschütz 实测最大 4.7%、平均约 2%（宣称 ≤5%）</a:t>
-                      </a:r>
-                    </a:p>
-                    <a:p>
-                      <a:pPr>
-                        <a:lnSpc>
-                          <a:spcPct val="105000"/>
-                        </a:lnSpc>
-                      </a:pPr>
-                      <a:r>
-                        <a:rPr sz="1200" b="0">
-                          <a:solidFill>
-                            <a:srgbClr val="1B2A4A"/>
-                          </a:solidFill>
-                          <a:latin typeface="Noto Sans CJK SC"/>
-                        </a:rPr>
-                        <a:t>自适应模式平均减少舵动作 25%</a:t>
+                        <a:rPr sz="1300" b="0">
+                          <a:solidFill>
+                            <a:srgbClr val="1B2A4A"/>
+                          </a:solidFill>
+                          <a:latin typeface="Noto Sans CJK SC"/>
+                        </a:rPr>
+                        <a:t>工业生态与船级社认证完备</a:t>
                       </a:r>
                     </a:p>
                   </a:txBody>
@@ -3865,36 +3851,13 @@
                         </a:lnSpc>
                       </a:pPr>
                       <a:r>
-                        <a:rPr sz="1200" b="0">
-                          <a:solidFill>
-                            <a:srgbClr val="1B2A4A"/>
-                          </a:solidFill>
-                          <a:latin typeface="Noto Sans CJK SC"/>
-                        </a:rPr>
-                        <a:t>双舵船额外收益；已有商用产品</a:t>
-                      </a:r>
-                    </a:p>
-                  </a:txBody>
-                  <a:tcPr marL="54864" marR="54864" marT="27432" marB="27432" anchor="ctr"/>
-                </a:tc>
-                <a:tc>
-                  <a:txBody>
-                    <a:bodyPr/>
-                    <a:lstStyle/>
-                    <a:p>
-                      <a:pPr>
-                        <a:lnSpc>
-                          <a:spcPct val="105000"/>
-                        </a:lnSpc>
-                      </a:pPr>
-                      <a:r>
-                        <a:rPr sz="1200" b="0">
-                          <a:solidFill>
-                            <a:srgbClr val="1B2A4A"/>
-                          </a:solidFill>
-                          <a:latin typeface="Noto Sans CJK SC"/>
-                        </a:rPr>
-                        <a:t>仅适用双舵船；厂商数据待第三方复核</a:t>
+                        <a:rPr sz="1300" b="0">
+                          <a:solidFill>
+                            <a:srgbClr val="1B2A4A"/>
+                          </a:solidFill>
+                          <a:latin typeface="Noto Sans CJK SC"/>
+                        </a:rPr>
+                        <a:t>认证路径不成熟；需控制工程师维护</a:t>
                       </a:r>
                     </a:p>
                   </a:txBody>
@@ -3908,6 +3871,67 @@
       <p:sp>
         <p:nvSpPr>
           <p:cNvPr id="5" name="TextBox 4"/>
+          <p:cNvSpPr txBox="1"/>
+          <p:nvPr/>
+        </p:nvSpPr>
+        <p:spPr>
+          <a:xfrm>
+            <a:off x="457200" y="5303520"/>
+            <a:ext cx="11338560" cy="1188720"/>
+          </a:xfrm>
+          <a:prstGeom prst="rect">
+            <a:avLst/>
+          </a:prstGeom>
+          <a:noFill/>
+        </p:spPr>
+        <p:txBody>
+          <a:bodyPr wrap="square" anchor="t">
+            <a:spAutoFit/>
+          </a:bodyPr>
+          <a:lstStyle/>
+          <a:p>
+            <a:pPr algn="l">
+              <a:lnSpc>
+                <a:spcPct val="115000"/>
+              </a:lnSpc>
+              <a:spcAft>
+                <a:spcPts val="600"/>
+              </a:spcAft>
+            </a:pPr>
+            <a:r>
+              <a:rPr sz="1700" b="1">
+                <a:solidFill>
+                  <a:srgbClr val="2CA02C"/>
+                </a:solidFill>
+                <a:latin typeface="Noto Sans CJK SC"/>
+              </a:rPr>
+              <a:t>结论性判断：PD/PID 打底保证可靠性，MPC 作为性能增强层；</a:t>
+            </a:r>
+          </a:p>
+          <a:p>
+            <a:pPr algn="l">
+              <a:lnSpc>
+                <a:spcPct val="115000"/>
+              </a:lnSpc>
+              <a:spcAft>
+                <a:spcPts val="600"/>
+              </a:spcAft>
+            </a:pPr>
+            <a:r>
+              <a:rPr sz="1700" b="1">
+                <a:solidFill>
+                  <a:srgbClr val="2CA02C"/>
+                </a:solidFill>
+                <a:latin typeface="Noto Sans CJK SC"/>
+              </a:rPr>
+              <a:t>模型辨识与整定自动化（本仓库 auto_tuning 流程）是 MPC 能否落地的前置条件。</a:t>
+            </a:r>
+          </a:p>
+        </p:txBody>
+      </p:sp>
+      <p:sp>
+        <p:nvSpPr>
+          <p:cNvPr id="6" name="TextBox 5"/>
           <p:cNvSpPr txBox="1"/>
           <p:nvPr/>
         </p:nvSpPr>
@@ -3942,7 +3966,7 @@
                 </a:solidFill>
                 <a:latin typeface="Noto Sans CJK SC"/>
               </a:rPr>
-              <a:t>10 / 14</a:t>
+              <a:t>10 / 20</a:t>
             </a:r>
           </a:p>
         </p:txBody>
@@ -4045,7 +4069,7 @@
                 </a:solidFill>
                 <a:latin typeface="Noto Sans CJK SC"/>
               </a:rPr>
-              <a:t>工业部署案例：第三方实测集中在 3–10%</a:t>
+              <a:t>船舶节能五大路线：量级差异极大</a:t>
             </a:r>
           </a:p>
         </p:txBody>
@@ -4087,14 +4111,14 @@
                 </a:solidFill>
                 <a:latin typeface="Noto Sans CJK SC"/>
               </a:rPr>
-              <a:t>厂商宣称值普遍高于实测，引用以船级社/试航数据为准</a:t>
+              <a:t>来源：IMO / 船级社 / 实船试航，均为已核对数据</a:t>
             </a:r>
           </a:p>
         </p:txBody>
       </p:sp>
       <p:pic>
         <p:nvPicPr>
-          <p:cNvPr id="5" name="Picture 4" descr="fig5_deploy_cases.png"/>
+          <p:cNvPr id="5" name="Picture 4" descr="fig4_energy_measures.png"/>
           <p:cNvPicPr>
             <a:picLocks noChangeAspect="1"/>
           </p:cNvPicPr>
@@ -4108,8 +4132,8 @@
         </p:blipFill>
         <p:spPr>
           <a:xfrm>
-            <a:off x="365760" y="2125066"/>
-            <a:ext cx="6949440" cy="3613708"/>
+            <a:off x="1658389" y="1554480"/>
+            <a:ext cx="8844741" cy="5120640"/>
           </a:xfrm>
           <a:prstGeom prst="rect">
             <a:avLst/>
@@ -4119,181 +4143,6 @@
       <p:sp>
         <p:nvSpPr>
           <p:cNvPr id="6" name="TextBox 5"/>
-          <p:cNvSpPr txBox="1"/>
-          <p:nvPr/>
-        </p:nvSpPr>
-        <p:spPr>
-          <a:xfrm>
-            <a:off x="7498079" y="1554480"/>
-            <a:ext cx="4480560" cy="5120640"/>
-          </a:xfrm>
-          <a:prstGeom prst="rect">
-            <a:avLst/>
-          </a:prstGeom>
-          <a:noFill/>
-        </p:spPr>
-        <p:txBody>
-          <a:bodyPr wrap="square" anchor="t">
-            <a:spAutoFit/>
-          </a:bodyPr>
-          <a:lstStyle/>
-          <a:p>
-            <a:pPr algn="l">
-              <a:lnSpc>
-                <a:spcPct val="115000"/>
-              </a:lnSpc>
-              <a:spcAft>
-                <a:spcPts val="800"/>
-              </a:spcAft>
-            </a:pPr>
-            <a:r>
-              <a:rPr sz="1400" b="1">
-                <a:solidFill>
-                  <a:srgbClr val="1F77B4"/>
-                </a:solidFill>
-                <a:latin typeface="Noto Sans CJK SC"/>
-              </a:rPr>
-              <a:t>▪ 规模化部署</a:t>
-            </a:r>
-          </a:p>
-          <a:p>
-            <a:pPr algn="l">
-              <a:lnSpc>
-                <a:spcPct val="115000"/>
-              </a:lnSpc>
-              <a:spcAft>
-                <a:spcPts val="400"/>
-              </a:spcAft>
-            </a:pPr>
-            <a:r>
-              <a:rPr sz="1250" b="0">
-                <a:solidFill>
-                  <a:srgbClr val="1B2A4A"/>
-                </a:solidFill>
-                <a:latin typeface="Noto Sans CJK SC"/>
-              </a:rPr>
-              <a:t>    – ABB OCTOPUS：1000+ 船，回收期仅几个月</a:t>
-            </a:r>
-          </a:p>
-          <a:p>
-            <a:pPr algn="l">
-              <a:lnSpc>
-                <a:spcPct val="115000"/>
-              </a:lnSpc>
-              <a:spcAft>
-                <a:spcPts val="400"/>
-              </a:spcAft>
-            </a:pPr>
-            <a:r>
-              <a:rPr sz="1250" b="0">
-                <a:solidFill>
-                  <a:srgbClr val="1B2A4A"/>
-                </a:solidFill>
-                <a:latin typeface="Noto Sans CJK SC"/>
-              </a:rPr>
-              <a:t>    – DeepSea：EPS 全船队 300 艘，油耗预报误差 0.8%</a:t>
-            </a:r>
-          </a:p>
-          <a:p>
-            <a:pPr algn="l">
-              <a:lnSpc>
-                <a:spcPct val="115000"/>
-              </a:lnSpc>
-              <a:spcAft>
-                <a:spcPts val="400"/>
-              </a:spcAft>
-            </a:pPr>
-            <a:r>
-              <a:rPr sz="1250" b="0">
-                <a:solidFill>
-                  <a:srgbClr val="1B2A4A"/>
-                </a:solidFill>
-                <a:latin typeface="Noto Sans CJK SC"/>
-              </a:rPr>
-              <a:t>    – Orca AI：Seaspan 267+ 船，单船年省约 $10 万</a:t>
-            </a:r>
-          </a:p>
-          <a:p>
-            <a:pPr algn="l">
-              <a:lnSpc>
-                <a:spcPct val="115000"/>
-              </a:lnSpc>
-              <a:spcAft>
-                <a:spcPts val="800"/>
-              </a:spcAft>
-            </a:pPr>
-            <a:r>
-              <a:rPr sz="1400" b="1">
-                <a:solidFill>
-                  <a:srgbClr val="2CA02C"/>
-                </a:solidFill>
-                <a:latin typeface="Noto Sans CJK SC"/>
-              </a:rPr>
-              <a:t>▪ 控制层现状</a:t>
-            </a:r>
-          </a:p>
-          <a:p>
-            <a:pPr algn="l">
-              <a:lnSpc>
-                <a:spcPct val="115000"/>
-              </a:lnSpc>
-              <a:spcAft>
-                <a:spcPts val="400"/>
-              </a:spcAft>
-            </a:pPr>
-            <a:r>
-              <a:rPr sz="1250" b="0">
-                <a:solidFill>
-                  <a:srgbClr val="1B2A4A"/>
-                </a:solidFill>
-                <a:latin typeface="Noto Sans CJK SC"/>
-              </a:rPr>
-              <a:t>    – 节能自动舵 = 自适应+海浪滤波（Anschütz ECO）</a:t>
-            </a:r>
-          </a:p>
-          <a:p>
-            <a:pPr algn="l">
-              <a:lnSpc>
-                <a:spcPct val="115000"/>
-              </a:lnSpc>
-              <a:spcAft>
-                <a:spcPts val="400"/>
-              </a:spcAft>
-            </a:pPr>
-            <a:r>
-              <a:rPr sz="1250" b="0">
-                <a:solidFill>
-                  <a:srgbClr val="1B2A4A"/>
-                </a:solidFill>
-                <a:latin typeface="Noto Sans CJK SC"/>
-              </a:rPr>
-              <a:t>    – 无公开的 MPC 实船自动舵部署案例</a:t>
-            </a:r>
-          </a:p>
-          <a:p>
-            <a:pPr algn="l">
-              <a:lnSpc>
-                <a:spcPct val="115000"/>
-              </a:lnSpc>
-              <a:spcAft>
-                <a:spcPts val="400"/>
-              </a:spcAft>
-            </a:pPr>
-            <a:r>
-              <a:rPr sz="1250" b="0">
-                <a:solidFill>
-                  <a:srgbClr val="1B2A4A"/>
-                </a:solidFill>
-                <a:latin typeface="Noto Sans CJK SC"/>
-              </a:rPr>
-              <a:t>    – 印证：门槛不在算力，在模型获取与整定</a:t>
-            </a:r>
-          </a:p>
-        </p:txBody>
-      </p:sp>
-      <p:sp>
-        <p:nvSpPr>
-          <p:cNvPr id="7" name="TextBox 6"/>
           <p:cNvSpPr txBox="1"/>
           <p:nvPr/>
         </p:nvSpPr>
@@ -4328,7 +4177,7 @@
                 </a:solidFill>
                 <a:latin typeface="Noto Sans CJK SC"/>
               </a:rPr>
-              <a:t>11 / 14</a:t>
+              <a:t>11 / 20</a:t>
             </a:r>
           </a:p>
         </p:txBody>
@@ -4431,14 +4280,56 @@
                 </a:solidFill>
                 <a:latin typeface="Noto Sans CJK SC"/>
               </a:rPr>
-              <a:t>对本项目（auto_rudder）的落地建议</a:t>
+              <a:t>节能方案优缺点（一）：决策层</a:t>
+            </a:r>
+          </a:p>
+        </p:txBody>
+      </p:sp>
+      <p:sp>
+        <p:nvSpPr>
+          <p:cNvPr id="4" name="TextBox 3"/>
+          <p:cNvSpPr txBox="1"/>
+          <p:nvPr/>
+        </p:nvSpPr>
+        <p:spPr>
+          <a:xfrm>
+            <a:off x="475488" y="914400"/>
+            <a:ext cx="11247120" cy="457200"/>
+          </a:xfrm>
+          <a:prstGeom prst="rect">
+            <a:avLst/>
+          </a:prstGeom>
+          <a:noFill/>
+        </p:spPr>
+        <p:txBody>
+          <a:bodyPr wrap="square" anchor="t">
+            <a:spAutoFit/>
+          </a:bodyPr>
+          <a:lstStyle/>
+          <a:p>
+            <a:pPr algn="l">
+              <a:lnSpc>
+                <a:spcPct val="115000"/>
+              </a:lnSpc>
+              <a:spcAft>
+                <a:spcPts val="600"/>
+              </a:spcAft>
+            </a:pPr>
+            <a:r>
+              <a:rPr sz="1400" b="0">
+                <a:solidFill>
+                  <a:srgbClr val="666666"/>
+                </a:solidFill>
+                <a:latin typeface="Noto Sans CJK SC"/>
+              </a:rPr>
+              <a:t>节能大头所在</a:t>
             </a:r>
           </a:p>
         </p:txBody>
       </p:sp>
       <p:graphicFrame>
         <p:nvGraphicFramePr>
-          <p:cNvPr id="4" name="Table 3"/>
+          <p:cNvPr id="5" name="Table 4"/>
           <p:cNvGraphicFramePr>
             <a:graphicFrameLocks noGrp="1"/>
           </p:cNvGraphicFramePr>
@@ -4446,7 +4337,7 @@
         </p:nvGraphicFramePr>
         <p:xfrm>
           <a:off x="457200" y="1463040"/>
-          <a:ext cx="11338559" cy="3840480"/>
+          <a:ext cx="11338559" cy="4846320"/>
         </p:xfrm>
         <a:graphic>
           <a:graphicData uri="http://schemas.openxmlformats.org/drawingml/2006/table">
@@ -4455,29 +4346,30 @@
                 <a:tableStyleId>{5C22544A-7EE6-4342-B048-85BDC9FD1C3A}</a:tableStyleId>
               </a:tblPr>
               <a:tblGrid>
-                <a:gridCol w="1619794"/>
-                <a:gridCol w="2519680"/>
-                <a:gridCol w="7199085"/>
+                <a:gridCol w="1553227"/>
+                <a:gridCol w="4038391"/>
+                <a:gridCol w="2795809"/>
+                <a:gridCol w="2951132"/>
               </a:tblGrid>
-              <a:tr h="960120">
-                <a:tc>
-                  <a:txBody>
-                    <a:bodyPr/>
-                    <a:lstStyle/>
-                    <a:p>
-                      <a:pPr>
-                        <a:lnSpc>
-                          <a:spcPct val="105000"/>
-                        </a:lnSpc>
-                      </a:pPr>
-                      <a:r>
-                        <a:rPr sz="1350" b="1">
+              <a:tr h="1211580">
+                <a:tc>
+                  <a:txBody>
+                    <a:bodyPr/>
+                    <a:lstStyle/>
+                    <a:p>
+                      <a:pPr>
+                        <a:lnSpc>
+                          <a:spcPct val="105000"/>
+                        </a:lnSpc>
+                      </a:pPr>
+                      <a:r>
+                        <a:rPr sz="1250" b="1">
                           <a:solidFill>
                             <a:srgbClr val="FFFFFF"/>
                           </a:solidFill>
                           <a:latin typeface="Noto Sans CJK SC"/>
                         </a:rPr>
-                        <a:t>阶段</a:t>
+                        <a:t>方案</a:t>
                       </a:r>
                     </a:p>
                   </a:txBody>
@@ -4498,13 +4390,13 @@
                         </a:lnSpc>
                       </a:pPr>
                       <a:r>
-                        <a:rPr sz="1350" b="1">
+                        <a:rPr sz="1250" b="1">
                           <a:solidFill>
                             <a:srgbClr val="FFFFFF"/>
                           </a:solidFill>
                           <a:latin typeface="Noto Sans CJK SC"/>
                         </a:rPr>
-                        <a:t>目标</a:t>
+                        <a:t>代表数据（已核对）</a:t>
                       </a:r>
                     </a:p>
                   </a:txBody>
@@ -4525,13 +4417,13 @@
                         </a:lnSpc>
                       </a:pPr>
                       <a:r>
-                        <a:rPr sz="1350" b="1">
+                        <a:rPr sz="1250" b="1">
                           <a:solidFill>
                             <a:srgbClr val="FFFFFF"/>
                           </a:solidFill>
                           <a:latin typeface="Noto Sans CJK SC"/>
                         </a:rPr>
-                        <a:t>关键动作</a:t>
+                        <a:t>优点</a:t>
                       </a:r>
                     </a:p>
                   </a:txBody>
@@ -4541,42 +4433,53 @@
                     </a:solidFill>
                   </a:tcPr>
                 </a:tc>
+                <a:tc>
+                  <a:txBody>
+                    <a:bodyPr/>
+                    <a:lstStyle/>
+                    <a:p>
+                      <a:pPr>
+                        <a:lnSpc>
+                          <a:spcPct val="105000"/>
+                        </a:lnSpc>
+                      </a:pPr>
+                      <a:r>
+                        <a:rPr sz="1250" b="1">
+                          <a:solidFill>
+                            <a:srgbClr val="FFFFFF"/>
+                          </a:solidFill>
+                          <a:latin typeface="Noto Sans CJK SC"/>
+                        </a:rPr>
+                        <a:t>缺点</a:t>
+                      </a:r>
+                    </a:p>
+                  </a:txBody>
+                  <a:tcPr marL="54864" marR="54864" marT="27432" marB="27432" anchor="ctr">
+                    <a:solidFill>
+                      <a:srgbClr val="1F77B4"/>
+                    </a:solidFill>
+                  </a:tcPr>
+                </a:tc>
               </a:tr>
-              <a:tr h="960120">
-                <a:tc>
-                  <a:txBody>
-                    <a:bodyPr/>
-                    <a:lstStyle/>
-                    <a:p>
-                      <a:pPr>
-                        <a:lnSpc>
-                          <a:spcPct val="105000"/>
-                        </a:lnSpc>
-                      </a:pPr>
-                      <a:r>
-                        <a:rPr sz="1300" b="0">
-                          <a:solidFill>
-                            <a:srgbClr val="1B2A4A"/>
-                          </a:solidFill>
-                          <a:latin typeface="Noto Sans CJK SC"/>
-                        </a:rPr>
-                        <a:t>短期</a:t>
-                      </a:r>
-                    </a:p>
-                    <a:p>
-                      <a:pPr>
-                        <a:lnSpc>
-                          <a:spcPct val="105000"/>
-                        </a:lnSpc>
-                      </a:pPr>
-                      <a:r>
-                        <a:rPr sz="1300" b="0">
-                          <a:solidFill>
-                            <a:srgbClr val="1B2A4A"/>
-                          </a:solidFill>
-                          <a:latin typeface="Noto Sans CJK SC"/>
-                        </a:rPr>
-                        <a:t>1–3 个月</a:t>
+              <a:tr h="1211580">
+                <a:tc>
+                  <a:txBody>
+                    <a:bodyPr/>
+                    <a:lstStyle/>
+                    <a:p>
+                      <a:pPr>
+                        <a:lnSpc>
+                          <a:spcPct val="105000"/>
+                        </a:lnSpc>
+                      </a:pPr>
+                      <a:r>
+                        <a:rPr sz="1200" b="0">
+                          <a:solidFill>
+                            <a:srgbClr val="1B2A4A"/>
+                          </a:solidFill>
+                          <a:latin typeface="Noto Sans CJK SC"/>
+                        </a:rPr>
+                        <a:t>减速航行</a:t>
                       </a:r>
                     </a:p>
                   </a:txBody>
@@ -4593,13 +4496,29 @@
                         </a:lnSpc>
                       </a:pPr>
                       <a:r>
-                        <a:rPr sz="1300" b="0">
-                          <a:solidFill>
-                            <a:srgbClr val="1B2A4A"/>
-                          </a:solidFill>
-                          <a:latin typeface="Noto Sans CJK SC"/>
-                        </a:rPr>
-                        <a:t>PD 基线交付</a:t>
+                        <a:rPr sz="1200" b="0">
+                          <a:solidFill>
+                            <a:srgbClr val="1B2A4A"/>
+                          </a:solidFill>
+                          <a:latin typeface="Noto Sans CJK SC"/>
+                        </a:rPr>
+                        <a:t>23→12 kn 每海里油耗降 72–76%（Pelić 2023）</a:t>
+                      </a:r>
+                    </a:p>
+                    <a:p>
+                      <a:pPr>
+                        <a:lnSpc>
+                          <a:spcPct val="105000"/>
+                        </a:lnSpc>
+                      </a:pPr>
+                      <a:r>
+                        <a:rPr sz="1200" b="0">
+                          <a:solidFill>
+                            <a:srgbClr val="1B2A4A"/>
+                          </a:solidFill>
+                          <a:latin typeface="Noto Sans CJK SC"/>
+                        </a:rPr>
+                        <a:t>IMO：主机油耗潜力 10–50%，全船口径 3–12%</a:t>
                       </a:r>
                     </a:p>
                   </a:txBody>
@@ -4616,70 +4535,61 @@
                         </a:lnSpc>
                       </a:pPr>
                       <a:r>
-                        <a:rPr sz="1300" b="0">
-                          <a:solidFill>
-                            <a:srgbClr val="1B2A4A"/>
-                          </a:solidFill>
-                          <a:latin typeface="Noto Sans CJK SC"/>
-                        </a:rPr>
-                        <a:t>Nomoto 极点配置整定（Kp=ωn²T/K，ζ≈1）；</a:t>
-                      </a:r>
-                    </a:p>
-                    <a:p>
-                      <a:pPr>
-                        <a:lnSpc>
-                          <a:spcPct val="105000"/>
-                        </a:lnSpc>
-                      </a:pPr>
-                      <a:r>
-                        <a:rPr sz="1300" b="0">
-                          <a:solidFill>
-                            <a:srgbClr val="1B2A4A"/>
-                          </a:solidFill>
-                          <a:latin typeface="Noto Sans CJK SC"/>
-                        </a:rPr>
-                        <a:t>海浪滤波+死区抑制无效操舵（对标 IMO 0.1–1.0% 收益）</a:t>
+                        <a:rPr sz="1200" b="0">
+                          <a:solidFill>
+                            <a:srgbClr val="1B2A4A"/>
+                          </a:solidFill>
+                          <a:latin typeface="Noto Sans CJK SC"/>
+                        </a:rPr>
+                        <a:t>杠杆最大；零硬件成本；直接改善 CII</a:t>
                       </a:r>
                     </a:p>
                   </a:txBody>
                   <a:tcPr marL="54864" marR="54864" marT="27432" marB="27432" anchor="ctr"/>
                 </a:tc>
+                <a:tc>
+                  <a:txBody>
+                    <a:bodyPr/>
+                    <a:lstStyle/>
+                    <a:p>
+                      <a:pPr>
+                        <a:lnSpc>
+                          <a:spcPct val="105000"/>
+                        </a:lnSpc>
+                      </a:pPr>
+                      <a:r>
+                        <a:rPr sz="1200" b="0">
+                          <a:solidFill>
+                            <a:srgbClr val="1B2A4A"/>
+                          </a:solidFill>
+                          <a:latin typeface="Noto Sans CJK SC"/>
+                        </a:rPr>
+                        <a:t>牺牲船期；受租约约束；低速偏离主机最佳负荷点</a:t>
+                      </a:r>
+                    </a:p>
+                  </a:txBody>
+                  <a:tcPr marL="54864" marR="54864" marT="27432" marB="27432" anchor="ctr"/>
+                </a:tc>
               </a:tr>
-              <a:tr h="960120">
-                <a:tc>
-                  <a:txBody>
-                    <a:bodyPr/>
-                    <a:lstStyle/>
-                    <a:p>
-                      <a:pPr>
-                        <a:lnSpc>
-                          <a:spcPct val="105000"/>
-                        </a:lnSpc>
-                      </a:pPr>
-                      <a:r>
-                        <a:rPr sz="1300" b="0">
-                          <a:solidFill>
-                            <a:srgbClr val="1B2A4A"/>
-                          </a:solidFill>
-                          <a:latin typeface="Noto Sans CJK SC"/>
-                        </a:rPr>
-                        <a:t>中期</a:t>
-                      </a:r>
-                    </a:p>
-                    <a:p>
-                      <a:pPr>
-                        <a:lnSpc>
-                          <a:spcPct val="105000"/>
-                        </a:lnSpc>
-                      </a:pPr>
-                      <a:r>
-                        <a:rPr sz="1300" b="0">
-                          <a:solidFill>
-                            <a:srgbClr val="1B2A4A"/>
-                          </a:solidFill>
-                          <a:latin typeface="Noto Sans CJK SC"/>
-                        </a:rPr>
-                        <a:t>3–6 个月</a:t>
+              <a:tr h="1211580">
+                <a:tc>
+                  <a:txBody>
+                    <a:bodyPr/>
+                    <a:lstStyle/>
+                    <a:p>
+                      <a:pPr>
+                        <a:lnSpc>
+                          <a:spcPct val="105000"/>
+                        </a:lnSpc>
+                      </a:pPr>
+                      <a:r>
+                        <a:rPr sz="1200" b="0">
+                          <a:solidFill>
+                            <a:srgbClr val="1B2A4A"/>
+                          </a:solidFill>
+                          <a:latin typeface="Noto Sans CJK SC"/>
+                        </a:rPr>
+                        <a:t>气象航线优化</a:t>
                       </a:r>
                     </a:p>
                   </a:txBody>
@@ -4700,13 +4610,29 @@
                         </a:lnSpc>
                       </a:pPr>
                       <a:r>
-                        <a:rPr sz="1300" b="0">
-                          <a:solidFill>
-                            <a:srgbClr val="1B2A4A"/>
-                          </a:solidFill>
-                          <a:latin typeface="Noto Sans CJK SC"/>
-                        </a:rPr>
-                        <a:t>MPC 增强层开发</a:t>
+                        <a:rPr sz="1200" b="0">
+                          <a:solidFill>
+                            <a:srgbClr val="1B2A4A"/>
+                          </a:solidFill>
+                          <a:latin typeface="Noto Sans CJK SC"/>
+                        </a:rPr>
+                        <a:t>IMO 口径 ≥3%，集装箱船可达 10%</a:t>
+                      </a:r>
+                    </a:p>
+                    <a:p>
+                      <a:pPr>
+                        <a:lnSpc>
+                          <a:spcPct val="105000"/>
+                        </a:lnSpc>
+                      </a:pPr>
+                      <a:r>
+                        <a:rPr sz="1200" b="0">
+                          <a:solidFill>
+                            <a:srgbClr val="1B2A4A"/>
+                          </a:solidFill>
+                          <a:latin typeface="Noto Sans CJK SC"/>
+                        </a:rPr>
+                        <a:t>Li 2022 实船 2.1–5.2%（二手转引）</a:t>
                       </a:r>
                     </a:p>
                   </a:txBody>
@@ -4727,29 +4653,13 @@
                         </a:lnSpc>
                       </a:pPr>
                       <a:r>
-                        <a:rPr sz="1300" b="0">
-                          <a:solidFill>
-                            <a:srgbClr val="1B2A4A"/>
-                          </a:solidFill>
-                          <a:latin typeface="Noto Sans CJK SC"/>
-                        </a:rPr>
-                        <a:t>攻克模型在线辨识与权重整定工具化；</a:t>
-                      </a:r>
-                    </a:p>
-                    <a:p>
-                      <a:pPr>
-                        <a:lnSpc>
-                          <a:spcPct val="105000"/>
-                        </a:lnSpc>
-                      </a:pPr>
-                      <a:r>
-                        <a:rPr sz="1300" b="0">
-                          <a:solidFill>
-                            <a:srgbClr val="1B2A4A"/>
-                          </a:solidFill>
-                          <a:latin typeface="Noto Sans CJK SC"/>
-                        </a:rPr>
-                        <a:t>嵌入式求解器选型（acados/OSQP）；与 PD 基线 A/B 对比</a:t>
+                        <a:rPr sz="1200" b="0">
+                          <a:solidFill>
+                            <a:srgbClr val="1B2A4A"/>
+                          </a:solidFill>
+                          <a:latin typeface="Noto Sans CJK SC"/>
+                        </a:rPr>
+                        <a:t>节能+避离恶劣海况兼得；商用服务成熟</a:t>
                       </a:r>
                     </a:p>
                   </a:txBody>
@@ -4759,42 +4669,53 @@
                     </a:solidFill>
                   </a:tcPr>
                 </a:tc>
+                <a:tc>
+                  <a:txBody>
+                    <a:bodyPr/>
+                    <a:lstStyle/>
+                    <a:p>
+                      <a:pPr>
+                        <a:lnSpc>
+                          <a:spcPct val="105000"/>
+                        </a:lnSpc>
+                      </a:pPr>
+                      <a:r>
+                        <a:rPr sz="1200" b="0">
+                          <a:solidFill>
+                            <a:srgbClr val="1B2A4A"/>
+                          </a:solidFill>
+                          <a:latin typeface="Noto Sans CJK SC"/>
+                        </a:rPr>
+                        <a:t>依赖气象预报与增阻模型精度；收益随海况波动</a:t>
+                      </a:r>
+                    </a:p>
+                  </a:txBody>
+                  <a:tcPr marL="54864" marR="54864" marT="27432" marB="27432" anchor="ctr">
+                    <a:solidFill>
+                      <a:srgbClr val="EEF3FA"/>
+                    </a:solidFill>
+                  </a:tcPr>
+                </a:tc>
               </a:tr>
-              <a:tr h="960120">
-                <a:tc>
-                  <a:txBody>
-                    <a:bodyPr/>
-                    <a:lstStyle/>
-                    <a:p>
-                      <a:pPr>
-                        <a:lnSpc>
-                          <a:spcPct val="105000"/>
-                        </a:lnSpc>
-                      </a:pPr>
-                      <a:r>
-                        <a:rPr sz="1300" b="0">
-                          <a:solidFill>
-                            <a:srgbClr val="1B2A4A"/>
-                          </a:solidFill>
-                          <a:latin typeface="Noto Sans CJK SC"/>
-                        </a:rPr>
-                        <a:t>长期</a:t>
-                      </a:r>
-                    </a:p>
-                    <a:p>
-                      <a:pPr>
-                        <a:lnSpc>
-                          <a:spcPct val="105000"/>
-                        </a:lnSpc>
-                      </a:pPr>
-                      <a:r>
-                        <a:rPr sz="1300" b="0">
-                          <a:solidFill>
-                            <a:srgbClr val="1B2A4A"/>
-                          </a:solidFill>
-                          <a:latin typeface="Noto Sans CJK SC"/>
-                        </a:rPr>
-                        <a:t>6–12 个月</a:t>
+              <a:tr h="1211580">
+                <a:tc>
+                  <a:txBody>
+                    <a:bodyPr/>
+                    <a:lstStyle/>
+                    <a:p>
+                      <a:pPr>
+                        <a:lnSpc>
+                          <a:spcPct val="105000"/>
+                        </a:lnSpc>
+                      </a:pPr>
+                      <a:r>
+                        <a:rPr sz="1200" b="0">
+                          <a:solidFill>
+                            <a:srgbClr val="1B2A4A"/>
+                          </a:solidFill>
+                          <a:latin typeface="Noto Sans CJK SC"/>
+                        </a:rPr>
+                        <a:t>纵倾优化</a:t>
                       </a:r>
                     </a:p>
                   </a:txBody>
@@ -4811,13 +4732,29 @@
                         </a:lnSpc>
                       </a:pPr>
                       <a:r>
-                        <a:rPr sz="1300" b="0">
-                          <a:solidFill>
-                            <a:srgbClr val="1B2A4A"/>
-                          </a:solidFill>
-                          <a:latin typeface="Noto Sans CJK SC"/>
-                        </a:rPr>
-                        <a:t>分层节能架构</a:t>
+                        <a:rPr sz="1200" b="0">
+                          <a:solidFill>
+                            <a:srgbClr val="1B2A4A"/>
+                          </a:solidFill>
+                          <a:latin typeface="Noto Sans CJK SC"/>
+                        </a:rPr>
+                        <a:t>ClassNK-NAPA 实船试航：纵倾贡献 1.2%</a:t>
+                      </a:r>
+                    </a:p>
+                    <a:p>
+                      <a:pPr>
+                        <a:lnSpc>
+                          <a:spcPct val="105000"/>
+                        </a:lnSpc>
+                      </a:pPr>
+                      <a:r>
+                        <a:rPr sz="1200" b="0">
+                          <a:solidFill>
+                            <a:srgbClr val="1B2A4A"/>
+                          </a:solidFill>
+                          <a:latin typeface="Noto Sans CJK SC"/>
+                        </a:rPr>
+                        <a:t>专项研究最多 4%；Eniram 实测 1–5%</a:t>
                       </a:r>
                     </a:p>
                   </a:txBody>
@@ -4834,29 +4771,36 @@
                         </a:lnSpc>
                       </a:pPr>
                       <a:r>
-                        <a:rPr sz="1300" b="0">
-                          <a:solidFill>
-                            <a:srgbClr val="1B2A4A"/>
-                          </a:solidFill>
-                          <a:latin typeface="Noto Sans CJK SC"/>
-                        </a:rPr>
-                        <a:t>MPC 代价函数计入操舵能量，对接航速/纵倾优化指令；</a:t>
-                      </a:r>
-                    </a:p>
-                    <a:p>
-                      <a:pPr>
-                        <a:lnSpc>
-                          <a:spcPct val="105000"/>
-                        </a:lnSpc>
-                      </a:pPr>
-                      <a:r>
-                        <a:rPr sz="1300" b="0">
-                          <a:solidFill>
-                            <a:srgbClr val="1B2A4A"/>
-                          </a:solidFill>
-                          <a:latin typeface="Noto Sans CJK SC"/>
-                        </a:rPr>
-                        <a:t>输出舵机磨损/能耗统计；Lyapunov-based MPC 保稳定性</a:t>
+                        <a:rPr sz="1200" b="0">
+                          <a:solidFill>
+                            <a:srgbClr val="1B2A4A"/>
+                          </a:solidFill>
+                          <a:latin typeface="Noto Sans CJK SC"/>
+                        </a:rPr>
+                        <a:t>几乎零成本（调压载水）；实船背书强</a:t>
+                      </a:r>
+                    </a:p>
+                  </a:txBody>
+                  <a:tcPr marL="54864" marR="54864" marT="27432" marB="27432" anchor="ctr"/>
+                </a:tc>
+                <a:tc>
+                  <a:txBody>
+                    <a:bodyPr/>
+                    <a:lstStyle/>
+                    <a:p>
+                      <a:pPr>
+                        <a:lnSpc>
+                          <a:spcPct val="105000"/>
+                        </a:lnSpc>
+                      </a:pPr>
+                      <a:r>
+                        <a:rPr sz="1200" b="0">
+                          <a:solidFill>
+                            <a:srgbClr val="1B2A4A"/>
+                          </a:solidFill>
+                          <a:latin typeface="Noto Sans CJK SC"/>
+                        </a:rPr>
+                        <a:t>最优纵倾随工况变化；受稳性/装卸约束；幅度偏小</a:t>
                       </a:r>
                     </a:p>
                   </a:txBody>
@@ -4867,67 +4811,6 @@
           </a:graphicData>
         </a:graphic>
       </p:graphicFrame>
-      <p:sp>
-        <p:nvSpPr>
-          <p:cNvPr id="5" name="TextBox 4"/>
-          <p:cNvSpPr txBox="1"/>
-          <p:nvPr/>
-        </p:nvSpPr>
-        <p:spPr>
-          <a:xfrm>
-            <a:off x="457200" y="5577840"/>
-            <a:ext cx="11338560" cy="914400"/>
-          </a:xfrm>
-          <a:prstGeom prst="rect">
-            <a:avLst/>
-          </a:prstGeom>
-          <a:noFill/>
-        </p:spPr>
-        <p:txBody>
-          <a:bodyPr wrap="square" anchor="t">
-            <a:spAutoFit/>
-          </a:bodyPr>
-          <a:lstStyle/>
-          <a:p>
-            <a:pPr algn="l">
-              <a:lnSpc>
-                <a:spcPct val="115000"/>
-              </a:lnSpc>
-              <a:spcAft>
-                <a:spcPts val="600"/>
-              </a:spcAft>
-            </a:pPr>
-            <a:r>
-              <a:rPr sz="1500" b="0">
-                <a:solidFill>
-                  <a:srgbClr val="1B2A4A"/>
-                </a:solidFill>
-                <a:latin typeface="Noto Sans CJK SC"/>
-              </a:rPr>
-              <a:t>核心逻辑：节能大头在决策层（气象航线 3–10%、减速航行主机口径可达 50%），控制层贡献 0.1–1% 但几乎零成本；</a:t>
-            </a:r>
-          </a:p>
-          <a:p>
-            <a:pPr algn="l">
-              <a:lnSpc>
-                <a:spcPct val="115000"/>
-              </a:lnSpc>
-              <a:spcAft>
-                <a:spcPts val="600"/>
-              </a:spcAft>
-            </a:pPr>
-            <a:r>
-              <a:rPr sz="1500" b="0">
-                <a:solidFill>
-                  <a:srgbClr val="1B2A4A"/>
-                </a:solidFill>
-                <a:latin typeface="Noto Sans CJK SC"/>
-              </a:rPr>
-              <a:t>先把 PD 整定与辨识流程工具化，再让 MPC 平滑接管性能增强。</a:t>
-            </a:r>
-          </a:p>
-        </p:txBody>
-      </p:sp>
       <p:sp>
         <p:nvSpPr>
           <p:cNvPr id="6" name="TextBox 5"/>
@@ -4965,7 +4848,7 @@
                 </a:solidFill>
                 <a:latin typeface="Noto Sans CJK SC"/>
               </a:rPr>
-              <a:t>12 / 14</a:t>
+              <a:t>12 / 20</a:t>
             </a:r>
           </a:p>
         </p:txBody>
@@ -5068,7 +4951,7 @@
                 </a:solidFill>
                 <a:latin typeface="Noto Sans CJK SC"/>
               </a:rPr>
-              <a:t>主要数据来源</a:t>
+              <a:t>节能方案关键数据补充</a:t>
             </a:r>
           </a:p>
         </p:txBody>
@@ -5110,6 +4993,3734 @@
                 </a:solidFill>
                 <a:latin typeface="Noto Sans CJK SC"/>
               </a:rPr>
+              <a:t>对比基线与口径已逐条核对，避免误读</a:t>
+            </a:r>
+          </a:p>
+        </p:txBody>
+      </p:sp>
+      <p:graphicFrame>
+        <p:nvGraphicFramePr>
+          <p:cNvPr id="5" name="Table 4"/>
+          <p:cNvGraphicFramePr>
+            <a:graphicFrameLocks noGrp="1"/>
+          </p:cNvGraphicFramePr>
+          <p:nvPr/>
+        </p:nvGraphicFramePr>
+        <p:xfrm>
+          <a:off x="457200" y="1463040"/>
+          <a:ext cx="11338560" cy="4846320"/>
+        </p:xfrm>
+        <a:graphic>
+          <a:graphicData uri="http://schemas.openxmlformats.org/drawingml/2006/table">
+            <a:tbl>
+              <a:tblPr firstRow="1" bandRow="1">
+                <a:tableStyleId>{5C22544A-7EE6-4342-B048-85BDC9FD1C3A}</a:tableStyleId>
+              </a:tblPr>
+              <a:tblGrid>
+                <a:gridCol w="1889760"/>
+                <a:gridCol w="6299200"/>
+                <a:gridCol w="3149600"/>
+              </a:tblGrid>
+              <a:tr h="807720">
+                <a:tc>
+                  <a:txBody>
+                    <a:bodyPr/>
+                    <a:lstStyle/>
+                    <a:p>
+                      <a:pPr>
+                        <a:lnSpc>
+                          <a:spcPct val="105000"/>
+                        </a:lnSpc>
+                      </a:pPr>
+                      <a:r>
+                        <a:rPr sz="1200" b="1">
+                          <a:solidFill>
+                            <a:srgbClr val="FFFFFF"/>
+                          </a:solidFill>
+                          <a:latin typeface="Noto Sans CJK SC"/>
+                        </a:rPr>
+                        <a:t>方案</a:t>
+                      </a:r>
+                    </a:p>
+                  </a:txBody>
+                  <a:tcPr marL="54864" marR="54864" marT="27432" marB="27432" anchor="ctr">
+                    <a:solidFill>
+                      <a:srgbClr val="1F77B4"/>
+                    </a:solidFill>
+                  </a:tcPr>
+                </a:tc>
+                <a:tc>
+                  <a:txBody>
+                    <a:bodyPr/>
+                    <a:lstStyle/>
+                    <a:p>
+                      <a:pPr>
+                        <a:lnSpc>
+                          <a:spcPct val="105000"/>
+                        </a:lnSpc>
+                      </a:pPr>
+                      <a:r>
+                        <a:rPr sz="1200" b="1">
+                          <a:solidFill>
+                            <a:srgbClr val="FFFFFF"/>
+                          </a:solidFill>
+                          <a:latin typeface="Noto Sans CJK SC"/>
+                        </a:rPr>
+                        <a:t>补充数据（已核对）</a:t>
+                      </a:r>
+                    </a:p>
+                  </a:txBody>
+                  <a:tcPr marL="54864" marR="54864" marT="27432" marB="27432" anchor="ctr">
+                    <a:solidFill>
+                      <a:srgbClr val="1F77B4"/>
+                    </a:solidFill>
+                  </a:tcPr>
+                </a:tc>
+                <a:tc>
+                  <a:txBody>
+                    <a:bodyPr/>
+                    <a:lstStyle/>
+                    <a:p>
+                      <a:pPr>
+                        <a:lnSpc>
+                          <a:spcPct val="105000"/>
+                        </a:lnSpc>
+                      </a:pPr>
+                      <a:r>
+                        <a:rPr sz="1200" b="1">
+                          <a:solidFill>
+                            <a:srgbClr val="FFFFFF"/>
+                          </a:solidFill>
+                          <a:latin typeface="Noto Sans CJK SC"/>
+                        </a:rPr>
+                        <a:t>口径说明</a:t>
+                      </a:r>
+                    </a:p>
+                  </a:txBody>
+                  <a:tcPr marL="54864" marR="54864" marT="27432" marB="27432" anchor="ctr">
+                    <a:solidFill>
+                      <a:srgbClr val="1F77B4"/>
+                    </a:solidFill>
+                  </a:tcPr>
+                </a:tc>
+              </a:tr>
+              <a:tr h="807720">
+                <a:tc>
+                  <a:txBody>
+                    <a:bodyPr/>
+                    <a:lstStyle/>
+                    <a:p>
+                      <a:pPr>
+                        <a:lnSpc>
+                          <a:spcPct val="105000"/>
+                        </a:lnSpc>
+                      </a:pPr>
+                      <a:r>
+                        <a:rPr sz="1150" b="0">
+                          <a:solidFill>
+                            <a:srgbClr val="1B2A4A"/>
+                          </a:solidFill>
+                          <a:latin typeface="Noto Sans CJK SC"/>
+                        </a:rPr>
+                        <a:t>减速航行</a:t>
+                      </a:r>
+                    </a:p>
+                  </a:txBody>
+                  <a:tcPr marL="54864" marR="54864" marT="27432" marB="27432" anchor="ctr"/>
+                </a:tc>
+                <a:tc>
+                  <a:txBody>
+                    <a:bodyPr/>
+                    <a:lstStyle/>
+                    <a:p>
+                      <a:pPr>
+                        <a:lnSpc>
+                          <a:spcPct val="105000"/>
+                        </a:lnSpc>
+                      </a:pPr>
+                      <a:r>
+                        <a:rPr sz="1150" b="0">
+                          <a:solidFill>
+                            <a:srgbClr val="1B2A4A"/>
+                          </a:solidFill>
+                          <a:latin typeface="Noto Sans CJK SC"/>
+                        </a:rPr>
+                        <a:t>IMO 案例：56,000 DWT 敞舱口货船 13% 减速 → 日油耗 −34%；</a:t>
+                      </a:r>
+                    </a:p>
+                    <a:p>
+                      <a:pPr>
+                        <a:lnSpc>
+                          <a:spcPct val="105000"/>
+                        </a:lnSpc>
+                      </a:pPr>
+                      <a:r>
+                        <a:rPr sz="1150" b="0">
+                          <a:solidFill>
+                            <a:srgbClr val="1B2A4A"/>
+                          </a:solidFill>
+                          <a:latin typeface="Noto Sans CJK SC"/>
+                        </a:rPr>
+                        <a:t>10% 减速 → 功率 −27%，计入航时后航次总节油约 19%</a:t>
+                      </a:r>
+                    </a:p>
+                  </a:txBody>
+                  <a:tcPr marL="54864" marR="54864" marT="27432" marB="27432" anchor="ctr"/>
+                </a:tc>
+                <a:tc>
+                  <a:txBody>
+                    <a:bodyPr/>
+                    <a:lstStyle/>
+                    <a:p>
+                      <a:pPr>
+                        <a:lnSpc>
+                          <a:spcPct val="105000"/>
+                        </a:lnSpc>
+                      </a:pPr>
+                      <a:r>
+                        <a:rPr sz="1150" b="0">
+                          <a:solidFill>
+                            <a:srgbClr val="1B2A4A"/>
+                          </a:solidFill>
+                          <a:latin typeface="Noto Sans CJK SC"/>
+                        </a:rPr>
+                        <a:t>特定船案例，非普适值；</a:t>
+                      </a:r>
+                    </a:p>
+                    <a:p>
+                      <a:pPr>
+                        <a:lnSpc>
+                          <a:spcPct val="105000"/>
+                        </a:lnSpc>
+                      </a:pPr>
+                      <a:r>
+                        <a:rPr sz="1150" b="0">
+                          <a:solidFill>
+                            <a:srgbClr val="1B2A4A"/>
+                          </a:solidFill>
+                          <a:latin typeface="Noto Sans CJK SC"/>
+                        </a:rPr>
+                        <a:t>主机口径 10–50% vs 全船 3–12%</a:t>
+                      </a:r>
+                    </a:p>
+                  </a:txBody>
+                  <a:tcPr marL="54864" marR="54864" marT="27432" marB="27432" anchor="ctr"/>
+                </a:tc>
+              </a:tr>
+              <a:tr h="807720">
+                <a:tc>
+                  <a:txBody>
+                    <a:bodyPr/>
+                    <a:lstStyle/>
+                    <a:p>
+                      <a:pPr>
+                        <a:lnSpc>
+                          <a:spcPct val="105000"/>
+                        </a:lnSpc>
+                      </a:pPr>
+                      <a:r>
+                        <a:rPr sz="1150" b="0">
+                          <a:solidFill>
+                            <a:srgbClr val="1B2A4A"/>
+                          </a:solidFill>
+                          <a:latin typeface="Noto Sans CJK SC"/>
+                        </a:rPr>
+                        <a:t>航速+纵倾联合</a:t>
+                      </a:r>
+                    </a:p>
+                  </a:txBody>
+                  <a:tcPr marL="54864" marR="54864" marT="27432" marB="27432" anchor="ctr">
+                    <a:solidFill>
+                      <a:srgbClr val="EEF3FA"/>
+                    </a:solidFill>
+                  </a:tcPr>
+                </a:tc>
+                <a:tc>
+                  <a:txBody>
+                    <a:bodyPr/>
+                    <a:lstStyle/>
+                    <a:p>
+                      <a:pPr>
+                        <a:lnSpc>
+                          <a:spcPct val="105000"/>
+                        </a:lnSpc>
+                      </a:pPr>
+                      <a:r>
+                        <a:rPr sz="1150" b="0">
+                          <a:solidFill>
+                            <a:srgbClr val="1B2A4A"/>
+                          </a:solidFill>
+                          <a:latin typeface="Noto Sans CJK SC"/>
+                        </a:rPr>
+                        <a:t>Du 2019（实船数据+ANN 模型）：动态纵倾 C1 省 4.96%/5.83%；</a:t>
+                      </a:r>
+                    </a:p>
+                    <a:p>
+                      <a:pPr>
+                        <a:lnSpc>
+                          <a:spcPct val="105000"/>
+                        </a:lnSpc>
+                      </a:pPr>
+                      <a:r>
+                        <a:rPr sz="1150" b="0">
+                          <a:solidFill>
+                            <a:srgbClr val="1B2A4A"/>
+                          </a:solidFill>
+                          <a:latin typeface="Noto Sans CJK SC"/>
+                        </a:rPr>
+                        <a:t>ANN 航速优化 C2 省 7.63%/7.57%；综合 C3 平均省 8.25%</a:t>
+                      </a:r>
+                    </a:p>
+                  </a:txBody>
+                  <a:tcPr marL="54864" marR="54864" marT="27432" marB="27432" anchor="ctr">
+                    <a:solidFill>
+                      <a:srgbClr val="EEF3FA"/>
+                    </a:solidFill>
+                  </a:tcPr>
+                </a:tc>
+                <a:tc>
+                  <a:txBody>
+                    <a:bodyPr/>
+                    <a:lstStyle/>
+                    <a:p>
+                      <a:pPr>
+                        <a:lnSpc>
+                          <a:spcPct val="105000"/>
+                        </a:lnSpc>
+                      </a:pPr>
+                      <a:r>
+                        <a:rPr sz="1150" b="0">
+                          <a:solidFill>
+                            <a:srgbClr val="1B2A4A"/>
+                          </a:solidFill>
+                          <a:latin typeface="Noto Sans CJK SC"/>
+                        </a:rPr>
+                        <a:t>0.57%/3.69% 是相对三次方定律的</a:t>
+                      </a:r>
+                    </a:p>
+                    <a:p>
+                      <a:pPr>
+                        <a:lnSpc>
+                          <a:spcPct val="105000"/>
+                        </a:lnSpc>
+                      </a:pPr>
+                      <a:r>
+                        <a:rPr sz="1150" b="0">
+                          <a:solidFill>
+                            <a:srgbClr val="1B2A4A"/>
+                          </a:solidFill>
+                          <a:latin typeface="Noto Sans CJK SC"/>
+                        </a:rPr>
+                        <a:t>额外节油，非总节油</a:t>
+                      </a:r>
+                    </a:p>
+                  </a:txBody>
+                  <a:tcPr marL="54864" marR="54864" marT="27432" marB="27432" anchor="ctr">
+                    <a:solidFill>
+                      <a:srgbClr val="EEF3FA"/>
+                    </a:solidFill>
+                  </a:tcPr>
+                </a:tc>
+              </a:tr>
+              <a:tr h="807720">
+                <a:tc>
+                  <a:txBody>
+                    <a:bodyPr/>
+                    <a:lstStyle/>
+                    <a:p>
+                      <a:pPr>
+                        <a:lnSpc>
+                          <a:spcPct val="105000"/>
+                        </a:lnSpc>
+                      </a:pPr>
+                      <a:r>
+                        <a:rPr sz="1150" b="0">
+                          <a:solidFill>
+                            <a:srgbClr val="1B2A4A"/>
+                          </a:solidFill>
+                          <a:latin typeface="Noto Sans CJK SC"/>
+                        </a:rPr>
+                        <a:t>纵倾优化</a:t>
+                      </a:r>
+                    </a:p>
+                  </a:txBody>
+                  <a:tcPr marL="54864" marR="54864" marT="27432" marB="27432" anchor="ctr"/>
+                </a:tc>
+                <a:tc>
+                  <a:txBody>
+                    <a:bodyPr/>
+                    <a:lstStyle/>
+                    <a:p>
+                      <a:pPr>
+                        <a:lnSpc>
+                          <a:spcPct val="105000"/>
+                        </a:lnSpc>
+                      </a:pPr>
+                      <a:r>
+                        <a:rPr sz="1150" b="0">
+                          <a:solidFill>
+                            <a:srgbClr val="1B2A4A"/>
+                          </a:solidFill>
+                          <a:latin typeface="Noto Sans CJK SC"/>
+                        </a:rPr>
+                        <a:t>ClassNK 两次印度洋横渡专项：最优纵倾最多再省 4%</a:t>
+                      </a:r>
+                    </a:p>
+                  </a:txBody>
+                  <a:tcPr marL="54864" marR="54864" marT="27432" marB="27432" anchor="ctr"/>
+                </a:tc>
+                <a:tc>
+                  <a:txBody>
+                    <a:bodyPr/>
+                    <a:lstStyle/>
+                    <a:p>
+                      <a:pPr>
+                        <a:lnSpc>
+                          <a:spcPct val="105000"/>
+                        </a:lnSpc>
+                      </a:pPr>
+                      <a:r>
+                        <a:rPr sz="1150" b="0">
+                          <a:solidFill>
+                            <a:srgbClr val="1B2A4A"/>
+                          </a:solidFill>
+                          <a:latin typeface="Noto Sans CJK SC"/>
+                        </a:rPr>
+                        <a:t>与航速/航程优化收益可叠加</a:t>
+                      </a:r>
+                    </a:p>
+                  </a:txBody>
+                  <a:tcPr marL="54864" marR="54864" marT="27432" marB="27432" anchor="ctr"/>
+                </a:tc>
+              </a:tr>
+              <a:tr h="807720">
+                <a:tc>
+                  <a:txBody>
+                    <a:bodyPr/>
+                    <a:lstStyle/>
+                    <a:p>
+                      <a:pPr>
+                        <a:lnSpc>
+                          <a:spcPct val="105000"/>
+                        </a:lnSpc>
+                      </a:pPr>
+                      <a:r>
+                        <a:rPr sz="1150" b="0">
+                          <a:solidFill>
+                            <a:srgbClr val="1B2A4A"/>
+                          </a:solidFill>
+                          <a:latin typeface="Noto Sans CJK SC"/>
+                        </a:rPr>
+                        <a:t>MPC 能量管理</a:t>
+                      </a:r>
+                    </a:p>
+                  </a:txBody>
+                  <a:tcPr marL="54864" marR="54864" marT="27432" marB="27432" anchor="ctr">
+                    <a:solidFill>
+                      <a:srgbClr val="EEF3FA"/>
+                    </a:solidFill>
+                  </a:tcPr>
+                </a:tc>
+                <a:tc>
+                  <a:txBody>
+                    <a:bodyPr/>
+                    <a:lstStyle/>
+                    <a:p>
+                      <a:pPr>
+                        <a:lnSpc>
+                          <a:spcPct val="105000"/>
+                        </a:lnSpc>
+                      </a:pPr>
+                      <a:r>
+                        <a:rPr sz="1150" b="0">
+                          <a:solidFill>
+                            <a:srgbClr val="1B2A4A"/>
+                          </a:solidFill>
+                          <a:latin typeface="Noto Sans CJK SC"/>
+                        </a:rPr>
+                        <a:t>Zhang 2022：双层 MPC 比传统单层 MPC 再省 17.2%（30 kW 柴电混合船）</a:t>
+                      </a:r>
+                    </a:p>
+                    <a:p>
+                      <a:pPr>
+                        <a:lnSpc>
+                          <a:spcPct val="105000"/>
+                        </a:lnSpc>
+                      </a:pPr>
+                      <a:r>
+                        <a:rPr sz="1150" b="0">
+                          <a:solidFill>
+                            <a:srgbClr val="1B2A4A"/>
+                          </a:solidFill>
+                          <a:latin typeface="Noto Sans CJK SC"/>
+                        </a:rPr>
+                        <a:t>周妍 2024：比规则控制省 4.85%（客滚船）</a:t>
+                      </a:r>
+                    </a:p>
+                  </a:txBody>
+                  <a:tcPr marL="54864" marR="54864" marT="27432" marB="27432" anchor="ctr">
+                    <a:solidFill>
+                      <a:srgbClr val="EEF3FA"/>
+                    </a:solidFill>
+                  </a:tcPr>
+                </a:tc>
+                <a:tc>
+                  <a:txBody>
+                    <a:bodyPr/>
+                    <a:lstStyle/>
+                    <a:p>
+                      <a:pPr>
+                        <a:lnSpc>
+                          <a:spcPct val="105000"/>
+                        </a:lnSpc>
+                      </a:pPr>
+                      <a:r>
+                        <a:rPr sz="1150" b="0">
+                          <a:solidFill>
+                            <a:srgbClr val="1B2A4A"/>
+                          </a:solidFill>
+                          <a:latin typeface="Noto Sans CJK SC"/>
+                        </a:rPr>
+                        <a:t>两者对比基线不同，不可互比；</a:t>
+                      </a:r>
+                    </a:p>
+                    <a:p>
+                      <a:pPr>
+                        <a:lnSpc>
+                          <a:spcPct val="105000"/>
+                        </a:lnSpc>
+                      </a:pPr>
+                      <a:r>
+                        <a:rPr sz="1150" b="0">
+                          <a:solidFill>
+                            <a:srgbClr val="1B2A4A"/>
+                          </a:solidFill>
+                          <a:latin typeface="Noto Sans CJK SC"/>
+                        </a:rPr>
+                        <a:t>均为仿真</a:t>
+                      </a:r>
+                    </a:p>
+                  </a:txBody>
+                  <a:tcPr marL="54864" marR="54864" marT="27432" marB="27432" anchor="ctr">
+                    <a:solidFill>
+                      <a:srgbClr val="EEF3FA"/>
+                    </a:solidFill>
+                  </a:tcPr>
+                </a:tc>
+              </a:tr>
+              <a:tr h="807720">
+                <a:tc>
+                  <a:txBody>
+                    <a:bodyPr/>
+                    <a:lstStyle/>
+                    <a:p>
+                      <a:pPr>
+                        <a:lnSpc>
+                          <a:spcPct val="105000"/>
+                        </a:lnSpc>
+                      </a:pPr>
+                      <a:r>
+                        <a:rPr sz="1150" b="0">
+                          <a:solidFill>
+                            <a:srgbClr val="1B2A4A"/>
+                          </a:solidFill>
+                          <a:latin typeface="Noto Sans CJK SC"/>
+                        </a:rPr>
+                        <a:t>气象航线</a:t>
+                      </a:r>
+                    </a:p>
+                  </a:txBody>
+                  <a:tcPr marL="54864" marR="54864" marT="27432" marB="27432" anchor="ctr"/>
+                </a:tc>
+                <a:tc>
+                  <a:txBody>
+                    <a:bodyPr/>
+                    <a:lstStyle/>
+                    <a:p>
+                      <a:pPr>
+                        <a:lnSpc>
+                          <a:spcPct val="105000"/>
+                        </a:lnSpc>
+                      </a:pPr>
+                      <a:r>
+                        <a:rPr sz="1150" b="0">
+                          <a:solidFill>
+                            <a:srgbClr val="1B2A4A"/>
+                          </a:solidFill>
+                          <a:latin typeface="Noto Sans CJK SC"/>
+                        </a:rPr>
+                        <a:t>算法基准研究：Isochrone / Isopone / DP / 3D-DP / Dijkstra</a:t>
+                      </a:r>
+                    </a:p>
+                    <a:p>
+                      <a:pPr>
+                        <a:lnSpc>
+                          <a:spcPct val="105000"/>
+                        </a:lnSpc>
+                      </a:pPr>
+                      <a:r>
+                        <a:rPr sz="1150" b="0">
+                          <a:solidFill>
+                            <a:srgbClr val="1B2A4A"/>
+                          </a:solidFill>
+                          <a:latin typeface="Noto Sans CJK SC"/>
+                        </a:rPr>
+                        <a:t>五算法横向对比（Wang et al., Chalmers，北大西洋案例）</a:t>
+                      </a:r>
+                    </a:p>
+                  </a:txBody>
+                  <a:tcPr marL="54864" marR="54864" marT="27432" marB="27432" anchor="ctr"/>
+                </a:tc>
+                <a:tc>
+                  <a:txBody>
+                    <a:bodyPr/>
+                    <a:lstStyle/>
+                    <a:p>
+                      <a:pPr>
+                        <a:lnSpc>
+                          <a:spcPct val="105000"/>
+                        </a:lnSpc>
+                      </a:pPr>
+                      <a:r>
+                        <a:rPr sz="1150" b="0">
+                          <a:solidFill>
+                            <a:srgbClr val="1B2A4A"/>
+                          </a:solidFill>
+                          <a:latin typeface="Noto Sans CJK SC"/>
+                        </a:rPr>
+                        <a:t>仿真基准，无单一最优算法</a:t>
+                      </a:r>
+                    </a:p>
+                  </a:txBody>
+                  <a:tcPr marL="54864" marR="54864" marT="27432" marB="27432" anchor="ctr"/>
+                </a:tc>
+              </a:tr>
+            </a:tbl>
+          </a:graphicData>
+        </a:graphic>
+      </p:graphicFrame>
+      <p:sp>
+        <p:nvSpPr>
+          <p:cNvPr id="6" name="TextBox 5"/>
+          <p:cNvSpPr txBox="1"/>
+          <p:nvPr/>
+        </p:nvSpPr>
+        <p:spPr>
+          <a:xfrm>
+            <a:off x="11475720" y="6473952"/>
+            <a:ext cx="640080" cy="320040"/>
+          </a:xfrm>
+          <a:prstGeom prst="rect">
+            <a:avLst/>
+          </a:prstGeom>
+          <a:noFill/>
+        </p:spPr>
+        <p:txBody>
+          <a:bodyPr wrap="square" anchor="t">
+            <a:spAutoFit/>
+          </a:bodyPr>
+          <a:lstStyle/>
+          <a:p>
+            <a:pPr algn="r">
+              <a:lnSpc>
+                <a:spcPct val="115000"/>
+              </a:lnSpc>
+              <a:spcAft>
+                <a:spcPts val="600"/>
+              </a:spcAft>
+            </a:pPr>
+            <a:r>
+              <a:rPr sz="1100" b="0">
+                <a:solidFill>
+                  <a:srgbClr val="666666"/>
+                </a:solidFill>
+                <a:latin typeface="Noto Sans CJK SC"/>
+              </a:rPr>
+              <a:t>13 / 20</a:t>
+            </a:r>
+          </a:p>
+        </p:txBody>
+      </p:sp>
+    </p:spTree>
+  </p:cSld>
+  <p:clrMapOvr>
+    <a:masterClrMapping/>
+  </p:clrMapOvr>
+</p:sld>
+</file>
+
+<file path=ppt/slides/slide14.xml><?xml version="1.0" encoding="utf-8"?>
+<p:sld xmlns:a="http://schemas.openxmlformats.org/drawingml/2006/main" xmlns:p="http://schemas.openxmlformats.org/presentationml/2006/main" xmlns:r="http://schemas.openxmlformats.org/officeDocument/2006/relationships">
+  <p:cSld>
+    <p:spTree>
+      <p:nvGrpSpPr>
+        <p:cNvPr id="1" name=""/>
+        <p:cNvGrpSpPr/>
+        <p:nvPr/>
+      </p:nvGrpSpPr>
+      <p:grpSpPr/>
+      <p:sp>
+        <p:nvSpPr>
+          <p:cNvPr id="2" name="Rectangle 1"/>
+          <p:cNvSpPr/>
+          <p:nvPr/>
+        </p:nvSpPr>
+        <p:spPr>
+          <a:xfrm>
+            <a:off x="0" y="0"/>
+            <a:ext cx="12191695" cy="109728"/>
+          </a:xfrm>
+          <a:prstGeom prst="rect">
+            <a:avLst/>
+          </a:prstGeom>
+          <a:solidFill>
+            <a:srgbClr val="1F77B4"/>
+          </a:solidFill>
+          <a:ln>
+            <a:noFill/>
+          </a:ln>
+        </p:spPr>
+        <p:style>
+          <a:lnRef idx="1">
+            <a:schemeClr val="accent1"/>
+          </a:lnRef>
+          <a:fillRef idx="3">
+            <a:schemeClr val="accent1"/>
+          </a:fillRef>
+          <a:effectRef idx="2">
+            <a:schemeClr val="accent1"/>
+          </a:effectRef>
+          <a:fontRef idx="minor">
+            <a:schemeClr val="lt1"/>
+          </a:fontRef>
+        </p:style>
+        <p:txBody>
+          <a:bodyPr rtlCol="0" anchor="ctr"/>
+          <a:lstStyle/>
+          <a:p>
+            <a:pPr algn="ctr"/>
+          </a:p>
+        </p:txBody>
+      </p:sp>
+      <p:sp>
+        <p:nvSpPr>
+          <p:cNvPr id="3" name="TextBox 2"/>
+          <p:cNvSpPr txBox="1"/>
+          <p:nvPr/>
+        </p:nvSpPr>
+        <p:spPr>
+          <a:xfrm>
+            <a:off x="457200" y="256032"/>
+            <a:ext cx="11247120" cy="822960"/>
+          </a:xfrm>
+          <a:prstGeom prst="rect">
+            <a:avLst/>
+          </a:prstGeom>
+          <a:noFill/>
+        </p:spPr>
+        <p:txBody>
+          <a:bodyPr wrap="square" anchor="t">
+            <a:spAutoFit/>
+          </a:bodyPr>
+          <a:lstStyle/>
+          <a:p>
+            <a:pPr algn="l">
+              <a:lnSpc>
+                <a:spcPct val="115000"/>
+              </a:lnSpc>
+              <a:spcAft>
+                <a:spcPts val="600"/>
+              </a:spcAft>
+            </a:pPr>
+            <a:r>
+              <a:rPr sz="3000" b="1">
+                <a:solidFill>
+                  <a:srgbClr val="1B2A4A"/>
+                </a:solidFill>
+                <a:latin typeface="Noto Sans CJK SC"/>
+              </a:rPr>
+              <a:t>节能方案优缺点（二）：操作层与控制层</a:t>
+            </a:r>
+          </a:p>
+        </p:txBody>
+      </p:sp>
+      <p:graphicFrame>
+        <p:nvGraphicFramePr>
+          <p:cNvPr id="4" name="Table 3"/>
+          <p:cNvGraphicFramePr>
+            <a:graphicFrameLocks noGrp="1"/>
+          </p:cNvGraphicFramePr>
+          <p:nvPr/>
+        </p:nvGraphicFramePr>
+        <p:xfrm>
+          <a:off x="457200" y="1463040"/>
+          <a:ext cx="11338559" cy="4846320"/>
+        </p:xfrm>
+        <a:graphic>
+          <a:graphicData uri="http://schemas.openxmlformats.org/drawingml/2006/table">
+            <a:tbl>
+              <a:tblPr firstRow="1" bandRow="1">
+                <a:tableStyleId>{5C22544A-7EE6-4342-B048-85BDC9FD1C3A}</a:tableStyleId>
+              </a:tblPr>
+              <a:tblGrid>
+                <a:gridCol w="1939490"/>
+                <a:gridCol w="3878981"/>
+                <a:gridCol w="2685448"/>
+                <a:gridCol w="2834640"/>
+              </a:tblGrid>
+              <a:tr h="1211580">
+                <a:tc>
+                  <a:txBody>
+                    <a:bodyPr/>
+                    <a:lstStyle/>
+                    <a:p>
+                      <a:pPr>
+                        <a:lnSpc>
+                          <a:spcPct val="105000"/>
+                        </a:lnSpc>
+                      </a:pPr>
+                      <a:r>
+                        <a:rPr sz="1250" b="1">
+                          <a:solidFill>
+                            <a:srgbClr val="FFFFFF"/>
+                          </a:solidFill>
+                          <a:latin typeface="Noto Sans CJK SC"/>
+                        </a:rPr>
+                        <a:t>方案</a:t>
+                      </a:r>
+                    </a:p>
+                  </a:txBody>
+                  <a:tcPr marL="54864" marR="54864" marT="27432" marB="27432" anchor="ctr">
+                    <a:solidFill>
+                      <a:srgbClr val="1F77B4"/>
+                    </a:solidFill>
+                  </a:tcPr>
+                </a:tc>
+                <a:tc>
+                  <a:txBody>
+                    <a:bodyPr/>
+                    <a:lstStyle/>
+                    <a:p>
+                      <a:pPr>
+                        <a:lnSpc>
+                          <a:spcPct val="105000"/>
+                        </a:lnSpc>
+                      </a:pPr>
+                      <a:r>
+                        <a:rPr sz="1250" b="1">
+                          <a:solidFill>
+                            <a:srgbClr val="FFFFFF"/>
+                          </a:solidFill>
+                          <a:latin typeface="Noto Sans CJK SC"/>
+                        </a:rPr>
+                        <a:t>代表数据（已核对）</a:t>
+                      </a:r>
+                    </a:p>
+                  </a:txBody>
+                  <a:tcPr marL="54864" marR="54864" marT="27432" marB="27432" anchor="ctr">
+                    <a:solidFill>
+                      <a:srgbClr val="1F77B4"/>
+                    </a:solidFill>
+                  </a:tcPr>
+                </a:tc>
+                <a:tc>
+                  <a:txBody>
+                    <a:bodyPr/>
+                    <a:lstStyle/>
+                    <a:p>
+                      <a:pPr>
+                        <a:lnSpc>
+                          <a:spcPct val="105000"/>
+                        </a:lnSpc>
+                      </a:pPr>
+                      <a:r>
+                        <a:rPr sz="1250" b="1">
+                          <a:solidFill>
+                            <a:srgbClr val="FFFFFF"/>
+                          </a:solidFill>
+                          <a:latin typeface="Noto Sans CJK SC"/>
+                        </a:rPr>
+                        <a:t>优点</a:t>
+                      </a:r>
+                    </a:p>
+                  </a:txBody>
+                  <a:tcPr marL="54864" marR="54864" marT="27432" marB="27432" anchor="ctr">
+                    <a:solidFill>
+                      <a:srgbClr val="1F77B4"/>
+                    </a:solidFill>
+                  </a:tcPr>
+                </a:tc>
+                <a:tc>
+                  <a:txBody>
+                    <a:bodyPr/>
+                    <a:lstStyle/>
+                    <a:p>
+                      <a:pPr>
+                        <a:lnSpc>
+                          <a:spcPct val="105000"/>
+                        </a:lnSpc>
+                      </a:pPr>
+                      <a:r>
+                        <a:rPr sz="1250" b="1">
+                          <a:solidFill>
+                            <a:srgbClr val="FFFFFF"/>
+                          </a:solidFill>
+                          <a:latin typeface="Noto Sans CJK SC"/>
+                        </a:rPr>
+                        <a:t>缺点</a:t>
+                      </a:r>
+                    </a:p>
+                  </a:txBody>
+                  <a:tcPr marL="54864" marR="54864" marT="27432" marB="27432" anchor="ctr">
+                    <a:solidFill>
+                      <a:srgbClr val="1F77B4"/>
+                    </a:solidFill>
+                  </a:tcPr>
+                </a:tc>
+              </a:tr>
+              <a:tr h="1211580">
+                <a:tc>
+                  <a:txBody>
+                    <a:bodyPr/>
+                    <a:lstStyle/>
+                    <a:p>
+                      <a:pPr>
+                        <a:lnSpc>
+                          <a:spcPct val="105000"/>
+                        </a:lnSpc>
+                      </a:pPr>
+                      <a:r>
+                        <a:rPr sz="1200" b="0">
+                          <a:solidFill>
+                            <a:srgbClr val="1B2A4A"/>
+                          </a:solidFill>
+                          <a:latin typeface="Noto Sans CJK SC"/>
+                        </a:rPr>
+                        <a:t>MPC 能量管理</a:t>
+                      </a:r>
+                    </a:p>
+                    <a:p>
+                      <a:pPr>
+                        <a:lnSpc>
+                          <a:spcPct val="105000"/>
+                        </a:lnSpc>
+                      </a:pPr>
+                      <a:r>
+                        <a:rPr sz="1200" b="0">
+                          <a:solidFill>
+                            <a:srgbClr val="1B2A4A"/>
+                          </a:solidFill>
+                          <a:latin typeface="Noto Sans CJK SC"/>
+                        </a:rPr>
+                        <a:t>(混合动力 EMS)</a:t>
+                      </a:r>
+                    </a:p>
+                  </a:txBody>
+                  <a:tcPr marL="54864" marR="54864" marT="27432" marB="27432" anchor="ctr"/>
+                </a:tc>
+                <a:tc>
+                  <a:txBody>
+                    <a:bodyPr/>
+                    <a:lstStyle/>
+                    <a:p>
+                      <a:pPr>
+                        <a:lnSpc>
+                          <a:spcPct val="105000"/>
+                        </a:lnSpc>
+                      </a:pPr>
+                      <a:r>
+                        <a:rPr sz="1200" b="0">
+                          <a:solidFill>
+                            <a:srgbClr val="1B2A4A"/>
+                          </a:solidFill>
+                          <a:latin typeface="Noto Sans CJK SC"/>
+                        </a:rPr>
+                        <a:t>双层 MPC 比传统 MPC 再省 17.2%（Zhang 2022）</a:t>
+                      </a:r>
+                    </a:p>
+                    <a:p>
+                      <a:pPr>
+                        <a:lnSpc>
+                          <a:spcPct val="105000"/>
+                        </a:lnSpc>
+                      </a:pPr>
+                      <a:r>
+                        <a:rPr sz="1200" b="0">
+                          <a:solidFill>
+                            <a:srgbClr val="1B2A4A"/>
+                          </a:solidFill>
+                          <a:latin typeface="Noto Sans CJK SC"/>
+                        </a:rPr>
+                        <a:t>客滚船 MPC-EMS 节油 4.85%（周妍 2024）</a:t>
+                      </a:r>
+                    </a:p>
+                  </a:txBody>
+                  <a:tcPr marL="54864" marR="54864" marT="27432" marB="27432" anchor="ctr"/>
+                </a:tc>
+                <a:tc>
+                  <a:txBody>
+                    <a:bodyPr/>
+                    <a:lstStyle/>
+                    <a:p>
+                      <a:pPr>
+                        <a:lnSpc>
+                          <a:spcPct val="105000"/>
+                        </a:lnSpc>
+                      </a:pPr>
+                      <a:r>
+                        <a:rPr sz="1200" b="0">
+                          <a:solidFill>
+                            <a:srgbClr val="1B2A4A"/>
+                          </a:solidFill>
+                          <a:latin typeface="Noto Sans CJK SC"/>
+                        </a:rPr>
+                        <a:t>滚动时域天然适合负载预测；多目标可编码</a:t>
+                      </a:r>
+                    </a:p>
+                  </a:txBody>
+                  <a:tcPr marL="54864" marR="54864" marT="27432" marB="27432" anchor="ctr"/>
+                </a:tc>
+                <a:tc>
+                  <a:txBody>
+                    <a:bodyPr/>
+                    <a:lstStyle/>
+                    <a:p>
+                      <a:pPr>
+                        <a:lnSpc>
+                          <a:spcPct val="105000"/>
+                        </a:lnSpc>
+                      </a:pPr>
+                      <a:r>
+                        <a:rPr sz="1200" b="0">
+                          <a:solidFill>
+                            <a:srgbClr val="1B2A4A"/>
+                          </a:solidFill>
+                          <a:latin typeface="Noto Sans CJK SC"/>
+                        </a:rPr>
+                        <a:t>全部仿真验证无实船数据；仅限混合动力船型</a:t>
+                      </a:r>
+                    </a:p>
+                  </a:txBody>
+                  <a:tcPr marL="54864" marR="54864" marT="27432" marB="27432" anchor="ctr"/>
+                </a:tc>
+              </a:tr>
+              <a:tr h="1211580">
+                <a:tc>
+                  <a:txBody>
+                    <a:bodyPr/>
+                    <a:lstStyle/>
+                    <a:p>
+                      <a:pPr>
+                        <a:lnSpc>
+                          <a:spcPct val="105000"/>
+                        </a:lnSpc>
+                      </a:pPr>
+                      <a:r>
+                        <a:rPr sz="1200" b="0">
+                          <a:solidFill>
+                            <a:srgbClr val="1B2A4A"/>
+                          </a:solidFill>
+                          <a:latin typeface="Noto Sans CJK SC"/>
+                        </a:rPr>
+                        <a:t>自动舵节能</a:t>
+                      </a:r>
+                    </a:p>
+                    <a:p>
+                      <a:pPr>
+                        <a:lnSpc>
+                          <a:spcPct val="105000"/>
+                        </a:lnSpc>
+                      </a:pPr>
+                      <a:r>
+                        <a:rPr sz="1200" b="0">
+                          <a:solidFill>
+                            <a:srgbClr val="1B2A4A"/>
+                          </a:solidFill>
+                          <a:latin typeface="Noto Sans CJK SC"/>
+                        </a:rPr>
+                        <a:t>(减少无效操舵)</a:t>
+                      </a:r>
+                    </a:p>
+                  </a:txBody>
+                  <a:tcPr marL="54864" marR="54864" marT="27432" marB="27432" anchor="ctr">
+                    <a:solidFill>
+                      <a:srgbClr val="EEF3FA"/>
+                    </a:solidFill>
+                  </a:tcPr>
+                </a:tc>
+                <a:tc>
+                  <a:txBody>
+                    <a:bodyPr/>
+                    <a:lstStyle/>
+                    <a:p>
+                      <a:pPr>
+                        <a:lnSpc>
+                          <a:spcPct val="105000"/>
+                        </a:lnSpc>
+                      </a:pPr>
+                      <a:r>
+                        <a:rPr sz="1200" b="0">
+                          <a:solidFill>
+                            <a:srgbClr val="1B2A4A"/>
+                          </a:solidFill>
+                          <a:latin typeface="Noto Sans CJK SC"/>
+                        </a:rPr>
+                        <a:t>IMO：0.1–1.0%；ABS：最高 1%、改造成本 $2 万</a:t>
+                      </a:r>
+                    </a:p>
+                    <a:p>
+                      <a:pPr>
+                        <a:lnSpc>
+                          <a:spcPct val="105000"/>
+                        </a:lnSpc>
+                      </a:pPr>
+                      <a:r>
+                        <a:rPr sz="1200" b="0">
+                          <a:solidFill>
+                            <a:srgbClr val="1B2A4A"/>
+                          </a:solidFill>
+                          <a:latin typeface="Noto Sans CJK SC"/>
+                        </a:rPr>
+                        <a:t>MRAS 实船试验 1–3%（van Amerongen 经典）</a:t>
+                      </a:r>
+                    </a:p>
+                  </a:txBody>
+                  <a:tcPr marL="54864" marR="54864" marT="27432" marB="27432" anchor="ctr">
+                    <a:solidFill>
+                      <a:srgbClr val="EEF3FA"/>
+                    </a:solidFill>
+                  </a:tcPr>
+                </a:tc>
+                <a:tc>
+                  <a:txBody>
+                    <a:bodyPr/>
+                    <a:lstStyle/>
+                    <a:p>
+                      <a:pPr>
+                        <a:lnSpc>
+                          <a:spcPct val="105000"/>
+                        </a:lnSpc>
+                      </a:pPr>
+                      <a:r>
+                        <a:rPr sz="1200" b="0">
+                          <a:solidFill>
+                            <a:srgbClr val="1B2A4A"/>
+                          </a:solidFill>
+                          <a:latin typeface="Noto Sans CJK SC"/>
+                        </a:rPr>
+                        <a:t>实施成本最低（软件级）；兼降舵机磨损</a:t>
+                      </a:r>
+                    </a:p>
+                  </a:txBody>
+                  <a:tcPr marL="54864" marR="54864" marT="27432" marB="27432" anchor="ctr">
+                    <a:solidFill>
+                      <a:srgbClr val="EEF3FA"/>
+                    </a:solidFill>
+                  </a:tcPr>
+                </a:tc>
+                <a:tc>
+                  <a:txBody>
+                    <a:bodyPr/>
+                    <a:lstStyle/>
+                    <a:p>
+                      <a:pPr>
+                        <a:lnSpc>
+                          <a:spcPct val="105000"/>
+                        </a:lnSpc>
+                      </a:pPr>
+                      <a:r>
+                        <a:rPr sz="1200" b="0">
+                          <a:solidFill>
+                            <a:srgbClr val="1B2A4A"/>
+                          </a:solidFill>
+                          <a:latin typeface="Noto Sans CJK SC"/>
+                        </a:rPr>
+                        <a:t>单项幅度最小；收益依赖海况</a:t>
+                      </a:r>
+                    </a:p>
+                  </a:txBody>
+                  <a:tcPr marL="54864" marR="54864" marT="27432" marB="27432" anchor="ctr">
+                    <a:solidFill>
+                      <a:srgbClr val="EEF3FA"/>
+                    </a:solidFill>
+                  </a:tcPr>
+                </a:tc>
+              </a:tr>
+              <a:tr h="1211580">
+                <a:tc>
+                  <a:txBody>
+                    <a:bodyPr/>
+                    <a:lstStyle/>
+                    <a:p>
+                      <a:pPr>
+                        <a:lnSpc>
+                          <a:spcPct val="105000"/>
+                        </a:lnSpc>
+                      </a:pPr>
+                      <a:r>
+                        <a:rPr sz="1200" b="0">
+                          <a:solidFill>
+                            <a:srgbClr val="1B2A4A"/>
+                          </a:solidFill>
+                          <a:latin typeface="Noto Sans CJK SC"/>
+                        </a:rPr>
+                        <a:t>双舵 Toe Angle</a:t>
+                      </a:r>
+                    </a:p>
+                    <a:p>
+                      <a:pPr>
+                        <a:lnSpc>
+                          <a:spcPct val="105000"/>
+                        </a:lnSpc>
+                      </a:pPr>
+                      <a:r>
+                        <a:rPr sz="1200" b="0">
+                          <a:solidFill>
+                            <a:srgbClr val="1B2A4A"/>
+                          </a:solidFill>
+                          <a:latin typeface="Noto Sans CJK SC"/>
+                        </a:rPr>
+                        <a:t>(舵系水动力优化)</a:t>
+                      </a:r>
+                    </a:p>
+                  </a:txBody>
+                  <a:tcPr marL="54864" marR="54864" marT="27432" marB="27432" anchor="ctr"/>
+                </a:tc>
+                <a:tc>
+                  <a:txBody>
+                    <a:bodyPr/>
+                    <a:lstStyle/>
+                    <a:p>
+                      <a:pPr>
+                        <a:lnSpc>
+                          <a:spcPct val="105000"/>
+                        </a:lnSpc>
+                      </a:pPr>
+                      <a:r>
+                        <a:rPr sz="1200" b="0">
+                          <a:solidFill>
+                            <a:srgbClr val="1B2A4A"/>
+                          </a:solidFill>
+                          <a:latin typeface="Noto Sans CJK SC"/>
+                        </a:rPr>
+                        <a:t>Anschütz 实测最大 4.7%、平均约 2%（宣称 ≤5%）</a:t>
+                      </a:r>
+                    </a:p>
+                    <a:p>
+                      <a:pPr>
+                        <a:lnSpc>
+                          <a:spcPct val="105000"/>
+                        </a:lnSpc>
+                      </a:pPr>
+                      <a:r>
+                        <a:rPr sz="1200" b="0">
+                          <a:solidFill>
+                            <a:srgbClr val="1B2A4A"/>
+                          </a:solidFill>
+                          <a:latin typeface="Noto Sans CJK SC"/>
+                        </a:rPr>
+                        <a:t>自适应模式平均减少舵动作 25%</a:t>
+                      </a:r>
+                    </a:p>
+                  </a:txBody>
+                  <a:tcPr marL="54864" marR="54864" marT="27432" marB="27432" anchor="ctr"/>
+                </a:tc>
+                <a:tc>
+                  <a:txBody>
+                    <a:bodyPr/>
+                    <a:lstStyle/>
+                    <a:p>
+                      <a:pPr>
+                        <a:lnSpc>
+                          <a:spcPct val="105000"/>
+                        </a:lnSpc>
+                      </a:pPr>
+                      <a:r>
+                        <a:rPr sz="1200" b="0">
+                          <a:solidFill>
+                            <a:srgbClr val="1B2A4A"/>
+                          </a:solidFill>
+                          <a:latin typeface="Noto Sans CJK SC"/>
+                        </a:rPr>
+                        <a:t>双舵船额外收益；已有商用产品</a:t>
+                      </a:r>
+                    </a:p>
+                  </a:txBody>
+                  <a:tcPr marL="54864" marR="54864" marT="27432" marB="27432" anchor="ctr"/>
+                </a:tc>
+                <a:tc>
+                  <a:txBody>
+                    <a:bodyPr/>
+                    <a:lstStyle/>
+                    <a:p>
+                      <a:pPr>
+                        <a:lnSpc>
+                          <a:spcPct val="105000"/>
+                        </a:lnSpc>
+                      </a:pPr>
+                      <a:r>
+                        <a:rPr sz="1200" b="0">
+                          <a:solidFill>
+                            <a:srgbClr val="1B2A4A"/>
+                          </a:solidFill>
+                          <a:latin typeface="Noto Sans CJK SC"/>
+                        </a:rPr>
+                        <a:t>仅适用双舵船；厂商数据待第三方复核</a:t>
+                      </a:r>
+                    </a:p>
+                  </a:txBody>
+                  <a:tcPr marL="54864" marR="54864" marT="27432" marB="27432" anchor="ctr"/>
+                </a:tc>
+              </a:tr>
+            </a:tbl>
+          </a:graphicData>
+        </a:graphic>
+      </p:graphicFrame>
+      <p:sp>
+        <p:nvSpPr>
+          <p:cNvPr id="5" name="TextBox 4"/>
+          <p:cNvSpPr txBox="1"/>
+          <p:nvPr/>
+        </p:nvSpPr>
+        <p:spPr>
+          <a:xfrm>
+            <a:off x="11475720" y="6473952"/>
+            <a:ext cx="640080" cy="320040"/>
+          </a:xfrm>
+          <a:prstGeom prst="rect">
+            <a:avLst/>
+          </a:prstGeom>
+          <a:noFill/>
+        </p:spPr>
+        <p:txBody>
+          <a:bodyPr wrap="square" anchor="t">
+            <a:spAutoFit/>
+          </a:bodyPr>
+          <a:lstStyle/>
+          <a:p>
+            <a:pPr algn="r">
+              <a:lnSpc>
+                <a:spcPct val="115000"/>
+              </a:lnSpc>
+              <a:spcAft>
+                <a:spcPts val="600"/>
+              </a:spcAft>
+            </a:pPr>
+            <a:r>
+              <a:rPr sz="1100" b="0">
+                <a:solidFill>
+                  <a:srgbClr val="666666"/>
+                </a:solidFill>
+                <a:latin typeface="Noto Sans CJK SC"/>
+              </a:rPr>
+              <a:t>14 / 20</a:t>
+            </a:r>
+          </a:p>
+        </p:txBody>
+      </p:sp>
+    </p:spTree>
+  </p:cSld>
+  <p:clrMapOvr>
+    <a:masterClrMapping/>
+  </p:clrMapOvr>
+</p:sld>
+</file>
+
+<file path=ppt/slides/slide15.xml><?xml version="1.0" encoding="utf-8"?>
+<p:sld xmlns:a="http://schemas.openxmlformats.org/drawingml/2006/main" xmlns:p="http://schemas.openxmlformats.org/presentationml/2006/main" xmlns:r="http://schemas.openxmlformats.org/officeDocument/2006/relationships">
+  <p:cSld>
+    <p:spTree>
+      <p:nvGrpSpPr>
+        <p:cNvPr id="1" name=""/>
+        <p:cNvGrpSpPr/>
+        <p:nvPr/>
+      </p:nvGrpSpPr>
+      <p:grpSpPr/>
+      <p:sp>
+        <p:nvSpPr>
+          <p:cNvPr id="2" name="Rectangle 1"/>
+          <p:cNvSpPr/>
+          <p:nvPr/>
+        </p:nvSpPr>
+        <p:spPr>
+          <a:xfrm>
+            <a:off x="0" y="0"/>
+            <a:ext cx="12191695" cy="109728"/>
+          </a:xfrm>
+          <a:prstGeom prst="rect">
+            <a:avLst/>
+          </a:prstGeom>
+          <a:solidFill>
+            <a:srgbClr val="1F77B4"/>
+          </a:solidFill>
+          <a:ln>
+            <a:noFill/>
+          </a:ln>
+        </p:spPr>
+        <p:style>
+          <a:lnRef idx="1">
+            <a:schemeClr val="accent1"/>
+          </a:lnRef>
+          <a:fillRef idx="3">
+            <a:schemeClr val="accent1"/>
+          </a:fillRef>
+          <a:effectRef idx="2">
+            <a:schemeClr val="accent1"/>
+          </a:effectRef>
+          <a:fontRef idx="minor">
+            <a:schemeClr val="lt1"/>
+          </a:fontRef>
+        </p:style>
+        <p:txBody>
+          <a:bodyPr rtlCol="0" anchor="ctr"/>
+          <a:lstStyle/>
+          <a:p>
+            <a:pPr algn="ctr"/>
+          </a:p>
+        </p:txBody>
+      </p:sp>
+      <p:sp>
+        <p:nvSpPr>
+          <p:cNvPr id="3" name="TextBox 2"/>
+          <p:cNvSpPr txBox="1"/>
+          <p:nvPr/>
+        </p:nvSpPr>
+        <p:spPr>
+          <a:xfrm>
+            <a:off x="457200" y="256032"/>
+            <a:ext cx="11247120" cy="822960"/>
+          </a:xfrm>
+          <a:prstGeom prst="rect">
+            <a:avLst/>
+          </a:prstGeom>
+          <a:noFill/>
+        </p:spPr>
+        <p:txBody>
+          <a:bodyPr wrap="square" anchor="t">
+            <a:spAutoFit/>
+          </a:bodyPr>
+          <a:lstStyle/>
+          <a:p>
+            <a:pPr algn="l">
+              <a:lnSpc>
+                <a:spcPct val="115000"/>
+              </a:lnSpc>
+              <a:spcAft>
+                <a:spcPts val="600"/>
+              </a:spcAft>
+            </a:pPr>
+            <a:r>
+              <a:rPr sz="3000" b="1">
+                <a:solidFill>
+                  <a:srgbClr val="1B2A4A"/>
+                </a:solidFill>
+                <a:latin typeface="Noto Sans CJK SC"/>
+              </a:rPr>
+              <a:t>工业部署案例（一）：第三方实测集中在 3–10%</a:t>
+            </a:r>
+          </a:p>
+        </p:txBody>
+      </p:sp>
+      <p:sp>
+        <p:nvSpPr>
+          <p:cNvPr id="4" name="TextBox 3"/>
+          <p:cNvSpPr txBox="1"/>
+          <p:nvPr/>
+        </p:nvSpPr>
+        <p:spPr>
+          <a:xfrm>
+            <a:off x="475488" y="914400"/>
+            <a:ext cx="11247120" cy="457200"/>
+          </a:xfrm>
+          <a:prstGeom prst="rect">
+            <a:avLst/>
+          </a:prstGeom>
+          <a:noFill/>
+        </p:spPr>
+        <p:txBody>
+          <a:bodyPr wrap="square" anchor="t">
+            <a:spAutoFit/>
+          </a:bodyPr>
+          <a:lstStyle/>
+          <a:p>
+            <a:pPr algn="l">
+              <a:lnSpc>
+                <a:spcPct val="115000"/>
+              </a:lnSpc>
+              <a:spcAft>
+                <a:spcPts val="600"/>
+              </a:spcAft>
+            </a:pPr>
+            <a:r>
+              <a:rPr sz="1400" b="0">
+                <a:solidFill>
+                  <a:srgbClr val="666666"/>
+                </a:solidFill>
+                <a:latin typeface="Noto Sans CJK SC"/>
+              </a:rPr>
+              <a:t>厂商宣称值普遍高于实测，引用以船级社/试航数据为准</a:t>
+            </a:r>
+          </a:p>
+        </p:txBody>
+      </p:sp>
+      <p:pic>
+        <p:nvPicPr>
+          <p:cNvPr id="5" name="Picture 4" descr="fig5_deploy_cases.png"/>
+          <p:cNvPicPr>
+            <a:picLocks noChangeAspect="1"/>
+          </p:cNvPicPr>
+          <p:nvPr/>
+        </p:nvPicPr>
+        <p:blipFill>
+          <a:blip r:embed="rId2"/>
+          <a:stretch>
+            <a:fillRect/>
+          </a:stretch>
+        </p:blipFill>
+        <p:spPr>
+          <a:xfrm>
+            <a:off x="365760" y="2125066"/>
+            <a:ext cx="6949440" cy="3613708"/>
+          </a:xfrm>
+          <a:prstGeom prst="rect">
+            <a:avLst/>
+          </a:prstGeom>
+        </p:spPr>
+      </p:pic>
+      <p:sp>
+        <p:nvSpPr>
+          <p:cNvPr id="6" name="TextBox 5"/>
+          <p:cNvSpPr txBox="1"/>
+          <p:nvPr/>
+        </p:nvSpPr>
+        <p:spPr>
+          <a:xfrm>
+            <a:off x="7498079" y="1554480"/>
+            <a:ext cx="4480560" cy="5120640"/>
+          </a:xfrm>
+          <a:prstGeom prst="rect">
+            <a:avLst/>
+          </a:prstGeom>
+          <a:noFill/>
+        </p:spPr>
+        <p:txBody>
+          <a:bodyPr wrap="square" anchor="t">
+            <a:spAutoFit/>
+          </a:bodyPr>
+          <a:lstStyle/>
+          <a:p>
+            <a:pPr algn="l">
+              <a:lnSpc>
+                <a:spcPct val="115000"/>
+              </a:lnSpc>
+              <a:spcAft>
+                <a:spcPts val="800"/>
+              </a:spcAft>
+            </a:pPr>
+            <a:r>
+              <a:rPr sz="1400" b="1">
+                <a:solidFill>
+                  <a:srgbClr val="1F77B4"/>
+                </a:solidFill>
+                <a:latin typeface="Noto Sans CJK SC"/>
+              </a:rPr>
+              <a:t>▪ 规模化部署</a:t>
+            </a:r>
+          </a:p>
+          <a:p>
+            <a:pPr algn="l">
+              <a:lnSpc>
+                <a:spcPct val="115000"/>
+              </a:lnSpc>
+              <a:spcAft>
+                <a:spcPts val="400"/>
+              </a:spcAft>
+            </a:pPr>
+            <a:r>
+              <a:rPr sz="1250" b="0">
+                <a:solidFill>
+                  <a:srgbClr val="1B2A4A"/>
+                </a:solidFill>
+                <a:latin typeface="Noto Sans CJK SC"/>
+              </a:rPr>
+              <a:t>    – ABB OCTOPUS：1000+ 船，回收期仅几个月</a:t>
+            </a:r>
+          </a:p>
+          <a:p>
+            <a:pPr algn="l">
+              <a:lnSpc>
+                <a:spcPct val="115000"/>
+              </a:lnSpc>
+              <a:spcAft>
+                <a:spcPts val="400"/>
+              </a:spcAft>
+            </a:pPr>
+            <a:r>
+              <a:rPr sz="1250" b="0">
+                <a:solidFill>
+                  <a:srgbClr val="1B2A4A"/>
+                </a:solidFill>
+                <a:latin typeface="Noto Sans CJK SC"/>
+              </a:rPr>
+              <a:t>    – DeepSea：EPS 全船队 300 艘，油耗预报误差 0.8%</a:t>
+            </a:r>
+          </a:p>
+          <a:p>
+            <a:pPr algn="l">
+              <a:lnSpc>
+                <a:spcPct val="115000"/>
+              </a:lnSpc>
+              <a:spcAft>
+                <a:spcPts val="400"/>
+              </a:spcAft>
+            </a:pPr>
+            <a:r>
+              <a:rPr sz="1250" b="0">
+                <a:solidFill>
+                  <a:srgbClr val="1B2A4A"/>
+                </a:solidFill>
+                <a:latin typeface="Noto Sans CJK SC"/>
+              </a:rPr>
+              <a:t>    – Orca AI：Seaspan 267+ 船，单船年省约 $10 万</a:t>
+            </a:r>
+          </a:p>
+          <a:p>
+            <a:pPr algn="l">
+              <a:lnSpc>
+                <a:spcPct val="115000"/>
+              </a:lnSpc>
+              <a:spcAft>
+                <a:spcPts val="800"/>
+              </a:spcAft>
+            </a:pPr>
+            <a:r>
+              <a:rPr sz="1400" b="1">
+                <a:solidFill>
+                  <a:srgbClr val="2CA02C"/>
+                </a:solidFill>
+                <a:latin typeface="Noto Sans CJK SC"/>
+              </a:rPr>
+              <a:t>▪ 控制层现状</a:t>
+            </a:r>
+          </a:p>
+          <a:p>
+            <a:pPr algn="l">
+              <a:lnSpc>
+                <a:spcPct val="115000"/>
+              </a:lnSpc>
+              <a:spcAft>
+                <a:spcPts val="400"/>
+              </a:spcAft>
+            </a:pPr>
+            <a:r>
+              <a:rPr sz="1250" b="0">
+                <a:solidFill>
+                  <a:srgbClr val="1B2A4A"/>
+                </a:solidFill>
+                <a:latin typeface="Noto Sans CJK SC"/>
+              </a:rPr>
+              <a:t>    – 节能自动舵 = 自适应+海浪滤波（Anschütz ECO）</a:t>
+            </a:r>
+          </a:p>
+          <a:p>
+            <a:pPr algn="l">
+              <a:lnSpc>
+                <a:spcPct val="115000"/>
+              </a:lnSpc>
+              <a:spcAft>
+                <a:spcPts val="400"/>
+              </a:spcAft>
+            </a:pPr>
+            <a:r>
+              <a:rPr sz="1250" b="0">
+                <a:solidFill>
+                  <a:srgbClr val="1B2A4A"/>
+                </a:solidFill>
+                <a:latin typeface="Noto Sans CJK SC"/>
+              </a:rPr>
+              <a:t>    – 无公开的 MPC 实船自动舵部署案例</a:t>
+            </a:r>
+          </a:p>
+          <a:p>
+            <a:pPr algn="l">
+              <a:lnSpc>
+                <a:spcPct val="115000"/>
+              </a:lnSpc>
+              <a:spcAft>
+                <a:spcPts val="400"/>
+              </a:spcAft>
+            </a:pPr>
+            <a:r>
+              <a:rPr sz="1250" b="0">
+                <a:solidFill>
+                  <a:srgbClr val="1B2A4A"/>
+                </a:solidFill>
+                <a:latin typeface="Noto Sans CJK SC"/>
+              </a:rPr>
+              <a:t>    – 印证：门槛不在算力，在模型获取与整定</a:t>
+            </a:r>
+          </a:p>
+        </p:txBody>
+      </p:sp>
+      <p:sp>
+        <p:nvSpPr>
+          <p:cNvPr id="7" name="TextBox 6"/>
+          <p:cNvSpPr txBox="1"/>
+          <p:nvPr/>
+        </p:nvSpPr>
+        <p:spPr>
+          <a:xfrm>
+            <a:off x="11475720" y="6473952"/>
+            <a:ext cx="640080" cy="320040"/>
+          </a:xfrm>
+          <a:prstGeom prst="rect">
+            <a:avLst/>
+          </a:prstGeom>
+          <a:noFill/>
+        </p:spPr>
+        <p:txBody>
+          <a:bodyPr wrap="square" anchor="t">
+            <a:spAutoFit/>
+          </a:bodyPr>
+          <a:lstStyle/>
+          <a:p>
+            <a:pPr algn="r">
+              <a:lnSpc>
+                <a:spcPct val="115000"/>
+              </a:lnSpc>
+              <a:spcAft>
+                <a:spcPts val="600"/>
+              </a:spcAft>
+            </a:pPr>
+            <a:r>
+              <a:rPr sz="1100" b="0">
+                <a:solidFill>
+                  <a:srgbClr val="666666"/>
+                </a:solidFill>
+                <a:latin typeface="Noto Sans CJK SC"/>
+              </a:rPr>
+              <a:t>15 / 20</a:t>
+            </a:r>
+          </a:p>
+        </p:txBody>
+      </p:sp>
+    </p:spTree>
+  </p:cSld>
+  <p:clrMapOvr>
+    <a:masterClrMapping/>
+  </p:clrMapOvr>
+</p:sld>
+</file>
+
+<file path=ppt/slides/slide16.xml><?xml version="1.0" encoding="utf-8"?>
+<p:sld xmlns:a="http://schemas.openxmlformats.org/drawingml/2006/main" xmlns:p="http://schemas.openxmlformats.org/presentationml/2006/main" xmlns:r="http://schemas.openxmlformats.org/officeDocument/2006/relationships">
+  <p:cSld>
+    <p:spTree>
+      <p:nvGrpSpPr>
+        <p:cNvPr id="1" name=""/>
+        <p:cNvGrpSpPr/>
+        <p:nvPr/>
+      </p:nvGrpSpPr>
+      <p:grpSpPr/>
+      <p:sp>
+        <p:nvSpPr>
+          <p:cNvPr id="2" name="Rectangle 1"/>
+          <p:cNvSpPr/>
+          <p:nvPr/>
+        </p:nvSpPr>
+        <p:spPr>
+          <a:xfrm>
+            <a:off x="0" y="0"/>
+            <a:ext cx="12191695" cy="109728"/>
+          </a:xfrm>
+          <a:prstGeom prst="rect">
+            <a:avLst/>
+          </a:prstGeom>
+          <a:solidFill>
+            <a:srgbClr val="1F77B4"/>
+          </a:solidFill>
+          <a:ln>
+            <a:noFill/>
+          </a:ln>
+        </p:spPr>
+        <p:style>
+          <a:lnRef idx="1">
+            <a:schemeClr val="accent1"/>
+          </a:lnRef>
+          <a:fillRef idx="3">
+            <a:schemeClr val="accent1"/>
+          </a:fillRef>
+          <a:effectRef idx="2">
+            <a:schemeClr val="accent1"/>
+          </a:effectRef>
+          <a:fontRef idx="minor">
+            <a:schemeClr val="lt1"/>
+          </a:fontRef>
+        </p:style>
+        <p:txBody>
+          <a:bodyPr rtlCol="0" anchor="ctr"/>
+          <a:lstStyle/>
+          <a:p>
+            <a:pPr algn="ctr"/>
+          </a:p>
+        </p:txBody>
+      </p:sp>
+      <p:sp>
+        <p:nvSpPr>
+          <p:cNvPr id="3" name="TextBox 2"/>
+          <p:cNvSpPr txBox="1"/>
+          <p:nvPr/>
+        </p:nvSpPr>
+        <p:spPr>
+          <a:xfrm>
+            <a:off x="457200" y="256032"/>
+            <a:ext cx="11247120" cy="822960"/>
+          </a:xfrm>
+          <a:prstGeom prst="rect">
+            <a:avLst/>
+          </a:prstGeom>
+          <a:noFill/>
+        </p:spPr>
+        <p:txBody>
+          <a:bodyPr wrap="square" anchor="t">
+            <a:spAutoFit/>
+          </a:bodyPr>
+          <a:lstStyle/>
+          <a:p>
+            <a:pPr algn="l">
+              <a:lnSpc>
+                <a:spcPct val="115000"/>
+              </a:lnSpc>
+              <a:spcAft>
+                <a:spcPts val="600"/>
+              </a:spcAft>
+            </a:pPr>
+            <a:r>
+              <a:rPr sz="3000" b="1">
+                <a:solidFill>
+                  <a:srgbClr val="1B2A4A"/>
+                </a:solidFill>
+                <a:latin typeface="Noto Sans CJK SC"/>
+              </a:rPr>
+              <a:t>工业部署案例（二）：实测细节与口径</a:t>
+            </a:r>
+          </a:p>
+        </p:txBody>
+      </p:sp>
+      <p:sp>
+        <p:nvSpPr>
+          <p:cNvPr id="4" name="TextBox 3"/>
+          <p:cNvSpPr txBox="1"/>
+          <p:nvPr/>
+        </p:nvSpPr>
+        <p:spPr>
+          <a:xfrm>
+            <a:off x="475488" y="914400"/>
+            <a:ext cx="11247120" cy="457200"/>
+          </a:xfrm>
+          <a:prstGeom prst="rect">
+            <a:avLst/>
+          </a:prstGeom>
+          <a:noFill/>
+        </p:spPr>
+        <p:txBody>
+          <a:bodyPr wrap="square" anchor="t">
+            <a:spAutoFit/>
+          </a:bodyPr>
+          <a:lstStyle/>
+          <a:p>
+            <a:pPr algn="l">
+              <a:lnSpc>
+                <a:spcPct val="115000"/>
+              </a:lnSpc>
+              <a:spcAft>
+                <a:spcPts val="600"/>
+              </a:spcAft>
+            </a:pPr>
+            <a:r>
+              <a:rPr sz="1400" b="0">
+                <a:solidFill>
+                  <a:srgbClr val="666666"/>
+                </a:solidFill>
+                <a:latin typeface="Noto Sans CJK SC"/>
+              </a:rPr>
+              <a:t>注意：各案例节油路径不同，不可直接横向比较</a:t>
+            </a:r>
+          </a:p>
+        </p:txBody>
+      </p:sp>
+      <p:graphicFrame>
+        <p:nvGraphicFramePr>
+          <p:cNvPr id="5" name="Table 4"/>
+          <p:cNvGraphicFramePr>
+            <a:graphicFrameLocks noGrp="1"/>
+          </p:cNvGraphicFramePr>
+          <p:nvPr/>
+        </p:nvGraphicFramePr>
+        <p:xfrm>
+          <a:off x="457200" y="1463040"/>
+          <a:ext cx="11338558" cy="4206240"/>
+        </p:xfrm>
+        <a:graphic>
+          <a:graphicData uri="http://schemas.openxmlformats.org/drawingml/2006/table">
+            <a:tbl>
+              <a:tblPr firstRow="1" bandRow="1">
+                <a:tableStyleId>{5C22544A-7EE6-4342-B048-85BDC9FD1C3A}</a:tableStyleId>
+              </a:tblPr>
+              <a:tblGrid>
+                <a:gridCol w="2538483"/>
+                <a:gridCol w="6092360"/>
+                <a:gridCol w="2707715"/>
+              </a:tblGrid>
+              <a:tr h="701040">
+                <a:tc>
+                  <a:txBody>
+                    <a:bodyPr/>
+                    <a:lstStyle/>
+                    <a:p>
+                      <a:pPr>
+                        <a:lnSpc>
+                          <a:spcPct val="105000"/>
+                        </a:lnSpc>
+                      </a:pPr>
+                      <a:r>
+                        <a:rPr sz="1200" b="1">
+                          <a:solidFill>
+                            <a:srgbClr val="FFFFFF"/>
+                          </a:solidFill>
+                          <a:latin typeface="Noto Sans CJK SC"/>
+                        </a:rPr>
+                        <a:t>案例</a:t>
+                      </a:r>
+                    </a:p>
+                  </a:txBody>
+                  <a:tcPr marL="54864" marR="54864" marT="27432" marB="27432" anchor="ctr">
+                    <a:solidFill>
+                      <a:srgbClr val="1F77B4"/>
+                    </a:solidFill>
+                  </a:tcPr>
+                </a:tc>
+                <a:tc>
+                  <a:txBody>
+                    <a:bodyPr/>
+                    <a:lstStyle/>
+                    <a:p>
+                      <a:pPr>
+                        <a:lnSpc>
+                          <a:spcPct val="105000"/>
+                        </a:lnSpc>
+                      </a:pPr>
+                      <a:r>
+                        <a:rPr sz="1200" b="1">
+                          <a:solidFill>
+                            <a:srgbClr val="FFFFFF"/>
+                          </a:solidFill>
+                          <a:latin typeface="Noto Sans CJK SC"/>
+                        </a:rPr>
+                        <a:t>实测细节（已核对）</a:t>
+                      </a:r>
+                    </a:p>
+                  </a:txBody>
+                  <a:tcPr marL="54864" marR="54864" marT="27432" marB="27432" anchor="ctr">
+                    <a:solidFill>
+                      <a:srgbClr val="1F77B4"/>
+                    </a:solidFill>
+                  </a:tcPr>
+                </a:tc>
+                <a:tc>
+                  <a:txBody>
+                    <a:bodyPr/>
+                    <a:lstStyle/>
+                    <a:p>
+                      <a:pPr>
+                        <a:lnSpc>
+                          <a:spcPct val="105000"/>
+                        </a:lnSpc>
+                      </a:pPr>
+                      <a:r>
+                        <a:rPr sz="1200" b="1">
+                          <a:solidFill>
+                            <a:srgbClr val="FFFFFF"/>
+                          </a:solidFill>
+                          <a:latin typeface="Noto Sans CJK SC"/>
+                        </a:rPr>
+                        <a:t>节油路径</a:t>
+                      </a:r>
+                    </a:p>
+                  </a:txBody>
+                  <a:tcPr marL="54864" marR="54864" marT="27432" marB="27432" anchor="ctr">
+                    <a:solidFill>
+                      <a:srgbClr val="1F77B4"/>
+                    </a:solidFill>
+                  </a:tcPr>
+                </a:tc>
+              </a:tr>
+              <a:tr h="701040">
+                <a:tc>
+                  <a:txBody>
+                    <a:bodyPr/>
+                    <a:lstStyle/>
+                    <a:p>
+                      <a:pPr>
+                        <a:lnSpc>
+                          <a:spcPct val="105000"/>
+                        </a:lnSpc>
+                      </a:pPr>
+                      <a:r>
+                        <a:rPr sz="1150" b="0">
+                          <a:solidFill>
+                            <a:srgbClr val="1B2A4A"/>
+                          </a:solidFill>
+                          <a:latin typeface="Noto Sans CJK SC"/>
+                        </a:rPr>
+                        <a:t>Wärtsilä/Eniram</a:t>
+                      </a:r>
+                    </a:p>
+                    <a:p>
+                      <a:pPr>
+                        <a:lnSpc>
+                          <a:spcPct val="105000"/>
+                        </a:lnSpc>
+                      </a:pPr>
+                      <a:r>
+                        <a:rPr sz="1150" b="0">
+                          <a:solidFill>
+                            <a:srgbClr val="1B2A4A"/>
+                          </a:solidFill>
+                          <a:latin typeface="Noto Sans CJK SC"/>
+                        </a:rPr>
+                        <a:t>VLCC 案例</a:t>
+                      </a:r>
+                    </a:p>
+                  </a:txBody>
+                  <a:tcPr marL="54864" marR="54864" marT="27432" marB="27432" anchor="ctr"/>
+                </a:tc>
+                <a:tc>
+                  <a:txBody>
+                    <a:bodyPr/>
+                    <a:lstStyle/>
+                    <a:p>
+                      <a:pPr>
+                        <a:lnSpc>
+                          <a:spcPct val="105000"/>
+                        </a:lnSpc>
+                      </a:pPr>
+                      <a:r>
+                        <a:rPr sz="1150" b="0">
+                          <a:solidFill>
+                            <a:srgbClr val="1B2A4A"/>
+                          </a:solidFill>
+                          <a:latin typeface="Noto Sans CJK SC"/>
+                        </a:rPr>
+                        <a:t>320,000+ DWT、450 天数据：年燃油成本 −2.6%</a:t>
+                      </a:r>
+                    </a:p>
+                    <a:p>
+                      <a:pPr>
+                        <a:lnSpc>
+                          <a:spcPct val="105000"/>
+                        </a:lnSpc>
+                      </a:pPr>
+                      <a:r>
+                        <a:rPr sz="1150" b="0">
+                          <a:solidFill>
+                            <a:srgbClr val="1B2A4A"/>
+                          </a:solidFill>
+                          <a:latin typeface="Noto Sans CJK SC"/>
+                        </a:rPr>
+                        <a:t>（≈48.2 万美元 / 730 吨燃油）</a:t>
+                      </a:r>
+                    </a:p>
+                  </a:txBody>
+                  <a:tcPr marL="54864" marR="54864" marT="27432" marB="27432" anchor="ctr"/>
+                </a:tc>
+                <a:tc>
+                  <a:txBody>
+                    <a:bodyPr/>
+                    <a:lstStyle/>
+                    <a:p>
+                      <a:pPr>
+                        <a:lnSpc>
+                          <a:spcPct val="105000"/>
+                        </a:lnSpc>
+                      </a:pPr>
+                      <a:r>
+                        <a:rPr sz="1150" b="0">
+                          <a:solidFill>
+                            <a:srgbClr val="1B2A4A"/>
+                          </a:solidFill>
+                          <a:latin typeface="Noto Sans CJK SC"/>
+                        </a:rPr>
+                        <a:t>纵倾优化 + 污底评估</a:t>
+                      </a:r>
+                    </a:p>
+                  </a:txBody>
+                  <a:tcPr marL="54864" marR="54864" marT="27432" marB="27432" anchor="ctr"/>
+                </a:tc>
+              </a:tr>
+              <a:tr h="701040">
+                <a:tc>
+                  <a:txBody>
+                    <a:bodyPr/>
+                    <a:lstStyle/>
+                    <a:p>
+                      <a:pPr>
+                        <a:lnSpc>
+                          <a:spcPct val="105000"/>
+                        </a:lnSpc>
+                      </a:pPr>
+                      <a:r>
+                        <a:rPr sz="1150" b="0">
+                          <a:solidFill>
+                            <a:srgbClr val="1B2A4A"/>
+                          </a:solidFill>
+                          <a:latin typeface="Noto Sans CJK SC"/>
+                        </a:rPr>
+                        <a:t>Yara FuelOpt</a:t>
+                      </a:r>
+                    </a:p>
+                    <a:p>
+                      <a:pPr>
+                        <a:lnSpc>
+                          <a:spcPct val="105000"/>
+                        </a:lnSpc>
+                      </a:pPr>
+                      <a:r>
+                        <a:rPr sz="1150" b="0">
+                          <a:solidFill>
+                            <a:srgbClr val="1B2A4A"/>
+                          </a:solidFill>
+                          <a:latin typeface="Noto Sans CJK SC"/>
+                        </a:rPr>
+                        <a:t>（独立复核）</a:t>
+                      </a:r>
+                    </a:p>
+                  </a:txBody>
+                  <a:tcPr marL="54864" marR="54864" marT="27432" marB="27432" anchor="ctr">
+                    <a:solidFill>
+                      <a:srgbClr val="EEF3FA"/>
+                    </a:solidFill>
+                  </a:tcPr>
+                </a:tc>
+                <a:tc>
+                  <a:txBody>
+                    <a:bodyPr/>
+                    <a:lstStyle/>
+                    <a:p>
+                      <a:pPr>
+                        <a:lnSpc>
+                          <a:spcPct val="105000"/>
+                        </a:lnSpc>
+                      </a:pPr>
+                      <a:r>
+                        <a:rPr sz="1150" b="0">
+                          <a:solidFill>
+                            <a:srgbClr val="1B2A4A"/>
+                          </a:solidFill>
+                          <a:latin typeface="Noto Sans CJK SC"/>
+                        </a:rPr>
+                        <a:t>NAPA 独立分析确认 10–18%：</a:t>
+                      </a:r>
+                    </a:p>
+                    <a:p>
+                      <a:pPr>
+                        <a:lnSpc>
+                          <a:spcPct val="105000"/>
+                        </a:lnSpc>
+                      </a:pPr>
+                      <a:r>
+                        <a:rPr sz="1150" b="0">
+                          <a:solidFill>
+                            <a:srgbClr val="1B2A4A"/>
+                          </a:solidFill>
+                          <a:latin typeface="Noto Sans CJK SC"/>
+                        </a:rPr>
+                        <a:t>Sten Bothnia 12 个月 17.9%、Ekfjord 24 个月 10.3%</a:t>
+                      </a:r>
+                    </a:p>
+                  </a:txBody>
+                  <a:tcPr marL="54864" marR="54864" marT="27432" marB="27432" anchor="ctr">
+                    <a:solidFill>
+                      <a:srgbClr val="EEF3FA"/>
+                    </a:solidFill>
+                  </a:tcPr>
+                </a:tc>
+                <a:tc>
+                  <a:txBody>
+                    <a:bodyPr/>
+                    <a:lstStyle/>
+                    <a:p>
+                      <a:pPr>
+                        <a:lnSpc>
+                          <a:spcPct val="105000"/>
+                        </a:lnSpc>
+                      </a:pPr>
+                      <a:r>
+                        <a:rPr sz="1150" b="0">
+                          <a:solidFill>
+                            <a:srgbClr val="1B2A4A"/>
+                          </a:solidFill>
+                          <a:latin typeface="Noto Sans CJK SC"/>
+                        </a:rPr>
+                        <a:t>推进功率闭环优化</a:t>
+                      </a:r>
+                    </a:p>
+                  </a:txBody>
+                  <a:tcPr marL="54864" marR="54864" marT="27432" marB="27432" anchor="ctr">
+                    <a:solidFill>
+                      <a:srgbClr val="EEF3FA"/>
+                    </a:solidFill>
+                  </a:tcPr>
+                </a:tc>
+              </a:tr>
+              <a:tr h="701040">
+                <a:tc>
+                  <a:txBody>
+                    <a:bodyPr/>
+                    <a:lstStyle/>
+                    <a:p>
+                      <a:pPr>
+                        <a:lnSpc>
+                          <a:spcPct val="105000"/>
+                        </a:lnSpc>
+                      </a:pPr>
+                      <a:r>
+                        <a:rPr sz="1150" b="0">
+                          <a:solidFill>
+                            <a:srgbClr val="1B2A4A"/>
+                          </a:solidFill>
+                          <a:latin typeface="Noto Sans CJK SC"/>
+                        </a:rPr>
+                        <a:t>NAPA × Norsepower</a:t>
+                      </a:r>
+                    </a:p>
+                    <a:p>
+                      <a:pPr>
+                        <a:lnSpc>
+                          <a:spcPct val="105000"/>
+                        </a:lnSpc>
+                      </a:pPr>
+                      <a:r>
+                        <a:rPr sz="1150" b="0">
+                          <a:solidFill>
+                            <a:srgbClr val="1B2A4A"/>
+                          </a:solidFill>
+                          <a:latin typeface="Noto Sans CJK SC"/>
+                        </a:rPr>
+                        <a:t>× SHI-ME</a:t>
+                      </a:r>
+                    </a:p>
+                  </a:txBody>
+                  <a:tcPr marL="54864" marR="54864" marT="27432" marB="27432" anchor="ctr"/>
+                </a:tc>
+                <a:tc>
+                  <a:txBody>
+                    <a:bodyPr/>
+                    <a:lstStyle/>
+                    <a:p>
+                      <a:pPr>
+                        <a:lnSpc>
+                          <a:spcPct val="105000"/>
+                        </a:lnSpc>
+                      </a:pPr>
+                      <a:r>
+                        <a:rPr sz="1150" b="0">
+                          <a:solidFill>
+                            <a:srgbClr val="1B2A4A"/>
+                          </a:solidFill>
+                          <a:latin typeface="Noto Sans CJK SC"/>
+                        </a:rPr>
+                        <a:t>转筒帆+航程优化六条航线平均 CO2 −19%</a:t>
+                      </a:r>
+                    </a:p>
+                    <a:p>
+                      <a:pPr>
+                        <a:lnSpc>
+                          <a:spcPct val="105000"/>
+                        </a:lnSpc>
+                      </a:pPr>
+                      <a:r>
+                        <a:rPr sz="1150" b="0">
+                          <a:solidFill>
+                            <a:srgbClr val="1B2A4A"/>
+                          </a:solidFill>
+                          <a:latin typeface="Noto Sans CJK SC"/>
+                        </a:rPr>
+                        <a:t>（纽约–阿姆斯特丹线 28%，NAPA 贡献 10–12 个百分点）</a:t>
+                      </a:r>
+                    </a:p>
+                  </a:txBody>
+                  <a:tcPr marL="54864" marR="54864" marT="27432" marB="27432" anchor="ctr"/>
+                </a:tc>
+                <a:tc>
+                  <a:txBody>
+                    <a:bodyPr/>
+                    <a:lstStyle/>
+                    <a:p>
+                      <a:pPr>
+                        <a:lnSpc>
+                          <a:spcPct val="105000"/>
+                        </a:lnSpc>
+                      </a:pPr>
+                      <a:r>
+                        <a:rPr sz="1150" b="0">
+                          <a:solidFill>
+                            <a:srgbClr val="1B2A4A"/>
+                          </a:solidFill>
+                          <a:latin typeface="Noto Sans CJK SC"/>
+                        </a:rPr>
+                        <a:t>风助推 + 航程优化</a:t>
+                      </a:r>
+                    </a:p>
+                  </a:txBody>
+                  <a:tcPr marL="54864" marR="54864" marT="27432" marB="27432" anchor="ctr"/>
+                </a:tc>
+              </a:tr>
+              <a:tr h="701040">
+                <a:tc>
+                  <a:txBody>
+                    <a:bodyPr/>
+                    <a:lstStyle/>
+                    <a:p>
+                      <a:pPr>
+                        <a:lnSpc>
+                          <a:spcPct val="105000"/>
+                        </a:lnSpc>
+                      </a:pPr>
+                      <a:r>
+                        <a:rPr sz="1150" b="0">
+                          <a:solidFill>
+                            <a:srgbClr val="1B2A4A"/>
+                          </a:solidFill>
+                          <a:latin typeface="Noto Sans CJK SC"/>
+                        </a:rPr>
+                        <a:t>Orca AI</a:t>
+                      </a:r>
+                    </a:p>
+                    <a:p>
+                      <a:pPr>
+                        <a:lnSpc>
+                          <a:spcPct val="105000"/>
+                        </a:lnSpc>
+                      </a:pPr>
+                      <a:r>
+                        <a:rPr sz="1150" b="0">
+                          <a:solidFill>
+                            <a:srgbClr val="1B2A4A"/>
+                          </a:solidFill>
+                          <a:latin typeface="Noto Sans CJK SC"/>
+                        </a:rPr>
+                        <a:t>（Seaspan）</a:t>
+                      </a:r>
+                    </a:p>
+                  </a:txBody>
+                  <a:tcPr marL="54864" marR="54864" marT="27432" marB="27432" anchor="ctr">
+                    <a:solidFill>
+                      <a:srgbClr val="EEF3FA"/>
+                    </a:solidFill>
+                  </a:tcPr>
+                </a:tc>
+                <a:tc>
+                  <a:txBody>
+                    <a:bodyPr/>
+                    <a:lstStyle/>
+                    <a:p>
+                      <a:pPr>
+                        <a:lnSpc>
+                          <a:spcPct val="105000"/>
+                        </a:lnSpc>
+                      </a:pPr>
+                      <a:r>
+                        <a:rPr sz="1150" b="0">
+                          <a:solidFill>
+                            <a:srgbClr val="1B2A4A"/>
+                          </a:solidFill>
+                          <a:latin typeface="Noto Sans CJK SC"/>
+                        </a:rPr>
+                        <a:t>近距遭遇事件 −54%；2024 年合计减排约 19.5 万吨 CO2；</a:t>
+                      </a:r>
+                    </a:p>
+                    <a:p>
+                      <a:pPr>
+                        <a:lnSpc>
+                          <a:spcPct val="105000"/>
+                        </a:lnSpc>
+                      </a:pPr>
+                      <a:r>
+                        <a:rPr sz="1150" b="0">
+                          <a:solidFill>
+                            <a:srgbClr val="1B2A4A"/>
+                          </a:solidFill>
+                          <a:latin typeface="Noto Sans CJK SC"/>
+                        </a:rPr>
+                        <a:t>单船年省约 $10 万 / 减 500 t CO2</a:t>
+                      </a:r>
+                    </a:p>
+                  </a:txBody>
+                  <a:tcPr marL="54864" marR="54864" marT="27432" marB="27432" anchor="ctr">
+                    <a:solidFill>
+                      <a:srgbClr val="EEF3FA"/>
+                    </a:solidFill>
+                  </a:tcPr>
+                </a:tc>
+                <a:tc>
+                  <a:txBody>
+                    <a:bodyPr/>
+                    <a:lstStyle/>
+                    <a:p>
+                      <a:pPr>
+                        <a:lnSpc>
+                          <a:spcPct val="105000"/>
+                        </a:lnSpc>
+                      </a:pPr>
+                      <a:r>
+                        <a:rPr sz="1150" b="0">
+                          <a:solidFill>
+                            <a:srgbClr val="1B2A4A"/>
+                          </a:solidFill>
+                          <a:latin typeface="Noto Sans CJK SC"/>
+                        </a:rPr>
+                        <a:t>减少避碰机动与无谓变速</a:t>
+                      </a:r>
+                    </a:p>
+                  </a:txBody>
+                  <a:tcPr marL="54864" marR="54864" marT="27432" marB="27432" anchor="ctr">
+                    <a:solidFill>
+                      <a:srgbClr val="EEF3FA"/>
+                    </a:solidFill>
+                  </a:tcPr>
+                </a:tc>
+              </a:tr>
+              <a:tr h="701040">
+                <a:tc>
+                  <a:txBody>
+                    <a:bodyPr/>
+                    <a:lstStyle/>
+                    <a:p>
+                      <a:pPr>
+                        <a:lnSpc>
+                          <a:spcPct val="105000"/>
+                        </a:lnSpc>
+                      </a:pPr>
+                      <a:r>
+                        <a:rPr sz="1150" b="0">
+                          <a:solidFill>
+                            <a:srgbClr val="1B2A4A"/>
+                          </a:solidFill>
+                          <a:latin typeface="Noto Sans CJK SC"/>
+                        </a:rPr>
+                        <a:t>Kongsberg</a:t>
+                      </a:r>
+                    </a:p>
+                    <a:p>
+                      <a:pPr>
+                        <a:lnSpc>
+                          <a:spcPct val="105000"/>
+                        </a:lnSpc>
+                      </a:pPr>
+                      <a:r>
+                        <a:rPr sz="1150" b="0">
+                          <a:solidFill>
+                            <a:srgbClr val="1B2A4A"/>
+                          </a:solidFill>
+                          <a:latin typeface="Noto Sans CJK SC"/>
+                        </a:rPr>
+                        <a:t>EcoAdvisor</a:t>
+                      </a:r>
+                    </a:p>
+                  </a:txBody>
+                  <a:tcPr marL="54864" marR="54864" marT="27432" marB="27432" anchor="ctr"/>
+                </a:tc>
+                <a:tc>
+                  <a:txBody>
+                    <a:bodyPr/>
+                    <a:lstStyle/>
+                    <a:p>
+                      <a:pPr>
+                        <a:lnSpc>
+                          <a:spcPct val="105000"/>
+                        </a:lnSpc>
+                      </a:pPr>
+                      <a:r>
+                        <a:rPr sz="1150" b="0">
+                          <a:solidFill>
+                            <a:srgbClr val="1B2A4A"/>
+                          </a:solidFill>
+                          <a:latin typeface="Noto Sans CJK SC"/>
+                        </a:rPr>
+                        <a:t>DP 工况主机/推进器停机建议工具（DOF 试点）；</a:t>
+                      </a:r>
+                    </a:p>
+                    <a:p>
+                      <a:pPr>
+                        <a:lnSpc>
+                          <a:spcPct val="105000"/>
+                        </a:lnSpc>
+                      </a:pPr>
+                      <a:r>
+                        <a:rPr sz="1150" b="0">
+                          <a:solidFill>
+                            <a:srgbClr val="1B2A4A"/>
+                          </a:solidFill>
+                          <a:latin typeface="Noto Sans CJK SC"/>
+                        </a:rPr>
+                        <a:t>官方未公布定量节油数据（流传的 8–10% 无法证实，已弃用）</a:t>
+                      </a:r>
+                    </a:p>
+                  </a:txBody>
+                  <a:tcPr marL="54864" marR="54864" marT="27432" marB="27432" anchor="ctr"/>
+                </a:tc>
+                <a:tc>
+                  <a:txBody>
+                    <a:bodyPr/>
+                    <a:lstStyle/>
+                    <a:p>
+                      <a:pPr>
+                        <a:lnSpc>
+                          <a:spcPct val="105000"/>
+                        </a:lnSpc>
+                      </a:pPr>
+                      <a:r>
+                        <a:rPr sz="1150" b="0">
+                          <a:solidFill>
+                            <a:srgbClr val="1B2A4A"/>
+                          </a:solidFill>
+                          <a:latin typeface="Noto Sans CJK SC"/>
+                        </a:rPr>
+                        <a:t>动力定位能耗优化</a:t>
+                      </a:r>
+                    </a:p>
+                  </a:txBody>
+                  <a:tcPr marL="54864" marR="54864" marT="27432" marB="27432" anchor="ctr"/>
+                </a:tc>
+              </a:tr>
+            </a:tbl>
+          </a:graphicData>
+        </a:graphic>
+      </p:graphicFrame>
+      <p:sp>
+        <p:nvSpPr>
+          <p:cNvPr id="6" name="TextBox 5"/>
+          <p:cNvSpPr txBox="1"/>
+          <p:nvPr/>
+        </p:nvSpPr>
+        <p:spPr>
+          <a:xfrm>
+            <a:off x="457200" y="5897880"/>
+            <a:ext cx="11338560" cy="731520"/>
+          </a:xfrm>
+          <a:prstGeom prst="rect">
+            <a:avLst/>
+          </a:prstGeom>
+          <a:noFill/>
+        </p:spPr>
+        <p:txBody>
+          <a:bodyPr wrap="square" anchor="t">
+            <a:spAutoFit/>
+          </a:bodyPr>
+          <a:lstStyle/>
+          <a:p>
+            <a:pPr algn="l">
+              <a:lnSpc>
+                <a:spcPct val="115000"/>
+              </a:lnSpc>
+              <a:spcAft>
+                <a:spcPts val="600"/>
+              </a:spcAft>
+            </a:pPr>
+            <a:r>
+              <a:rPr sz="1300" b="0">
+                <a:solidFill>
+                  <a:srgbClr val="666666"/>
+                </a:solidFill>
+                <a:latin typeface="Noto Sans CJK SC"/>
+              </a:rPr>
+              <a:t>Anschütz 补充：自适应 ECO 模式平均减少舵动作约 25%（多年运营数据分析），案例折算节油约 4%。</a:t>
+            </a:r>
+          </a:p>
+        </p:txBody>
+      </p:sp>
+      <p:sp>
+        <p:nvSpPr>
+          <p:cNvPr id="7" name="TextBox 6"/>
+          <p:cNvSpPr txBox="1"/>
+          <p:nvPr/>
+        </p:nvSpPr>
+        <p:spPr>
+          <a:xfrm>
+            <a:off x="11475720" y="6473952"/>
+            <a:ext cx="640080" cy="320040"/>
+          </a:xfrm>
+          <a:prstGeom prst="rect">
+            <a:avLst/>
+          </a:prstGeom>
+          <a:noFill/>
+        </p:spPr>
+        <p:txBody>
+          <a:bodyPr wrap="square" anchor="t">
+            <a:spAutoFit/>
+          </a:bodyPr>
+          <a:lstStyle/>
+          <a:p>
+            <a:pPr algn="r">
+              <a:lnSpc>
+                <a:spcPct val="115000"/>
+              </a:lnSpc>
+              <a:spcAft>
+                <a:spcPts val="600"/>
+              </a:spcAft>
+            </a:pPr>
+            <a:r>
+              <a:rPr sz="1100" b="0">
+                <a:solidFill>
+                  <a:srgbClr val="666666"/>
+                </a:solidFill>
+                <a:latin typeface="Noto Sans CJK SC"/>
+              </a:rPr>
+              <a:t>16 / 20</a:t>
+            </a:r>
+          </a:p>
+        </p:txBody>
+      </p:sp>
+    </p:spTree>
+  </p:cSld>
+  <p:clrMapOvr>
+    <a:masterClrMapping/>
+  </p:clrMapOvr>
+</p:sld>
+</file>
+
+<file path=ppt/slides/slide17.xml><?xml version="1.0" encoding="utf-8"?>
+<p:sld xmlns:a="http://schemas.openxmlformats.org/drawingml/2006/main" xmlns:p="http://schemas.openxmlformats.org/presentationml/2006/main" xmlns:r="http://schemas.openxmlformats.org/officeDocument/2006/relationships">
+  <p:cSld>
+    <p:spTree>
+      <p:nvGrpSpPr>
+        <p:cNvPr id="1" name=""/>
+        <p:cNvGrpSpPr/>
+        <p:nvPr/>
+      </p:nvGrpSpPr>
+      <p:grpSpPr/>
+      <p:sp>
+        <p:nvSpPr>
+          <p:cNvPr id="2" name="Rectangle 1"/>
+          <p:cNvSpPr/>
+          <p:nvPr/>
+        </p:nvSpPr>
+        <p:spPr>
+          <a:xfrm>
+            <a:off x="0" y="0"/>
+            <a:ext cx="12191695" cy="109728"/>
+          </a:xfrm>
+          <a:prstGeom prst="rect">
+            <a:avLst/>
+          </a:prstGeom>
+          <a:solidFill>
+            <a:srgbClr val="1F77B4"/>
+          </a:solidFill>
+          <a:ln>
+            <a:noFill/>
+          </a:ln>
+        </p:spPr>
+        <p:style>
+          <a:lnRef idx="1">
+            <a:schemeClr val="accent1"/>
+          </a:lnRef>
+          <a:fillRef idx="3">
+            <a:schemeClr val="accent1"/>
+          </a:fillRef>
+          <a:effectRef idx="2">
+            <a:schemeClr val="accent1"/>
+          </a:effectRef>
+          <a:fontRef idx="minor">
+            <a:schemeClr val="lt1"/>
+          </a:fontRef>
+        </p:style>
+        <p:txBody>
+          <a:bodyPr rtlCol="0" anchor="ctr"/>
+          <a:lstStyle/>
+          <a:p>
+            <a:pPr algn="ctr"/>
+          </a:p>
+        </p:txBody>
+      </p:sp>
+      <p:sp>
+        <p:nvSpPr>
+          <p:cNvPr id="3" name="TextBox 2"/>
+          <p:cNvSpPr txBox="1"/>
+          <p:nvPr/>
+        </p:nvSpPr>
+        <p:spPr>
+          <a:xfrm>
+            <a:off x="457200" y="256032"/>
+            <a:ext cx="11247120" cy="822960"/>
+          </a:xfrm>
+          <a:prstGeom prst="rect">
+            <a:avLst/>
+          </a:prstGeom>
+          <a:noFill/>
+        </p:spPr>
+        <p:txBody>
+          <a:bodyPr wrap="square" anchor="t">
+            <a:spAutoFit/>
+          </a:bodyPr>
+          <a:lstStyle/>
+          <a:p>
+            <a:pPr algn="l">
+              <a:lnSpc>
+                <a:spcPct val="115000"/>
+              </a:lnSpc>
+              <a:spcAft>
+                <a:spcPts val="600"/>
+              </a:spcAft>
+            </a:pPr>
+            <a:r>
+              <a:rPr sz="3000" b="1">
+                <a:solidFill>
+                  <a:srgbClr val="1B2A4A"/>
+                </a:solidFill>
+                <a:latin typeface="Noto Sans CJK SC"/>
+              </a:rPr>
+              <a:t>技术趋势判断</a:t>
+            </a:r>
+          </a:p>
+        </p:txBody>
+      </p:sp>
+      <p:sp>
+        <p:nvSpPr>
+          <p:cNvPr id="4" name="TextBox 3"/>
+          <p:cNvSpPr txBox="1"/>
+          <p:nvPr/>
+        </p:nvSpPr>
+        <p:spPr>
+          <a:xfrm>
+            <a:off x="475488" y="914400"/>
+            <a:ext cx="11247120" cy="457200"/>
+          </a:xfrm>
+          <a:prstGeom prst="rect">
+            <a:avLst/>
+          </a:prstGeom>
+          <a:noFill/>
+        </p:spPr>
+        <p:txBody>
+          <a:bodyPr wrap="square" anchor="t">
+            <a:spAutoFit/>
+          </a:bodyPr>
+          <a:lstStyle/>
+          <a:p>
+            <a:pPr algn="l">
+              <a:lnSpc>
+                <a:spcPct val="115000"/>
+              </a:lnSpc>
+              <a:spcAft>
+                <a:spcPts val="600"/>
+              </a:spcAft>
+            </a:pPr>
+            <a:r>
+              <a:rPr sz="1400" b="0">
+                <a:solidFill>
+                  <a:srgbClr val="666666"/>
+                </a:solidFill>
+                <a:latin typeface="Noto Sans CJK SC"/>
+              </a:rPr>
+              <a:t>基于两轮来源核对的四条判断</a:t>
+            </a:r>
+          </a:p>
+        </p:txBody>
+      </p:sp>
+      <p:sp>
+        <p:nvSpPr>
+          <p:cNvPr id="5" name="TextBox 4"/>
+          <p:cNvSpPr txBox="1"/>
+          <p:nvPr/>
+        </p:nvSpPr>
+        <p:spPr>
+          <a:xfrm>
+            <a:off x="731520" y="1645920"/>
+            <a:ext cx="10789920" cy="4937760"/>
+          </a:xfrm>
+          <a:prstGeom prst="rect">
+            <a:avLst/>
+          </a:prstGeom>
+          <a:noFill/>
+        </p:spPr>
+        <p:txBody>
+          <a:bodyPr wrap="square" anchor="t">
+            <a:spAutoFit/>
+          </a:bodyPr>
+          <a:lstStyle/>
+          <a:p>
+            <a:pPr algn="l">
+              <a:lnSpc>
+                <a:spcPct val="115000"/>
+              </a:lnSpc>
+              <a:spcAft>
+                <a:spcPts val="800"/>
+              </a:spcAft>
+            </a:pPr>
+            <a:r>
+              <a:rPr sz="1600" b="1">
+                <a:solidFill>
+                  <a:srgbClr val="1F77B4"/>
+                </a:solidFill>
+                <a:latin typeface="Noto Sans CJK SC"/>
+              </a:rPr>
+              <a:t>▪ ① 节能大头在决策层，控制层价值在「少损耗」</a:t>
+            </a:r>
+          </a:p>
+          <a:p>
+            <a:pPr algn="l">
+              <a:lnSpc>
+                <a:spcPct val="115000"/>
+              </a:lnSpc>
+              <a:spcAft>
+                <a:spcPts val="400"/>
+              </a:spcAft>
+            </a:pPr>
+            <a:r>
+              <a:rPr sz="1450" b="0">
+                <a:solidFill>
+                  <a:srgbClr val="1B2A4A"/>
+                </a:solidFill>
+                <a:latin typeface="Noto Sans CJK SC"/>
+              </a:rPr>
+              <a:t>    – 自动舵贡献 0.1–1.0%（IMO 口径），但 7×24 在线、几乎零边际成本，兼降舵机磨损</a:t>
+            </a:r>
+          </a:p>
+          <a:p>
+            <a:pPr algn="l">
+              <a:lnSpc>
+                <a:spcPct val="115000"/>
+              </a:lnSpc>
+              <a:spcAft>
+                <a:spcPts val="800"/>
+              </a:spcAft>
+            </a:pPr>
+            <a:r>
+              <a:rPr sz="1600" b="1">
+                <a:solidFill>
+                  <a:srgbClr val="1F77B4"/>
+                </a:solidFill>
+                <a:latin typeface="Noto Sans CJK SC"/>
+              </a:rPr>
+              <a:t>▪ ② MPC 可行域正在打开，瓶颈不是算力</a:t>
+            </a:r>
+          </a:p>
+          <a:p>
+            <a:pPr algn="l">
+              <a:lnSpc>
+                <a:spcPct val="115000"/>
+              </a:lnSpc>
+              <a:spcAft>
+                <a:spcPts val="400"/>
+              </a:spcAft>
+            </a:pPr>
+            <a:r>
+              <a:rPr sz="1450" b="0">
+                <a:solidFill>
+                  <a:srgbClr val="1B2A4A"/>
+                </a:solidFill>
+                <a:latin typeface="Noto Sans CJK SC"/>
+              </a:rPr>
+              <a:t>    – 嵌入式求解器毫秒级（7 ms @ 20 Hz）；真正门槛是模型辨识与整定自动化</a:t>
+            </a:r>
+          </a:p>
+          <a:p>
+            <a:pPr algn="l">
+              <a:lnSpc>
+                <a:spcPct val="115000"/>
+              </a:lnSpc>
+              <a:spcAft>
+                <a:spcPts val="800"/>
+              </a:spcAft>
+            </a:pPr>
+            <a:r>
+              <a:rPr sz="1600" b="1">
+                <a:solidFill>
+                  <a:srgbClr val="1F77B4"/>
+                </a:solidFill>
+                <a:latin typeface="Noto Sans CJK SC"/>
+              </a:rPr>
+              <a:t>▪ ③ 数据驱动自学习模型成为商用标配</a:t>
+            </a:r>
+          </a:p>
+          <a:p>
+            <a:pPr algn="l">
+              <a:lnSpc>
+                <a:spcPct val="115000"/>
+              </a:lnSpc>
+              <a:spcAft>
+                <a:spcPts val="400"/>
+              </a:spcAft>
+            </a:pPr>
+            <a:r>
+              <a:rPr sz="1450" b="0">
+                <a:solidFill>
+                  <a:srgbClr val="1B2A4A"/>
+                </a:solidFill>
+                <a:latin typeface="Noto Sans CJK SC"/>
+              </a:rPr>
+              <a:t>    – ClassNK-NAPA 油耗预测精度 99.6%；DeepSea 周油耗预报误差 0.8%；纯机理模型路线已少见</a:t>
+            </a:r>
+          </a:p>
+          <a:p>
+            <a:pPr algn="l">
+              <a:lnSpc>
+                <a:spcPct val="115000"/>
+              </a:lnSpc>
+              <a:spcAft>
+                <a:spcPts val="800"/>
+              </a:spcAft>
+            </a:pPr>
+            <a:r>
+              <a:rPr sz="1600" b="1">
+                <a:solidFill>
+                  <a:srgbClr val="1F77B4"/>
+                </a:solidFill>
+                <a:latin typeface="Noto Sans CJK SC"/>
+              </a:rPr>
+              <a:t>▪ ④ 法规持续加码，合规刚需取代节油回本逻辑</a:t>
+            </a:r>
+          </a:p>
+          <a:p>
+            <a:pPr algn="l">
+              <a:lnSpc>
+                <a:spcPct val="115000"/>
+              </a:lnSpc>
+              <a:spcAft>
+                <a:spcPts val="400"/>
+              </a:spcAft>
+            </a:pPr>
+            <a:r>
+              <a:rPr sz="1450" b="0">
+                <a:solidFill>
+                  <a:srgbClr val="1B2A4A"/>
+                </a:solidFill>
+                <a:latin typeface="Noto Sans CJK SC"/>
+              </a:rPr>
+              <a:t>    – CII 纠正计划机制 + 2026 年法规复审可能进一步收紧；EU ETS 碳成本显性化</a:t>
+            </a:r>
+          </a:p>
+        </p:txBody>
+      </p:sp>
+      <p:sp>
+        <p:nvSpPr>
+          <p:cNvPr id="6" name="TextBox 5"/>
+          <p:cNvSpPr txBox="1"/>
+          <p:nvPr/>
+        </p:nvSpPr>
+        <p:spPr>
+          <a:xfrm>
+            <a:off x="11475720" y="6473952"/>
+            <a:ext cx="640080" cy="320040"/>
+          </a:xfrm>
+          <a:prstGeom prst="rect">
+            <a:avLst/>
+          </a:prstGeom>
+          <a:noFill/>
+        </p:spPr>
+        <p:txBody>
+          <a:bodyPr wrap="square" anchor="t">
+            <a:spAutoFit/>
+          </a:bodyPr>
+          <a:lstStyle/>
+          <a:p>
+            <a:pPr algn="r">
+              <a:lnSpc>
+                <a:spcPct val="115000"/>
+              </a:lnSpc>
+              <a:spcAft>
+                <a:spcPts val="600"/>
+              </a:spcAft>
+            </a:pPr>
+            <a:r>
+              <a:rPr sz="1100" b="0">
+                <a:solidFill>
+                  <a:srgbClr val="666666"/>
+                </a:solidFill>
+                <a:latin typeface="Noto Sans CJK SC"/>
+              </a:rPr>
+              <a:t>17 / 20</a:t>
+            </a:r>
+          </a:p>
+        </p:txBody>
+      </p:sp>
+    </p:spTree>
+  </p:cSld>
+  <p:clrMapOvr>
+    <a:masterClrMapping/>
+  </p:clrMapOvr>
+</p:sld>
+</file>
+
+<file path=ppt/slides/slide18.xml><?xml version="1.0" encoding="utf-8"?>
+<p:sld xmlns:a="http://schemas.openxmlformats.org/drawingml/2006/main" xmlns:p="http://schemas.openxmlformats.org/presentationml/2006/main" xmlns:r="http://schemas.openxmlformats.org/officeDocument/2006/relationships">
+  <p:cSld>
+    <p:spTree>
+      <p:nvGrpSpPr>
+        <p:cNvPr id="1" name=""/>
+        <p:cNvGrpSpPr/>
+        <p:nvPr/>
+      </p:nvGrpSpPr>
+      <p:grpSpPr/>
+      <p:sp>
+        <p:nvSpPr>
+          <p:cNvPr id="2" name="Rectangle 1"/>
+          <p:cNvSpPr/>
+          <p:nvPr/>
+        </p:nvSpPr>
+        <p:spPr>
+          <a:xfrm>
+            <a:off x="0" y="0"/>
+            <a:ext cx="12191695" cy="109728"/>
+          </a:xfrm>
+          <a:prstGeom prst="rect">
+            <a:avLst/>
+          </a:prstGeom>
+          <a:solidFill>
+            <a:srgbClr val="1F77B4"/>
+          </a:solidFill>
+          <a:ln>
+            <a:noFill/>
+          </a:ln>
+        </p:spPr>
+        <p:style>
+          <a:lnRef idx="1">
+            <a:schemeClr val="accent1"/>
+          </a:lnRef>
+          <a:fillRef idx="3">
+            <a:schemeClr val="accent1"/>
+          </a:fillRef>
+          <a:effectRef idx="2">
+            <a:schemeClr val="accent1"/>
+          </a:effectRef>
+          <a:fontRef idx="minor">
+            <a:schemeClr val="lt1"/>
+          </a:fontRef>
+        </p:style>
+        <p:txBody>
+          <a:bodyPr rtlCol="0" anchor="ctr"/>
+          <a:lstStyle/>
+          <a:p>
+            <a:pPr algn="ctr"/>
+          </a:p>
+        </p:txBody>
+      </p:sp>
+      <p:sp>
+        <p:nvSpPr>
+          <p:cNvPr id="3" name="TextBox 2"/>
+          <p:cNvSpPr txBox="1"/>
+          <p:nvPr/>
+        </p:nvSpPr>
+        <p:spPr>
+          <a:xfrm>
+            <a:off x="457200" y="256032"/>
+            <a:ext cx="11247120" cy="822960"/>
+          </a:xfrm>
+          <a:prstGeom prst="rect">
+            <a:avLst/>
+          </a:prstGeom>
+          <a:noFill/>
+        </p:spPr>
+        <p:txBody>
+          <a:bodyPr wrap="square" anchor="t">
+            <a:spAutoFit/>
+          </a:bodyPr>
+          <a:lstStyle/>
+          <a:p>
+            <a:pPr algn="l">
+              <a:lnSpc>
+                <a:spcPct val="115000"/>
+              </a:lnSpc>
+              <a:spcAft>
+                <a:spcPts val="600"/>
+              </a:spcAft>
+            </a:pPr>
+            <a:r>
+              <a:rPr sz="3000" b="1">
+                <a:solidFill>
+                  <a:srgbClr val="1B2A4A"/>
+                </a:solidFill>
+                <a:latin typeface="Noto Sans CJK SC"/>
+              </a:rPr>
+              <a:t>对本项目（auto_rudder）的落地建议</a:t>
+            </a:r>
+          </a:p>
+        </p:txBody>
+      </p:sp>
+      <p:graphicFrame>
+        <p:nvGraphicFramePr>
+          <p:cNvPr id="4" name="Table 3"/>
+          <p:cNvGraphicFramePr>
+            <a:graphicFrameLocks noGrp="1"/>
+          </p:cNvGraphicFramePr>
+          <p:nvPr/>
+        </p:nvGraphicFramePr>
+        <p:xfrm>
+          <a:off x="457200" y="1463040"/>
+          <a:ext cx="11338559" cy="3840480"/>
+        </p:xfrm>
+        <a:graphic>
+          <a:graphicData uri="http://schemas.openxmlformats.org/drawingml/2006/table">
+            <a:tbl>
+              <a:tblPr firstRow="1" bandRow="1">
+                <a:tableStyleId>{5C22544A-7EE6-4342-B048-85BDC9FD1C3A}</a:tableStyleId>
+              </a:tblPr>
+              <a:tblGrid>
+                <a:gridCol w="1619794"/>
+                <a:gridCol w="2519680"/>
+                <a:gridCol w="7199085"/>
+              </a:tblGrid>
+              <a:tr h="960120">
+                <a:tc>
+                  <a:txBody>
+                    <a:bodyPr/>
+                    <a:lstStyle/>
+                    <a:p>
+                      <a:pPr>
+                        <a:lnSpc>
+                          <a:spcPct val="105000"/>
+                        </a:lnSpc>
+                      </a:pPr>
+                      <a:r>
+                        <a:rPr sz="1350" b="1">
+                          <a:solidFill>
+                            <a:srgbClr val="FFFFFF"/>
+                          </a:solidFill>
+                          <a:latin typeface="Noto Sans CJK SC"/>
+                        </a:rPr>
+                        <a:t>阶段</a:t>
+                      </a:r>
+                    </a:p>
+                  </a:txBody>
+                  <a:tcPr marL="54864" marR="54864" marT="27432" marB="27432" anchor="ctr">
+                    <a:solidFill>
+                      <a:srgbClr val="1F77B4"/>
+                    </a:solidFill>
+                  </a:tcPr>
+                </a:tc>
+                <a:tc>
+                  <a:txBody>
+                    <a:bodyPr/>
+                    <a:lstStyle/>
+                    <a:p>
+                      <a:pPr>
+                        <a:lnSpc>
+                          <a:spcPct val="105000"/>
+                        </a:lnSpc>
+                      </a:pPr>
+                      <a:r>
+                        <a:rPr sz="1350" b="1">
+                          <a:solidFill>
+                            <a:srgbClr val="FFFFFF"/>
+                          </a:solidFill>
+                          <a:latin typeface="Noto Sans CJK SC"/>
+                        </a:rPr>
+                        <a:t>目标</a:t>
+                      </a:r>
+                    </a:p>
+                  </a:txBody>
+                  <a:tcPr marL="54864" marR="54864" marT="27432" marB="27432" anchor="ctr">
+                    <a:solidFill>
+                      <a:srgbClr val="1F77B4"/>
+                    </a:solidFill>
+                  </a:tcPr>
+                </a:tc>
+                <a:tc>
+                  <a:txBody>
+                    <a:bodyPr/>
+                    <a:lstStyle/>
+                    <a:p>
+                      <a:pPr>
+                        <a:lnSpc>
+                          <a:spcPct val="105000"/>
+                        </a:lnSpc>
+                      </a:pPr>
+                      <a:r>
+                        <a:rPr sz="1350" b="1">
+                          <a:solidFill>
+                            <a:srgbClr val="FFFFFF"/>
+                          </a:solidFill>
+                          <a:latin typeface="Noto Sans CJK SC"/>
+                        </a:rPr>
+                        <a:t>关键动作</a:t>
+                      </a:r>
+                    </a:p>
+                  </a:txBody>
+                  <a:tcPr marL="54864" marR="54864" marT="27432" marB="27432" anchor="ctr">
+                    <a:solidFill>
+                      <a:srgbClr val="1F77B4"/>
+                    </a:solidFill>
+                  </a:tcPr>
+                </a:tc>
+              </a:tr>
+              <a:tr h="960120">
+                <a:tc>
+                  <a:txBody>
+                    <a:bodyPr/>
+                    <a:lstStyle/>
+                    <a:p>
+                      <a:pPr>
+                        <a:lnSpc>
+                          <a:spcPct val="105000"/>
+                        </a:lnSpc>
+                      </a:pPr>
+                      <a:r>
+                        <a:rPr sz="1300" b="0">
+                          <a:solidFill>
+                            <a:srgbClr val="1B2A4A"/>
+                          </a:solidFill>
+                          <a:latin typeface="Noto Sans CJK SC"/>
+                        </a:rPr>
+                        <a:t>短期</a:t>
+                      </a:r>
+                    </a:p>
+                    <a:p>
+                      <a:pPr>
+                        <a:lnSpc>
+                          <a:spcPct val="105000"/>
+                        </a:lnSpc>
+                      </a:pPr>
+                      <a:r>
+                        <a:rPr sz="1300" b="0">
+                          <a:solidFill>
+                            <a:srgbClr val="1B2A4A"/>
+                          </a:solidFill>
+                          <a:latin typeface="Noto Sans CJK SC"/>
+                        </a:rPr>
+                        <a:t>1–3 个月</a:t>
+                      </a:r>
+                    </a:p>
+                  </a:txBody>
+                  <a:tcPr marL="54864" marR="54864" marT="27432" marB="27432" anchor="ctr"/>
+                </a:tc>
+                <a:tc>
+                  <a:txBody>
+                    <a:bodyPr/>
+                    <a:lstStyle/>
+                    <a:p>
+                      <a:pPr>
+                        <a:lnSpc>
+                          <a:spcPct val="105000"/>
+                        </a:lnSpc>
+                      </a:pPr>
+                      <a:r>
+                        <a:rPr sz="1300" b="0">
+                          <a:solidFill>
+                            <a:srgbClr val="1B2A4A"/>
+                          </a:solidFill>
+                          <a:latin typeface="Noto Sans CJK SC"/>
+                        </a:rPr>
+                        <a:t>PD 基线交付</a:t>
+                      </a:r>
+                    </a:p>
+                  </a:txBody>
+                  <a:tcPr marL="54864" marR="54864" marT="27432" marB="27432" anchor="ctr"/>
+                </a:tc>
+                <a:tc>
+                  <a:txBody>
+                    <a:bodyPr/>
+                    <a:lstStyle/>
+                    <a:p>
+                      <a:pPr>
+                        <a:lnSpc>
+                          <a:spcPct val="105000"/>
+                        </a:lnSpc>
+                      </a:pPr>
+                      <a:r>
+                        <a:rPr sz="1300" b="0">
+                          <a:solidFill>
+                            <a:srgbClr val="1B2A4A"/>
+                          </a:solidFill>
+                          <a:latin typeface="Noto Sans CJK SC"/>
+                        </a:rPr>
+                        <a:t>Nomoto 极点配置整定（Kp=ωn²T/K，ζ≈1）；</a:t>
+                      </a:r>
+                    </a:p>
+                    <a:p>
+                      <a:pPr>
+                        <a:lnSpc>
+                          <a:spcPct val="105000"/>
+                        </a:lnSpc>
+                      </a:pPr>
+                      <a:r>
+                        <a:rPr sz="1300" b="0">
+                          <a:solidFill>
+                            <a:srgbClr val="1B2A4A"/>
+                          </a:solidFill>
+                          <a:latin typeface="Noto Sans CJK SC"/>
+                        </a:rPr>
+                        <a:t>海浪滤波+死区抑制无效操舵（对标 IMO 0.1–1.0% 收益）</a:t>
+                      </a:r>
+                    </a:p>
+                  </a:txBody>
+                  <a:tcPr marL="54864" marR="54864" marT="27432" marB="27432" anchor="ctr"/>
+                </a:tc>
+              </a:tr>
+              <a:tr h="960120">
+                <a:tc>
+                  <a:txBody>
+                    <a:bodyPr/>
+                    <a:lstStyle/>
+                    <a:p>
+                      <a:pPr>
+                        <a:lnSpc>
+                          <a:spcPct val="105000"/>
+                        </a:lnSpc>
+                      </a:pPr>
+                      <a:r>
+                        <a:rPr sz="1300" b="0">
+                          <a:solidFill>
+                            <a:srgbClr val="1B2A4A"/>
+                          </a:solidFill>
+                          <a:latin typeface="Noto Sans CJK SC"/>
+                        </a:rPr>
+                        <a:t>中期</a:t>
+                      </a:r>
+                    </a:p>
+                    <a:p>
+                      <a:pPr>
+                        <a:lnSpc>
+                          <a:spcPct val="105000"/>
+                        </a:lnSpc>
+                      </a:pPr>
+                      <a:r>
+                        <a:rPr sz="1300" b="0">
+                          <a:solidFill>
+                            <a:srgbClr val="1B2A4A"/>
+                          </a:solidFill>
+                          <a:latin typeface="Noto Sans CJK SC"/>
+                        </a:rPr>
+                        <a:t>3–6 个月</a:t>
+                      </a:r>
+                    </a:p>
+                  </a:txBody>
+                  <a:tcPr marL="54864" marR="54864" marT="27432" marB="27432" anchor="ctr">
+                    <a:solidFill>
+                      <a:srgbClr val="EEF3FA"/>
+                    </a:solidFill>
+                  </a:tcPr>
+                </a:tc>
+                <a:tc>
+                  <a:txBody>
+                    <a:bodyPr/>
+                    <a:lstStyle/>
+                    <a:p>
+                      <a:pPr>
+                        <a:lnSpc>
+                          <a:spcPct val="105000"/>
+                        </a:lnSpc>
+                      </a:pPr>
+                      <a:r>
+                        <a:rPr sz="1300" b="0">
+                          <a:solidFill>
+                            <a:srgbClr val="1B2A4A"/>
+                          </a:solidFill>
+                          <a:latin typeface="Noto Sans CJK SC"/>
+                        </a:rPr>
+                        <a:t>MPC 增强层开发</a:t>
+                      </a:r>
+                    </a:p>
+                  </a:txBody>
+                  <a:tcPr marL="54864" marR="54864" marT="27432" marB="27432" anchor="ctr">
+                    <a:solidFill>
+                      <a:srgbClr val="EEF3FA"/>
+                    </a:solidFill>
+                  </a:tcPr>
+                </a:tc>
+                <a:tc>
+                  <a:txBody>
+                    <a:bodyPr/>
+                    <a:lstStyle/>
+                    <a:p>
+                      <a:pPr>
+                        <a:lnSpc>
+                          <a:spcPct val="105000"/>
+                        </a:lnSpc>
+                      </a:pPr>
+                      <a:r>
+                        <a:rPr sz="1300" b="0">
+                          <a:solidFill>
+                            <a:srgbClr val="1B2A4A"/>
+                          </a:solidFill>
+                          <a:latin typeface="Noto Sans CJK SC"/>
+                        </a:rPr>
+                        <a:t>攻克模型在线辨识与权重整定工具化；</a:t>
+                      </a:r>
+                    </a:p>
+                    <a:p>
+                      <a:pPr>
+                        <a:lnSpc>
+                          <a:spcPct val="105000"/>
+                        </a:lnSpc>
+                      </a:pPr>
+                      <a:r>
+                        <a:rPr sz="1300" b="0">
+                          <a:solidFill>
+                            <a:srgbClr val="1B2A4A"/>
+                          </a:solidFill>
+                          <a:latin typeface="Noto Sans CJK SC"/>
+                        </a:rPr>
+                        <a:t>嵌入式求解器选型（acados/OSQP）；与 PD 基线 A/B 对比</a:t>
+                      </a:r>
+                    </a:p>
+                  </a:txBody>
+                  <a:tcPr marL="54864" marR="54864" marT="27432" marB="27432" anchor="ctr">
+                    <a:solidFill>
+                      <a:srgbClr val="EEF3FA"/>
+                    </a:solidFill>
+                  </a:tcPr>
+                </a:tc>
+              </a:tr>
+              <a:tr h="960120">
+                <a:tc>
+                  <a:txBody>
+                    <a:bodyPr/>
+                    <a:lstStyle/>
+                    <a:p>
+                      <a:pPr>
+                        <a:lnSpc>
+                          <a:spcPct val="105000"/>
+                        </a:lnSpc>
+                      </a:pPr>
+                      <a:r>
+                        <a:rPr sz="1300" b="0">
+                          <a:solidFill>
+                            <a:srgbClr val="1B2A4A"/>
+                          </a:solidFill>
+                          <a:latin typeface="Noto Sans CJK SC"/>
+                        </a:rPr>
+                        <a:t>长期</a:t>
+                      </a:r>
+                    </a:p>
+                    <a:p>
+                      <a:pPr>
+                        <a:lnSpc>
+                          <a:spcPct val="105000"/>
+                        </a:lnSpc>
+                      </a:pPr>
+                      <a:r>
+                        <a:rPr sz="1300" b="0">
+                          <a:solidFill>
+                            <a:srgbClr val="1B2A4A"/>
+                          </a:solidFill>
+                          <a:latin typeface="Noto Sans CJK SC"/>
+                        </a:rPr>
+                        <a:t>6–12 个月</a:t>
+                      </a:r>
+                    </a:p>
+                  </a:txBody>
+                  <a:tcPr marL="54864" marR="54864" marT="27432" marB="27432" anchor="ctr"/>
+                </a:tc>
+                <a:tc>
+                  <a:txBody>
+                    <a:bodyPr/>
+                    <a:lstStyle/>
+                    <a:p>
+                      <a:pPr>
+                        <a:lnSpc>
+                          <a:spcPct val="105000"/>
+                        </a:lnSpc>
+                      </a:pPr>
+                      <a:r>
+                        <a:rPr sz="1300" b="0">
+                          <a:solidFill>
+                            <a:srgbClr val="1B2A4A"/>
+                          </a:solidFill>
+                          <a:latin typeface="Noto Sans CJK SC"/>
+                        </a:rPr>
+                        <a:t>分层节能架构</a:t>
+                      </a:r>
+                    </a:p>
+                  </a:txBody>
+                  <a:tcPr marL="54864" marR="54864" marT="27432" marB="27432" anchor="ctr"/>
+                </a:tc>
+                <a:tc>
+                  <a:txBody>
+                    <a:bodyPr/>
+                    <a:lstStyle/>
+                    <a:p>
+                      <a:pPr>
+                        <a:lnSpc>
+                          <a:spcPct val="105000"/>
+                        </a:lnSpc>
+                      </a:pPr>
+                      <a:r>
+                        <a:rPr sz="1300" b="0">
+                          <a:solidFill>
+                            <a:srgbClr val="1B2A4A"/>
+                          </a:solidFill>
+                          <a:latin typeface="Noto Sans CJK SC"/>
+                        </a:rPr>
+                        <a:t>MPC 代价函数计入操舵能量，对接航速/纵倾优化指令；</a:t>
+                      </a:r>
+                    </a:p>
+                    <a:p>
+                      <a:pPr>
+                        <a:lnSpc>
+                          <a:spcPct val="105000"/>
+                        </a:lnSpc>
+                      </a:pPr>
+                      <a:r>
+                        <a:rPr sz="1300" b="0">
+                          <a:solidFill>
+                            <a:srgbClr val="1B2A4A"/>
+                          </a:solidFill>
+                          <a:latin typeface="Noto Sans CJK SC"/>
+                        </a:rPr>
+                        <a:t>输出舵机磨损/能耗统计；Lyapunov-based MPC 保稳定性</a:t>
+                      </a:r>
+                    </a:p>
+                  </a:txBody>
+                  <a:tcPr marL="54864" marR="54864" marT="27432" marB="27432" anchor="ctr"/>
+                </a:tc>
+              </a:tr>
+            </a:tbl>
+          </a:graphicData>
+        </a:graphic>
+      </p:graphicFrame>
+      <p:sp>
+        <p:nvSpPr>
+          <p:cNvPr id="5" name="TextBox 4"/>
+          <p:cNvSpPr txBox="1"/>
+          <p:nvPr/>
+        </p:nvSpPr>
+        <p:spPr>
+          <a:xfrm>
+            <a:off x="457200" y="5577840"/>
+            <a:ext cx="11338560" cy="914400"/>
+          </a:xfrm>
+          <a:prstGeom prst="rect">
+            <a:avLst/>
+          </a:prstGeom>
+          <a:noFill/>
+        </p:spPr>
+        <p:txBody>
+          <a:bodyPr wrap="square" anchor="t">
+            <a:spAutoFit/>
+          </a:bodyPr>
+          <a:lstStyle/>
+          <a:p>
+            <a:pPr algn="l">
+              <a:lnSpc>
+                <a:spcPct val="115000"/>
+              </a:lnSpc>
+              <a:spcAft>
+                <a:spcPts val="600"/>
+              </a:spcAft>
+            </a:pPr>
+            <a:r>
+              <a:rPr sz="1500" b="0">
+                <a:solidFill>
+                  <a:srgbClr val="1B2A4A"/>
+                </a:solidFill>
+                <a:latin typeface="Noto Sans CJK SC"/>
+              </a:rPr>
+              <a:t>核心逻辑：节能大头在决策层（气象航线 3–10%、减速航行主机口径可达 50%），控制层贡献 0.1–1% 但几乎零成本；</a:t>
+            </a:r>
+          </a:p>
+          <a:p>
+            <a:pPr algn="l">
+              <a:lnSpc>
+                <a:spcPct val="115000"/>
+              </a:lnSpc>
+              <a:spcAft>
+                <a:spcPts val="600"/>
+              </a:spcAft>
+            </a:pPr>
+            <a:r>
+              <a:rPr sz="1500" b="0">
+                <a:solidFill>
+                  <a:srgbClr val="1B2A4A"/>
+                </a:solidFill>
+                <a:latin typeface="Noto Sans CJK SC"/>
+              </a:rPr>
+              <a:t>先把 PD 整定与辨识流程工具化，再让 MPC 平滑接管性能增强。</a:t>
+            </a:r>
+          </a:p>
+        </p:txBody>
+      </p:sp>
+      <p:sp>
+        <p:nvSpPr>
+          <p:cNvPr id="6" name="TextBox 5"/>
+          <p:cNvSpPr txBox="1"/>
+          <p:nvPr/>
+        </p:nvSpPr>
+        <p:spPr>
+          <a:xfrm>
+            <a:off x="11475720" y="6473952"/>
+            <a:ext cx="640080" cy="320040"/>
+          </a:xfrm>
+          <a:prstGeom prst="rect">
+            <a:avLst/>
+          </a:prstGeom>
+          <a:noFill/>
+        </p:spPr>
+        <p:txBody>
+          <a:bodyPr wrap="square" anchor="t">
+            <a:spAutoFit/>
+          </a:bodyPr>
+          <a:lstStyle/>
+          <a:p>
+            <a:pPr algn="r">
+              <a:lnSpc>
+                <a:spcPct val="115000"/>
+              </a:lnSpc>
+              <a:spcAft>
+                <a:spcPts val="600"/>
+              </a:spcAft>
+            </a:pPr>
+            <a:r>
+              <a:rPr sz="1100" b="0">
+                <a:solidFill>
+                  <a:srgbClr val="666666"/>
+                </a:solidFill>
+                <a:latin typeface="Noto Sans CJK SC"/>
+              </a:rPr>
+              <a:t>18 / 20</a:t>
+            </a:r>
+          </a:p>
+        </p:txBody>
+      </p:sp>
+    </p:spTree>
+  </p:cSld>
+  <p:clrMapOvr>
+    <a:masterClrMapping/>
+  </p:clrMapOvr>
+</p:sld>
+</file>
+
+<file path=ppt/slides/slide19.xml><?xml version="1.0" encoding="utf-8"?>
+<p:sld xmlns:a="http://schemas.openxmlformats.org/drawingml/2006/main" xmlns:p="http://schemas.openxmlformats.org/presentationml/2006/main" xmlns:r="http://schemas.openxmlformats.org/officeDocument/2006/relationships">
+  <p:cSld>
+    <p:spTree>
+      <p:nvGrpSpPr>
+        <p:cNvPr id="1" name=""/>
+        <p:cNvGrpSpPr/>
+        <p:nvPr/>
+      </p:nvGrpSpPr>
+      <p:grpSpPr/>
+      <p:sp>
+        <p:nvSpPr>
+          <p:cNvPr id="2" name="Rectangle 1"/>
+          <p:cNvSpPr/>
+          <p:nvPr/>
+        </p:nvSpPr>
+        <p:spPr>
+          <a:xfrm>
+            <a:off x="0" y="0"/>
+            <a:ext cx="12191695" cy="109728"/>
+          </a:xfrm>
+          <a:prstGeom prst="rect">
+            <a:avLst/>
+          </a:prstGeom>
+          <a:solidFill>
+            <a:srgbClr val="1F77B4"/>
+          </a:solidFill>
+          <a:ln>
+            <a:noFill/>
+          </a:ln>
+        </p:spPr>
+        <p:style>
+          <a:lnRef idx="1">
+            <a:schemeClr val="accent1"/>
+          </a:lnRef>
+          <a:fillRef idx="3">
+            <a:schemeClr val="accent1"/>
+          </a:fillRef>
+          <a:effectRef idx="2">
+            <a:schemeClr val="accent1"/>
+          </a:effectRef>
+          <a:fontRef idx="minor">
+            <a:schemeClr val="lt1"/>
+          </a:fontRef>
+        </p:style>
+        <p:txBody>
+          <a:bodyPr rtlCol="0" anchor="ctr"/>
+          <a:lstStyle/>
+          <a:p>
+            <a:pPr algn="ctr"/>
+          </a:p>
+        </p:txBody>
+      </p:sp>
+      <p:sp>
+        <p:nvSpPr>
+          <p:cNvPr id="3" name="TextBox 2"/>
+          <p:cNvSpPr txBox="1"/>
+          <p:nvPr/>
+        </p:nvSpPr>
+        <p:spPr>
+          <a:xfrm>
+            <a:off x="457200" y="256032"/>
+            <a:ext cx="11247120" cy="822960"/>
+          </a:xfrm>
+          <a:prstGeom prst="rect">
+            <a:avLst/>
+          </a:prstGeom>
+          <a:noFill/>
+        </p:spPr>
+        <p:txBody>
+          <a:bodyPr wrap="square" anchor="t">
+            <a:spAutoFit/>
+          </a:bodyPr>
+          <a:lstStyle/>
+          <a:p>
+            <a:pPr algn="l">
+              <a:lnSpc>
+                <a:spcPct val="115000"/>
+              </a:lnSpc>
+              <a:spcAft>
+                <a:spcPts val="600"/>
+              </a:spcAft>
+            </a:pPr>
+            <a:r>
+              <a:rPr sz="3000" b="1">
+                <a:solidFill>
+                  <a:srgbClr val="1B2A4A"/>
+                </a:solidFill>
+                <a:latin typeface="Noto Sans CJK SC"/>
+              </a:rPr>
+              <a:t>主要数据来源</a:t>
+            </a:r>
+          </a:p>
+        </p:txBody>
+      </p:sp>
+      <p:sp>
+        <p:nvSpPr>
+          <p:cNvPr id="4" name="TextBox 3"/>
+          <p:cNvSpPr txBox="1"/>
+          <p:nvPr/>
+        </p:nvSpPr>
+        <p:spPr>
+          <a:xfrm>
+            <a:off x="475488" y="914400"/>
+            <a:ext cx="11247120" cy="457200"/>
+          </a:xfrm>
+          <a:prstGeom prst="rect">
+            <a:avLst/>
+          </a:prstGeom>
+          <a:noFill/>
+        </p:spPr>
+        <p:txBody>
+          <a:bodyPr wrap="square" anchor="t">
+            <a:spAutoFit/>
+          </a:bodyPr>
+          <a:lstStyle/>
+          <a:p>
+            <a:pPr algn="l">
+              <a:lnSpc>
+                <a:spcPct val="115000"/>
+              </a:lnSpc>
+              <a:spcAft>
+                <a:spcPts val="600"/>
+              </a:spcAft>
+            </a:pPr>
+            <a:r>
+              <a:rPr sz="1400" b="0">
+                <a:solidFill>
+                  <a:srgbClr val="666666"/>
+                </a:solidFill>
+                <a:latin typeface="Noto Sans CJK SC"/>
+              </a:rPr>
               <a:t>完整 45 条参考文献见调研文档；所有定量数据经两轮原文核对</a:t>
             </a:r>
           </a:p>
@@ -5521,7 +9132,7 @@
                 </a:solidFill>
                 <a:latin typeface="Noto Sans CJK SC"/>
               </a:rPr>
-              <a:t>13 / 14</a:t>
+              <a:t>19 / 20</a:t>
             </a:r>
           </a:p>
         </p:txBody>
@@ -5534,7 +9145,270 @@
 </p:sld>
 </file>
 
-<file path=ppt/slides/slide14.xml><?xml version="1.0" encoding="utf-8"?>
+<file path=ppt/slides/slide2.xml><?xml version="1.0" encoding="utf-8"?>
+<p:sld xmlns:a="http://schemas.openxmlformats.org/drawingml/2006/main" xmlns:p="http://schemas.openxmlformats.org/presentationml/2006/main" xmlns:r="http://schemas.openxmlformats.org/officeDocument/2006/relationships">
+  <p:cSld>
+    <p:spTree>
+      <p:nvGrpSpPr>
+        <p:cNvPr id="1" name=""/>
+        <p:cNvGrpSpPr/>
+        <p:nvPr/>
+      </p:nvGrpSpPr>
+      <p:grpSpPr/>
+      <p:sp>
+        <p:nvSpPr>
+          <p:cNvPr id="2" name="Rectangle 1"/>
+          <p:cNvSpPr/>
+          <p:nvPr/>
+        </p:nvSpPr>
+        <p:spPr>
+          <a:xfrm>
+            <a:off x="0" y="0"/>
+            <a:ext cx="12191695" cy="109728"/>
+          </a:xfrm>
+          <a:prstGeom prst="rect">
+            <a:avLst/>
+          </a:prstGeom>
+          <a:solidFill>
+            <a:srgbClr val="1F77B4"/>
+          </a:solidFill>
+          <a:ln>
+            <a:noFill/>
+          </a:ln>
+        </p:spPr>
+        <p:style>
+          <a:lnRef idx="1">
+            <a:schemeClr val="accent1"/>
+          </a:lnRef>
+          <a:fillRef idx="3">
+            <a:schemeClr val="accent1"/>
+          </a:fillRef>
+          <a:effectRef idx="2">
+            <a:schemeClr val="accent1"/>
+          </a:effectRef>
+          <a:fontRef idx="minor">
+            <a:schemeClr val="lt1"/>
+          </a:fontRef>
+        </p:style>
+        <p:txBody>
+          <a:bodyPr rtlCol="0" anchor="ctr"/>
+          <a:lstStyle/>
+          <a:p>
+            <a:pPr algn="ctr"/>
+          </a:p>
+        </p:txBody>
+      </p:sp>
+      <p:sp>
+        <p:nvSpPr>
+          <p:cNvPr id="3" name="TextBox 2"/>
+          <p:cNvSpPr txBox="1"/>
+          <p:nvPr/>
+        </p:nvSpPr>
+        <p:spPr>
+          <a:xfrm>
+            <a:off x="457200" y="256032"/>
+            <a:ext cx="11247120" cy="822960"/>
+          </a:xfrm>
+          <a:prstGeom prst="rect">
+            <a:avLst/>
+          </a:prstGeom>
+          <a:noFill/>
+        </p:spPr>
+        <p:txBody>
+          <a:bodyPr wrap="square" anchor="t">
+            <a:spAutoFit/>
+          </a:bodyPr>
+          <a:lstStyle/>
+          <a:p>
+            <a:pPr algn="l">
+              <a:lnSpc>
+                <a:spcPct val="115000"/>
+              </a:lnSpc>
+              <a:spcAft>
+                <a:spcPts val="600"/>
+              </a:spcAft>
+            </a:pPr>
+            <a:r>
+              <a:rPr sz="3000" b="1">
+                <a:solidFill>
+                  <a:srgbClr val="1B2A4A"/>
+                </a:solidFill>
+                <a:latin typeface="Noto Sans CJK SC"/>
+              </a:rPr>
+              <a:t>汇报提纲</a:t>
+            </a:r>
+          </a:p>
+        </p:txBody>
+      </p:sp>
+      <p:sp>
+        <p:nvSpPr>
+          <p:cNvPr id="4" name="TextBox 3"/>
+          <p:cNvSpPr txBox="1"/>
+          <p:nvPr/>
+        </p:nvSpPr>
+        <p:spPr>
+          <a:xfrm>
+            <a:off x="914400" y="1463040"/>
+            <a:ext cx="10058400" cy="5029200"/>
+          </a:xfrm>
+          <a:prstGeom prst="rect">
+            <a:avLst/>
+          </a:prstGeom>
+          <a:noFill/>
+        </p:spPr>
+        <p:txBody>
+          <a:bodyPr wrap="square" anchor="t">
+            <a:spAutoFit/>
+          </a:bodyPr>
+          <a:lstStyle/>
+          <a:p>
+            <a:pPr algn="l">
+              <a:lnSpc>
+                <a:spcPct val="115000"/>
+              </a:lnSpc>
+              <a:spcAft>
+                <a:spcPts val="800"/>
+              </a:spcAft>
+            </a:pPr>
+            <a:r>
+              <a:rPr sz="1900" b="0">
+                <a:solidFill>
+                  <a:srgbClr val="1B2A4A"/>
+                </a:solidFill>
+                <a:latin typeface="Noto Sans CJK SC"/>
+              </a:rPr>
+              <a:t>▪ 01  背景与法规驱动：EEXI/CII 机制详解，MPC 向船舶控制下沉</a:t>
+            </a:r>
+          </a:p>
+          <a:p>
+            <a:pPr algn="l">
+              <a:lnSpc>
+                <a:spcPct val="115000"/>
+              </a:lnSpc>
+              <a:spcAft>
+                <a:spcPts val="800"/>
+              </a:spcAft>
+            </a:pPr>
+            <a:r>
+              <a:rPr sz="1900" b="0">
+                <a:solidFill>
+                  <a:srgbClr val="1B2A4A"/>
+                </a:solidFill>
+                <a:latin typeface="Noto Sans CJK SC"/>
+              </a:rPr>
+              <a:t>▪ 02  MPC vs PD 自动舵：原理、控制效果、证据强度、调试难度、实时性与稳定性</a:t>
+            </a:r>
+          </a:p>
+          <a:p>
+            <a:pPr algn="l">
+              <a:lnSpc>
+                <a:spcPct val="115000"/>
+              </a:lnSpc>
+              <a:spcAft>
+                <a:spcPts val="800"/>
+              </a:spcAft>
+            </a:pPr>
+            <a:r>
+              <a:rPr sz="1900" b="0">
+                <a:solidFill>
+                  <a:srgbClr val="1B2A4A"/>
+                </a:solidFill>
+                <a:latin typeface="Noto Sans CJK SC"/>
+              </a:rPr>
+              <a:t>▪ 03  船舶节能五大算法路线：节能率、关键数据、优缺点</a:t>
+            </a:r>
+          </a:p>
+          <a:p>
+            <a:pPr algn="l">
+              <a:lnSpc>
+                <a:spcPct val="115000"/>
+              </a:lnSpc>
+              <a:spcAft>
+                <a:spcPts val="800"/>
+              </a:spcAft>
+            </a:pPr>
+            <a:r>
+              <a:rPr sz="1900" b="0">
+                <a:solidFill>
+                  <a:srgbClr val="1B2A4A"/>
+                </a:solidFill>
+                <a:latin typeface="Noto Sans CJK SC"/>
+              </a:rPr>
+              <a:t>▪ 04  工业部署案例：规模化部署与实测细节</a:t>
+            </a:r>
+          </a:p>
+          <a:p>
+            <a:pPr algn="l">
+              <a:lnSpc>
+                <a:spcPct val="115000"/>
+              </a:lnSpc>
+              <a:spcAft>
+                <a:spcPts val="800"/>
+              </a:spcAft>
+            </a:pPr>
+            <a:r>
+              <a:rPr sz="1900" b="0">
+                <a:solidFill>
+                  <a:srgbClr val="1B2A4A"/>
+                </a:solidFill>
+                <a:latin typeface="Noto Sans CJK SC"/>
+              </a:rPr>
+              <a:t>▪ 05  技术趋势判断与本项目落地建议</a:t>
+            </a:r>
+          </a:p>
+        </p:txBody>
+      </p:sp>
+      <p:sp>
+        <p:nvSpPr>
+          <p:cNvPr id="5" name="TextBox 4"/>
+          <p:cNvSpPr txBox="1"/>
+          <p:nvPr/>
+        </p:nvSpPr>
+        <p:spPr>
+          <a:xfrm>
+            <a:off x="11475720" y="6473952"/>
+            <a:ext cx="640080" cy="320040"/>
+          </a:xfrm>
+          <a:prstGeom prst="rect">
+            <a:avLst/>
+          </a:prstGeom>
+          <a:noFill/>
+        </p:spPr>
+        <p:txBody>
+          <a:bodyPr wrap="square" anchor="t">
+            <a:spAutoFit/>
+          </a:bodyPr>
+          <a:lstStyle/>
+          <a:p>
+            <a:pPr algn="r">
+              <a:lnSpc>
+                <a:spcPct val="115000"/>
+              </a:lnSpc>
+              <a:spcAft>
+                <a:spcPts val="600"/>
+              </a:spcAft>
+            </a:pPr>
+            <a:r>
+              <a:rPr sz="1100" b="0">
+                <a:solidFill>
+                  <a:srgbClr val="666666"/>
+                </a:solidFill>
+                <a:latin typeface="Noto Sans CJK SC"/>
+              </a:rPr>
+              <a:t>2 / 20</a:t>
+            </a:r>
+          </a:p>
+        </p:txBody>
+      </p:sp>
+    </p:spTree>
+  </p:cSld>
+  <p:clrMapOvr>
+    <a:masterClrMapping/>
+  </p:clrMapOvr>
+</p:sld>
+</file>
+
+<file path=ppt/slides/slide20.xml><?xml version="1.0" encoding="utf-8"?>
 <p:sld xmlns:a="http://schemas.openxmlformats.org/drawingml/2006/main" xmlns:p="http://schemas.openxmlformats.org/presentationml/2006/main" xmlns:r="http://schemas.openxmlformats.org/officeDocument/2006/relationships">
   <p:cSld>
     <p:spTree>
@@ -5698,7 +9572,7 @@
 </p:sld>
 </file>
 
-<file path=ppt/slides/slide2.xml><?xml version="1.0" encoding="utf-8"?>
+<file path=ppt/slides/slide3.xml><?xml version="1.0" encoding="utf-8"?>
 <p:sld xmlns:a="http://schemas.openxmlformats.org/drawingml/2006/main" xmlns:p="http://schemas.openxmlformats.org/presentationml/2006/main" xmlns:r="http://schemas.openxmlformats.org/officeDocument/2006/relationships">
   <p:cSld>
     <p:spTree>
@@ -5788,7 +9662,7 @@
                 </a:solidFill>
                 <a:latin typeface="Noto Sans CJK SC"/>
               </a:rPr>
-              <a:t>汇报提纲</a:t>
+              <a:t>背景：节能从「可选项」变为「合规刚需」</a:t>
             </a:r>
           </a:p>
         </p:txBody>
@@ -5801,8 +9675,8 @@
         </p:nvSpPr>
         <p:spPr>
           <a:xfrm>
-            <a:off x="914400" y="1463040"/>
-            <a:ext cx="10058400" cy="5029200"/>
+            <a:off x="475488" y="914400"/>
+            <a:ext cx="11247120" cy="457200"/>
           </a:xfrm>
           <a:prstGeom prst="rect">
             <a:avLst/>
@@ -5820,17 +9694,78 @@
                 <a:spcPct val="115000"/>
               </a:lnSpc>
               <a:spcAft>
+                <a:spcPts val="600"/>
+              </a:spcAft>
+            </a:pPr>
+            <a:r>
+              <a:rPr sz="1400" b="0">
+                <a:solidFill>
+                  <a:srgbClr val="666666"/>
+                </a:solidFill>
+                <a:latin typeface="Noto Sans CJK SC"/>
+              </a:rPr>
+              <a:t>法规 + 控制理论双重驱动</a:t>
+            </a:r>
+          </a:p>
+        </p:txBody>
+      </p:sp>
+      <p:sp>
+        <p:nvSpPr>
+          <p:cNvPr id="5" name="TextBox 4"/>
+          <p:cNvSpPr txBox="1"/>
+          <p:nvPr/>
+        </p:nvSpPr>
+        <p:spPr>
+          <a:xfrm>
+            <a:off x="548640" y="1554480"/>
+            <a:ext cx="5852160" cy="4937760"/>
+          </a:xfrm>
+          <a:prstGeom prst="rect">
+            <a:avLst/>
+          </a:prstGeom>
+          <a:noFill/>
+        </p:spPr>
+        <p:txBody>
+          <a:bodyPr wrap="square" anchor="t">
+            <a:spAutoFit/>
+          </a:bodyPr>
+          <a:lstStyle/>
+          <a:p>
+            <a:pPr algn="l">
+              <a:lnSpc>
+                <a:spcPct val="115000"/>
+              </a:lnSpc>
+              <a:spcAft>
                 <a:spcPts val="800"/>
               </a:spcAft>
             </a:pPr>
             <a:r>
-              <a:rPr sz="1900" b="0">
+              <a:rPr sz="1500" b="1">
+                <a:solidFill>
+                  <a:srgbClr val="1F77B4"/>
+                </a:solidFill>
+                <a:latin typeface="Noto Sans CJK SC"/>
+              </a:rPr>
+              <a:t>▪ IMO EEXI / CII 强制生效（2023-01-01）</a:t>
+            </a:r>
+          </a:p>
+          <a:p>
+            <a:pPr algn="l">
+              <a:lnSpc>
+                <a:spcPct val="115000"/>
+              </a:lnSpc>
+              <a:spcAft>
+                <a:spcPts val="400"/>
+              </a:spcAft>
+            </a:pPr>
+            <a:r>
+              <a:rPr sz="1350" b="0">
                 <a:solidFill>
                   <a:srgbClr val="1B2A4A"/>
                 </a:solidFill>
                 <a:latin typeface="Noto Sans CJK SC"/>
               </a:rPr>
-              <a:t>▪ 01  背景与驱动：EEXI/CII 法规倒逼节能，MPC 向船舶控制下沉</a:t>
+              <a:t>    – EEXI：≥400 GT，一次性技术能效合规</a:t>
             </a:r>
           </a:p>
           <a:p>
@@ -5839,17 +9774,93 @@
                 <a:spcPct val="115000"/>
               </a:lnSpc>
               <a:spcAft>
+                <a:spcPts val="400"/>
+              </a:spcAft>
+            </a:pPr>
+            <a:r>
+              <a:rPr sz="1350" b="0">
+                <a:solidFill>
+                  <a:srgbClr val="1B2A4A"/>
+                </a:solidFill>
+                <a:latin typeface="Noto Sans CJK SC"/>
+              </a:rPr>
+              <a:t>    – CII：≥5,000 GT，年度碳强度 A–E 评级</a:t>
+            </a:r>
+          </a:p>
+          <a:p>
+            <a:pPr algn="l">
+              <a:lnSpc>
+                <a:spcPct val="115000"/>
+              </a:lnSpc>
+              <a:spcAft>
+                <a:spcPts val="400"/>
+              </a:spcAft>
+            </a:pPr>
+            <a:r>
+              <a:rPr sz="1350" b="0">
+                <a:solidFill>
+                  <a:srgbClr val="1B2A4A"/>
+                </a:solidFill>
+                <a:latin typeface="Noto Sans CJK SC"/>
+              </a:rPr>
+              <a:t>    – 连续 3 年 D 或 1 年 E → 必须提交纠正计划</a:t>
+            </a:r>
+          </a:p>
+          <a:p>
+            <a:pPr algn="l">
+              <a:lnSpc>
+                <a:spcPct val="115000"/>
+              </a:lnSpc>
+              <a:spcAft>
+                <a:spcPts val="400"/>
+              </a:spcAft>
+            </a:pPr>
+            <a:r>
+              <a:rPr sz="1350" b="0">
+                <a:solidFill>
+                  <a:srgbClr val="1B2A4A"/>
+                </a:solidFill>
+                <a:latin typeface="Noto Sans CJK SC"/>
+              </a:rPr>
+              <a:t>    – EU ETS 2024 年起纳入航运，碳成本显性化</a:t>
+            </a:r>
+          </a:p>
+          <a:p>
+            <a:pPr algn="l">
+              <a:lnSpc>
+                <a:spcPct val="115000"/>
+              </a:lnSpc>
+              <a:spcAft>
                 <a:spcPts val="800"/>
               </a:spcAft>
             </a:pPr>
             <a:r>
-              <a:rPr sz="1900" b="0">
+              <a:rPr sz="1500" b="1">
+                <a:solidFill>
+                  <a:srgbClr val="1F77B4"/>
+                </a:solidFill>
+                <a:latin typeface="Noto Sans CJK SC"/>
+              </a:rPr>
+              <a:t>▪ MPC 向船舶控制下沉</a:t>
+            </a:r>
+          </a:p>
+          <a:p>
+            <a:pPr algn="l">
+              <a:lnSpc>
+                <a:spcPct val="115000"/>
+              </a:lnSpc>
+              <a:spcAft>
+                <a:spcPts val="400"/>
+              </a:spcAft>
+            </a:pPr>
+            <a:r>
+              <a:rPr sz="1350" b="0">
                 <a:solidFill>
                   <a:srgbClr val="1B2A4A"/>
                 </a:solidFill>
                 <a:latin typeface="Noto Sans CJK SC"/>
               </a:rPr>
-              <a:t>▪ 02  MPC vs PD 自动舵：原理、控制效果、调试难度全方位对比</a:t>
+              <a:t>    – 嵌入式 QP 求解器成熟：水下机器人实测 7 ms @ 20 Hz（acados，JMSE 2024）</a:t>
             </a:r>
           </a:p>
           <a:p>
@@ -5858,17 +9869,17 @@
                 <a:spcPct val="115000"/>
               </a:lnSpc>
               <a:spcAft>
-                <a:spcPts val="800"/>
-              </a:spcAft>
-            </a:pPr>
-            <a:r>
-              <a:rPr sz="1900" b="0">
+                <a:spcPts val="400"/>
+              </a:spcAft>
+            </a:pPr>
+            <a:r>
+              <a:rPr sz="1350" b="0">
                 <a:solidFill>
                   <a:srgbClr val="1B2A4A"/>
                 </a:solidFill>
                 <a:latin typeface="Noto Sans CJK SC"/>
               </a:rPr>
-              <a:t>▪ 03  船舶节能五大算法路线：节能率、优缺点与证据强度</a:t>
+              <a:t>    – 船舶航向动态慢（控制周期 0.1–0.2 s），算力足够</a:t>
             </a:r>
           </a:p>
           <a:p>
@@ -5877,43 +9888,90 @@
                 <a:spcPct val="115000"/>
               </a:lnSpc>
               <a:spcAft>
-                <a:spcPts val="800"/>
-              </a:spcAft>
-            </a:pPr>
-            <a:r>
-              <a:rPr sz="1900" b="0">
+                <a:spcPts val="400"/>
+              </a:spcAft>
+            </a:pPr>
+            <a:r>
+              <a:rPr sz="1350" b="0">
                 <a:solidFill>
                   <a:srgbClr val="1B2A4A"/>
                 </a:solidFill>
                 <a:latin typeface="Noto Sans CJK SC"/>
               </a:rPr>
-              <a:t>▪ 04  工业部署案例：ABB / Yara / NAPA / DeepSea / Anschütz / Orca AI</a:t>
-            </a:r>
-          </a:p>
-          <a:p>
-            <a:pPr algn="l">
-              <a:lnSpc>
-                <a:spcPct val="115000"/>
-              </a:lnSpc>
-              <a:spcAft>
-                <a:spcPts val="800"/>
-              </a:spcAft>
-            </a:pPr>
-            <a:r>
-              <a:rPr sz="1900" b="0">
-                <a:solidFill>
-                  <a:srgbClr val="1B2A4A"/>
-                </a:solidFill>
-                <a:latin typeface="Noto Sans CJK SC"/>
-              </a:rPr>
-              <a:t>▪ 05  分层节能架构与本项目落地建议</a:t>
-            </a:r>
-          </a:p>
-        </p:txBody>
-      </p:sp>
-      <p:sp>
-        <p:nvSpPr>
-          <p:cNvPr id="5" name="TextBox 4"/>
+              <a:t>    – 学术界大量仿真/船模成果，实船落地仍少</a:t>
+            </a:r>
+          </a:p>
+        </p:txBody>
+      </p:sp>
+      <p:pic>
+        <p:nvPicPr>
+          <p:cNvPr id="6" name="Picture 5" descr="fig6_architecture.png"/>
+          <p:cNvPicPr>
+            <a:picLocks noChangeAspect="1"/>
+          </p:cNvPicPr>
+          <p:nvPr/>
+        </p:nvPicPr>
+        <p:blipFill>
+          <a:blip r:embed="rId2"/>
+          <a:stretch>
+            <a:fillRect/>
+          </a:stretch>
+        </p:blipFill>
+        <p:spPr>
+          <a:xfrm>
+            <a:off x="6492240" y="2359152"/>
+            <a:ext cx="5394960" cy="3236976"/>
+          </a:xfrm>
+          <a:prstGeom prst="rect">
+            <a:avLst/>
+          </a:prstGeom>
+        </p:spPr>
+      </p:pic>
+      <p:sp>
+        <p:nvSpPr>
+          <p:cNvPr id="7" name="TextBox 6"/>
+          <p:cNvSpPr txBox="1"/>
+          <p:nvPr/>
+        </p:nvSpPr>
+        <p:spPr>
+          <a:xfrm>
+            <a:off x="6492240" y="6309360"/>
+            <a:ext cx="5394960" cy="365760"/>
+          </a:xfrm>
+          <a:prstGeom prst="rect">
+            <a:avLst/>
+          </a:prstGeom>
+          <a:noFill/>
+        </p:spPr>
+        <p:txBody>
+          <a:bodyPr wrap="square" anchor="t">
+            <a:spAutoFit/>
+          </a:bodyPr>
+          <a:lstStyle/>
+          <a:p>
+            <a:pPr algn="ctr">
+              <a:lnSpc>
+                <a:spcPct val="115000"/>
+              </a:lnSpc>
+              <a:spcAft>
+                <a:spcPts val="600"/>
+              </a:spcAft>
+            </a:pPr>
+            <a:r>
+              <a:rPr sz="1200" b="0">
+                <a:solidFill>
+                  <a:srgbClr val="666666"/>
+                </a:solidFill>
+                <a:latin typeface="Noto Sans CJK SC"/>
+              </a:rPr>
+              <a:t>船舶节能分层架构总览</a:t>
+            </a:r>
+          </a:p>
+        </p:txBody>
+      </p:sp>
+      <p:sp>
+        <p:nvSpPr>
+          <p:cNvPr id="8" name="TextBox 7"/>
           <p:cNvSpPr txBox="1"/>
           <p:nvPr/>
         </p:nvSpPr>
@@ -5948,7 +10006,7 @@
                 </a:solidFill>
                 <a:latin typeface="Noto Sans CJK SC"/>
               </a:rPr>
-              <a:t>2 / 14</a:t>
+              <a:t>3 / 20</a:t>
             </a:r>
           </a:p>
         </p:txBody>
@@ -5961,7 +10019,7 @@
 </p:sld>
 </file>
 
-<file path=ppt/slides/slide3.xml><?xml version="1.0" encoding="utf-8"?>
+<file path=ppt/slides/slide4.xml><?xml version="1.0" encoding="utf-8"?>
 <p:sld xmlns:a="http://schemas.openxmlformats.org/drawingml/2006/main" xmlns:p="http://schemas.openxmlformats.org/presentationml/2006/main" xmlns:r="http://schemas.openxmlformats.org/officeDocument/2006/relationships">
   <p:cSld>
     <p:spTree>
@@ -6051,7 +10109,7 @@
                 </a:solidFill>
                 <a:latin typeface="Noto Sans CJK SC"/>
               </a:rPr>
-              <a:t>背景：节能从「可选项」变为「合规刚需」</a:t>
+              <a:t>法规背景详解：EEXI 与 CII 的约束机制</a:t>
             </a:r>
           </a:p>
         </p:txBody>
@@ -6093,21 +10151,535 @@
                 </a:solidFill>
                 <a:latin typeface="Noto Sans CJK SC"/>
               </a:rPr>
-              <a:t>法规 + 控制理论双重驱动</a:t>
-            </a:r>
-          </a:p>
-        </p:txBody>
-      </p:sp>
-      <p:sp>
-        <p:nvSpPr>
-          <p:cNvPr id="5" name="TextBox 4"/>
+              <a:t>MARPOL 附则 VI 修正案（MEPC.328(76)），IMO 官方 FAQ 口径</a:t>
+            </a:r>
+          </a:p>
+        </p:txBody>
+      </p:sp>
+      <p:graphicFrame>
+        <p:nvGraphicFramePr>
+          <p:cNvPr id="5" name="Table 4"/>
+          <p:cNvGraphicFramePr>
+            <a:graphicFrameLocks noGrp="1"/>
+          </p:cNvGraphicFramePr>
+          <p:nvPr/>
+        </p:nvGraphicFramePr>
+        <p:xfrm>
+          <a:off x="457200" y="1554480"/>
+          <a:ext cx="11338560" cy="3291840"/>
+        </p:xfrm>
+        <a:graphic>
+          <a:graphicData uri="http://schemas.openxmlformats.org/drawingml/2006/table">
+            <a:tbl>
+              <a:tblPr firstRow="1" bandRow="1">
+                <a:tableStyleId>{5C22544A-7EE6-4342-B048-85BDC9FD1C3A}</a:tableStyleId>
+              </a:tblPr>
+              <a:tblGrid>
+                <a:gridCol w="1700784"/>
+                <a:gridCol w="4535424"/>
+                <a:gridCol w="5102352"/>
+              </a:tblGrid>
+              <a:tr h="658368">
+                <a:tc>
+                  <a:txBody>
+                    <a:bodyPr/>
+                    <a:lstStyle/>
+                    <a:p>
+                      <a:pPr>
+                        <a:lnSpc>
+                          <a:spcPct val="105000"/>
+                        </a:lnSpc>
+                      </a:pPr>
+                      <a:r>
+                        <a:rPr sz="1250" b="1">
+                          <a:solidFill>
+                            <a:srgbClr val="FFFFFF"/>
+                          </a:solidFill>
+                          <a:latin typeface="Noto Sans CJK SC"/>
+                        </a:rPr>
+                        <a:t>项目</a:t>
+                      </a:r>
+                    </a:p>
+                  </a:txBody>
+                  <a:tcPr marL="54864" marR="54864" marT="27432" marB="27432" anchor="ctr">
+                    <a:solidFill>
+                      <a:srgbClr val="1F77B4"/>
+                    </a:solidFill>
+                  </a:tcPr>
+                </a:tc>
+                <a:tc>
+                  <a:txBody>
+                    <a:bodyPr/>
+                    <a:lstStyle/>
+                    <a:p>
+                      <a:pPr>
+                        <a:lnSpc>
+                          <a:spcPct val="105000"/>
+                        </a:lnSpc>
+                      </a:pPr>
+                      <a:r>
+                        <a:rPr sz="1250" b="1">
+                          <a:solidFill>
+                            <a:srgbClr val="FFFFFF"/>
+                          </a:solidFill>
+                          <a:latin typeface="Noto Sans CJK SC"/>
+                        </a:rPr>
+                        <a:t>EEXI（技术能效指数）</a:t>
+                      </a:r>
+                    </a:p>
+                  </a:txBody>
+                  <a:tcPr marL="54864" marR="54864" marT="27432" marB="27432" anchor="ctr">
+                    <a:solidFill>
+                      <a:srgbClr val="1F77B4"/>
+                    </a:solidFill>
+                  </a:tcPr>
+                </a:tc>
+                <a:tc>
+                  <a:txBody>
+                    <a:bodyPr/>
+                    <a:lstStyle/>
+                    <a:p>
+                      <a:pPr>
+                        <a:lnSpc>
+                          <a:spcPct val="105000"/>
+                        </a:lnSpc>
+                      </a:pPr>
+                      <a:r>
+                        <a:rPr sz="1250" b="1">
+                          <a:solidFill>
+                            <a:srgbClr val="FFFFFF"/>
+                          </a:solidFill>
+                          <a:latin typeface="Noto Sans CJK SC"/>
+                        </a:rPr>
+                        <a:t>CII（营运碳强度指标）</a:t>
+                      </a:r>
+                    </a:p>
+                  </a:txBody>
+                  <a:tcPr marL="54864" marR="54864" marT="27432" marB="27432" anchor="ctr">
+                    <a:solidFill>
+                      <a:srgbClr val="1F77B4"/>
+                    </a:solidFill>
+                  </a:tcPr>
+                </a:tc>
+              </a:tr>
+              <a:tr h="658368">
+                <a:tc>
+                  <a:txBody>
+                    <a:bodyPr/>
+                    <a:lstStyle/>
+                    <a:p>
+                      <a:pPr>
+                        <a:lnSpc>
+                          <a:spcPct val="105000"/>
+                        </a:lnSpc>
+                      </a:pPr>
+                      <a:r>
+                        <a:rPr sz="1200" b="0">
+                          <a:solidFill>
+                            <a:srgbClr val="1B2A4A"/>
+                          </a:solidFill>
+                          <a:latin typeface="Noto Sans CJK SC"/>
+                        </a:rPr>
+                        <a:t>适用船舶</a:t>
+                      </a:r>
+                    </a:p>
+                  </a:txBody>
+                  <a:tcPr marL="54864" marR="54864" marT="27432" marB="27432" anchor="ctr"/>
+                </a:tc>
+                <a:tc>
+                  <a:txBody>
+                    <a:bodyPr/>
+                    <a:lstStyle/>
+                    <a:p>
+                      <a:pPr>
+                        <a:lnSpc>
+                          <a:spcPct val="105000"/>
+                        </a:lnSpc>
+                      </a:pPr>
+                      <a:r>
+                        <a:rPr sz="1200" b="0">
+                          <a:solidFill>
+                            <a:srgbClr val="1B2A4A"/>
+                          </a:solidFill>
+                          <a:latin typeface="Noto Sans CJK SC"/>
+                        </a:rPr>
+                        <a:t>≥400 GT 各船型</a:t>
+                      </a:r>
+                    </a:p>
+                  </a:txBody>
+                  <a:tcPr marL="54864" marR="54864" marT="27432" marB="27432" anchor="ctr"/>
+                </a:tc>
+                <a:tc>
+                  <a:txBody>
+                    <a:bodyPr/>
+                    <a:lstStyle/>
+                    <a:p>
+                      <a:pPr>
+                        <a:lnSpc>
+                          <a:spcPct val="105000"/>
+                        </a:lnSpc>
+                      </a:pPr>
+                      <a:r>
+                        <a:rPr sz="1200" b="0">
+                          <a:solidFill>
+                            <a:srgbClr val="1B2A4A"/>
+                          </a:solidFill>
+                          <a:latin typeface="Noto Sans CJK SC"/>
+                        </a:rPr>
+                        <a:t>≥5,000 GT 各船型</a:t>
+                      </a:r>
+                    </a:p>
+                  </a:txBody>
+                  <a:tcPr marL="54864" marR="54864" marT="27432" marB="27432" anchor="ctr"/>
+                </a:tc>
+              </a:tr>
+              <a:tr h="658368">
+                <a:tc>
+                  <a:txBody>
+                    <a:bodyPr/>
+                    <a:lstStyle/>
+                    <a:p>
+                      <a:pPr>
+                        <a:lnSpc>
+                          <a:spcPct val="105000"/>
+                        </a:lnSpc>
+                      </a:pPr>
+                      <a:r>
+                        <a:rPr sz="1200" b="0">
+                          <a:solidFill>
+                            <a:srgbClr val="1B2A4A"/>
+                          </a:solidFill>
+                          <a:latin typeface="Noto Sans CJK SC"/>
+                        </a:rPr>
+                        <a:t>核心机制</a:t>
+                      </a:r>
+                    </a:p>
+                  </a:txBody>
+                  <a:tcPr marL="54864" marR="54864" marT="27432" marB="27432" anchor="ctr">
+                    <a:solidFill>
+                      <a:srgbClr val="EEF3FA"/>
+                    </a:solidFill>
+                  </a:tcPr>
+                </a:tc>
+                <a:tc>
+                  <a:txBody>
+                    <a:bodyPr/>
+                    <a:lstStyle/>
+                    <a:p>
+                      <a:pPr>
+                        <a:lnSpc>
+                          <a:spcPct val="105000"/>
+                        </a:lnSpc>
+                      </a:pPr>
+                      <a:r>
+                        <a:rPr sz="1200" b="0">
+                          <a:solidFill>
+                            <a:srgbClr val="1B2A4A"/>
+                          </a:solidFill>
+                          <a:latin typeface="Noto Sans CJK SC"/>
+                        </a:rPr>
+                        <a:t>实际值 attained ≤ 要求值 required</a:t>
+                      </a:r>
+                    </a:p>
+                    <a:p>
+                      <a:pPr>
+                        <a:lnSpc>
+                          <a:spcPct val="105000"/>
+                        </a:lnSpc>
+                      </a:pPr>
+                      <a:r>
+                        <a:rPr sz="1200" b="0">
+                          <a:solidFill>
+                            <a:srgbClr val="1B2A4A"/>
+                          </a:solidFill>
+                          <a:latin typeface="Noto Sans CJK SC"/>
+                        </a:rPr>
+                        <a:t>（required 按船型/吨位以折减系数确定）</a:t>
+                      </a:r>
+                    </a:p>
+                  </a:txBody>
+                  <a:tcPr marL="54864" marR="54864" marT="27432" marB="27432" anchor="ctr">
+                    <a:solidFill>
+                      <a:srgbClr val="EEF3FA"/>
+                    </a:solidFill>
+                  </a:tcPr>
+                </a:tc>
+                <a:tc>
+                  <a:txBody>
+                    <a:bodyPr/>
+                    <a:lstStyle/>
+                    <a:p>
+                      <a:pPr>
+                        <a:lnSpc>
+                          <a:spcPct val="105000"/>
+                        </a:lnSpc>
+                      </a:pPr>
+                      <a:r>
+                        <a:rPr sz="1200" b="0">
+                          <a:solidFill>
+                            <a:srgbClr val="1B2A4A"/>
+                          </a:solidFill>
+                          <a:latin typeface="Noto Sans CJK SC"/>
+                        </a:rPr>
+                        <a:t>年度营运碳强度（AER，单位运输功 CO2）</a:t>
+                      </a:r>
+                    </a:p>
+                    <a:p>
+                      <a:pPr>
+                        <a:lnSpc>
+                          <a:spcPct val="105000"/>
+                        </a:lnSpc>
+                      </a:pPr>
+                      <a:r>
+                        <a:rPr sz="1200" b="0">
+                          <a:solidFill>
+                            <a:srgbClr val="1B2A4A"/>
+                          </a:solidFill>
+                          <a:latin typeface="Noto Sans CJK SC"/>
+                        </a:rPr>
+                        <a:t>对照 G2 参考线 + G3 逐年折减系数</a:t>
+                      </a:r>
+                    </a:p>
+                  </a:txBody>
+                  <a:tcPr marL="54864" marR="54864" marT="27432" marB="27432" anchor="ctr">
+                    <a:solidFill>
+                      <a:srgbClr val="EEF3FA"/>
+                    </a:solidFill>
+                  </a:tcPr>
+                </a:tc>
+              </a:tr>
+              <a:tr h="658368">
+                <a:tc>
+                  <a:txBody>
+                    <a:bodyPr/>
+                    <a:lstStyle/>
+                    <a:p>
+                      <a:pPr>
+                        <a:lnSpc>
+                          <a:spcPct val="105000"/>
+                        </a:lnSpc>
+                      </a:pPr>
+                      <a:r>
+                        <a:rPr sz="1200" b="0">
+                          <a:solidFill>
+                            <a:srgbClr val="1B2A4A"/>
+                          </a:solidFill>
+                          <a:latin typeface="Noto Sans CJK SC"/>
+                        </a:rPr>
+                        <a:t>合规方式</a:t>
+                      </a:r>
+                    </a:p>
+                  </a:txBody>
+                  <a:tcPr marL="54864" marR="54864" marT="27432" marB="27432" anchor="ctr"/>
+                </a:tc>
+                <a:tc>
+                  <a:txBody>
+                    <a:bodyPr/>
+                    <a:lstStyle/>
+                    <a:p>
+                      <a:pPr>
+                        <a:lnSpc>
+                          <a:spcPct val="105000"/>
+                        </a:lnSpc>
+                      </a:pPr>
+                      <a:r>
+                        <a:rPr sz="1200" b="0">
+                          <a:solidFill>
+                            <a:srgbClr val="1B2A4A"/>
+                          </a:solidFill>
+                          <a:latin typeface="Noto Sans CJK SC"/>
+                        </a:rPr>
+                        <a:t>一次性技术验证；</a:t>
+                      </a:r>
+                    </a:p>
+                    <a:p>
+                      <a:pPr>
+                        <a:lnSpc>
+                          <a:spcPct val="105000"/>
+                        </a:lnSpc>
+                      </a:pPr>
+                      <a:r>
+                        <a:rPr sz="1200" b="0">
+                          <a:solidFill>
+                            <a:srgbClr val="1B2A4A"/>
+                          </a:solidFill>
+                          <a:latin typeface="Noto Sans CJK SC"/>
+                        </a:rPr>
+                        <a:t>常用轴/主机功率限制（ShaPoLi/EPL）</a:t>
+                      </a:r>
+                    </a:p>
+                  </a:txBody>
+                  <a:tcPr marL="54864" marR="54864" marT="27432" marB="27432" anchor="ctr"/>
+                </a:tc>
+                <a:tc>
+                  <a:txBody>
+                    <a:bodyPr/>
+                    <a:lstStyle/>
+                    <a:p>
+                      <a:pPr>
+                        <a:lnSpc>
+                          <a:spcPct val="105000"/>
+                        </a:lnSpc>
+                      </a:pPr>
+                      <a:r>
+                        <a:rPr sz="1200" b="0">
+                          <a:solidFill>
+                            <a:srgbClr val="1B2A4A"/>
+                          </a:solidFill>
+                          <a:latin typeface="Noto Sans CJK SC"/>
+                        </a:rPr>
+                        <a:t>按 G4 边界评 A–E 级；连续 3 年 D 或 1 年 E</a:t>
+                      </a:r>
+                    </a:p>
+                    <a:p>
+                      <a:pPr>
+                        <a:lnSpc>
+                          <a:spcPct val="105000"/>
+                        </a:lnSpc>
+                      </a:pPr>
+                      <a:r>
+                        <a:rPr sz="1200" b="0">
+                          <a:solidFill>
+                            <a:srgbClr val="1B2A4A"/>
+                          </a:solidFill>
+                          <a:latin typeface="Noto Sans CJK SC"/>
+                        </a:rPr>
+                        <a:t>须在 SEEMP Part III 提交纠正措施计划</a:t>
+                      </a:r>
+                    </a:p>
+                  </a:txBody>
+                  <a:tcPr marL="54864" marR="54864" marT="27432" marB="27432" anchor="ctr"/>
+                </a:tc>
+              </a:tr>
+              <a:tr h="658368">
+                <a:tc>
+                  <a:txBody>
+                    <a:bodyPr/>
+                    <a:lstStyle/>
+                    <a:p>
+                      <a:pPr>
+                        <a:lnSpc>
+                          <a:spcPct val="105000"/>
+                        </a:lnSpc>
+                      </a:pPr>
+                      <a:r>
+                        <a:rPr sz="1200" b="0">
+                          <a:solidFill>
+                            <a:srgbClr val="1B2A4A"/>
+                          </a:solidFill>
+                          <a:latin typeface="Noto Sans CJK SC"/>
+                        </a:rPr>
+                        <a:t>关键时间线</a:t>
+                      </a:r>
+                    </a:p>
+                  </a:txBody>
+                  <a:tcPr marL="54864" marR="54864" marT="27432" marB="27432" anchor="ctr">
+                    <a:solidFill>
+                      <a:srgbClr val="EEF3FA"/>
+                    </a:solidFill>
+                  </a:tcPr>
+                </a:tc>
+                <a:tc>
+                  <a:txBody>
+                    <a:bodyPr/>
+                    <a:lstStyle/>
+                    <a:p>
+                      <a:pPr>
+                        <a:lnSpc>
+                          <a:spcPct val="105000"/>
+                        </a:lnSpc>
+                      </a:pPr>
+                      <a:r>
+                        <a:rPr sz="1200" b="0">
+                          <a:solidFill>
+                            <a:srgbClr val="1B2A4A"/>
+                          </a:solidFill>
+                          <a:latin typeface="Noto Sans CJK SC"/>
+                        </a:rPr>
+                        <a:t>2022-11-01 生效</a:t>
+                      </a:r>
+                    </a:p>
+                    <a:p>
+                      <a:pPr>
+                        <a:lnSpc>
+                          <a:spcPct val="105000"/>
+                        </a:lnSpc>
+                      </a:pPr>
+                      <a:r>
+                        <a:rPr sz="1200" b="0">
+                          <a:solidFill>
+                            <a:srgbClr val="1B2A4A"/>
+                          </a:solidFill>
+                          <a:latin typeface="Noto Sans CJK SC"/>
+                        </a:rPr>
+                        <a:t>2023-01-01 起须计算 attained EEXI</a:t>
+                      </a:r>
+                    </a:p>
+                  </a:txBody>
+                  <a:tcPr marL="54864" marR="54864" marT="27432" marB="27432" anchor="ctr">
+                    <a:solidFill>
+                      <a:srgbClr val="EEF3FA"/>
+                    </a:solidFill>
+                  </a:tcPr>
+                </a:tc>
+                <a:tc>
+                  <a:txBody>
+                    <a:bodyPr/>
+                    <a:lstStyle/>
+                    <a:p>
+                      <a:pPr>
+                        <a:lnSpc>
+                          <a:spcPct val="105000"/>
+                        </a:lnSpc>
+                      </a:pPr>
+                      <a:r>
+                        <a:rPr sz="1200" b="0">
+                          <a:solidFill>
+                            <a:srgbClr val="1B2A4A"/>
+                          </a:solidFill>
+                          <a:latin typeface="Noto Sans CJK SC"/>
+                        </a:rPr>
+                        <a:t>2023 年起数据收集，2024 年首次评级</a:t>
+                      </a:r>
+                    </a:p>
+                    <a:p>
+                      <a:pPr>
+                        <a:lnSpc>
+                          <a:spcPct val="105000"/>
+                        </a:lnSpc>
+                      </a:pPr>
+                      <a:r>
+                        <a:rPr sz="1200" b="0">
+                          <a:solidFill>
+                            <a:srgbClr val="1B2A4A"/>
+                          </a:solidFill>
+                          <a:latin typeface="Noto Sans CJK SC"/>
+                        </a:rPr>
+                        <a:t>法规要求 2026-01-01 前完成复审</a:t>
+                      </a:r>
+                    </a:p>
+                  </a:txBody>
+                  <a:tcPr marL="54864" marR="54864" marT="27432" marB="27432" anchor="ctr">
+                    <a:solidFill>
+                      <a:srgbClr val="EEF3FA"/>
+                    </a:solidFill>
+                  </a:tcPr>
+                </a:tc>
+              </a:tr>
+            </a:tbl>
+          </a:graphicData>
+        </a:graphic>
+      </p:graphicFrame>
+      <p:sp>
+        <p:nvSpPr>
+          <p:cNvPr id="6" name="TextBox 5"/>
           <p:cNvSpPr txBox="1"/>
           <p:nvPr/>
         </p:nvSpPr>
         <p:spPr>
           <a:xfrm>
-            <a:off x="548640" y="1554480"/>
-            <a:ext cx="5852160" cy="4937760"/>
+            <a:off x="548640" y="5120640"/>
+            <a:ext cx="11155680" cy="1554480"/>
           </a:xfrm>
           <a:prstGeom prst="rect">
             <a:avLst/>
@@ -6129,13 +10701,13 @@
               </a:spcAft>
             </a:pPr>
             <a:r>
-              <a:rPr sz="1500" b="1">
-                <a:solidFill>
-                  <a:srgbClr val="1F77B4"/>
-                </a:solidFill>
-                <a:latin typeface="Noto Sans CJK SC"/>
-              </a:rPr>
-              <a:t>▪ IMO EEXI / CII 强制生效（2023-01-01）</a:t>
+              <a:rPr sz="1400" b="0">
+                <a:solidFill>
+                  <a:srgbClr val="1B2A4A"/>
+                </a:solidFill>
+                <a:latin typeface="Noto Sans CJK SC"/>
+              </a:rPr>
+              <a:t>▪ 对节能技术选型的驱动：船东自 2022 年起集中评估船队并规划改装；EU ETS 自 2024 年纳入航运，碳成本显性化；</a:t>
             </a:r>
           </a:p>
           <a:p>
@@ -6144,223 +10716,24 @@
                 <a:spcPct val="115000"/>
               </a:lnSpc>
               <a:spcAft>
-                <a:spcPts val="400"/>
-              </a:spcAft>
-            </a:pPr>
-            <a:r>
-              <a:rPr sz="1350" b="0">
+                <a:spcPts val="800"/>
+              </a:spcAft>
+            </a:pPr>
+            <a:r>
+              <a:rPr sz="1400" b="0">
                 <a:solidFill>
                   <a:srgbClr val="1B2A4A"/>
                 </a:solidFill>
                 <a:latin typeface="Noto Sans CJK SC"/>
               </a:rPr>
-              <a:t>    – EEXI：≥400 GT，一次性技术能效合规</a:t>
-            </a:r>
-          </a:p>
-          <a:p>
-            <a:pPr algn="l">
-              <a:lnSpc>
-                <a:spcPct val="115000"/>
-              </a:lnSpc>
-              <a:spcAft>
-                <a:spcPts val="400"/>
-              </a:spcAft>
-            </a:pPr>
-            <a:r>
-              <a:rPr sz="1350" b="0">
-                <a:solidFill>
-                  <a:srgbClr val="1B2A4A"/>
-                </a:solidFill>
-                <a:latin typeface="Noto Sans CJK SC"/>
-              </a:rPr>
-              <a:t>    – CII：≥5,000 GT，年度碳强度 A–E 评级</a:t>
-            </a:r>
-          </a:p>
-          <a:p>
-            <a:pPr algn="l">
-              <a:lnSpc>
-                <a:spcPct val="115000"/>
-              </a:lnSpc>
-              <a:spcAft>
-                <a:spcPts val="400"/>
-              </a:spcAft>
-            </a:pPr>
-            <a:r>
-              <a:rPr sz="1350" b="0">
-                <a:solidFill>
-                  <a:srgbClr val="1B2A4A"/>
-                </a:solidFill>
-                <a:latin typeface="Noto Sans CJK SC"/>
-              </a:rPr>
-              <a:t>    – 连续 3 年 D 或 1 年 E → 必须提交纠正计划</a:t>
-            </a:r>
-          </a:p>
-          <a:p>
-            <a:pPr algn="l">
-              <a:lnSpc>
-                <a:spcPct val="115000"/>
-              </a:lnSpc>
-              <a:spcAft>
-                <a:spcPts val="400"/>
-              </a:spcAft>
-            </a:pPr>
-            <a:r>
-              <a:rPr sz="1350" b="0">
-                <a:solidFill>
-                  <a:srgbClr val="1B2A4A"/>
-                </a:solidFill>
-                <a:latin typeface="Noto Sans CJK SC"/>
-              </a:rPr>
-              <a:t>    – EU ETS 2024 年起纳入航运，碳成本显性化</a:t>
-            </a:r>
-          </a:p>
-          <a:p>
-            <a:pPr algn="l">
-              <a:lnSpc>
-                <a:spcPct val="115000"/>
-              </a:lnSpc>
-              <a:spcAft>
-                <a:spcPts val="800"/>
-              </a:spcAft>
-            </a:pPr>
-            <a:r>
-              <a:rPr sz="1500" b="1">
-                <a:solidFill>
-                  <a:srgbClr val="1F77B4"/>
-                </a:solidFill>
-                <a:latin typeface="Noto Sans CJK SC"/>
-              </a:rPr>
-              <a:t>▪ MPC 向船舶控制下沉</a:t>
-            </a:r>
-          </a:p>
-          <a:p>
-            <a:pPr algn="l">
-              <a:lnSpc>
-                <a:spcPct val="115000"/>
-              </a:lnSpc>
-              <a:spcAft>
-                <a:spcPts val="400"/>
-              </a:spcAft>
-            </a:pPr>
-            <a:r>
-              <a:rPr sz="1350" b="0">
-                <a:solidFill>
-                  <a:srgbClr val="1B2A4A"/>
-                </a:solidFill>
-                <a:latin typeface="Noto Sans CJK SC"/>
-              </a:rPr>
-              <a:t>    – 嵌入式 QP 求解器成熟：水下机器人实测 7 ms @ 20 Hz（acados，JMSE 2024）</a:t>
-            </a:r>
-          </a:p>
-          <a:p>
-            <a:pPr algn="l">
-              <a:lnSpc>
-                <a:spcPct val="115000"/>
-              </a:lnSpc>
-              <a:spcAft>
-                <a:spcPts val="400"/>
-              </a:spcAft>
-            </a:pPr>
-            <a:r>
-              <a:rPr sz="1350" b="0">
-                <a:solidFill>
-                  <a:srgbClr val="1B2A4A"/>
-                </a:solidFill>
-                <a:latin typeface="Noto Sans CJK SC"/>
-              </a:rPr>
-              <a:t>    – 船舶航向动态慢（控制周期 0.1–0.2 s），算力足够</a:t>
-            </a:r>
-          </a:p>
-          <a:p>
-            <a:pPr algn="l">
-              <a:lnSpc>
-                <a:spcPct val="115000"/>
-              </a:lnSpc>
-              <a:spcAft>
-                <a:spcPts val="400"/>
-              </a:spcAft>
-            </a:pPr>
-            <a:r>
-              <a:rPr sz="1350" b="0">
-                <a:solidFill>
-                  <a:srgbClr val="1B2A4A"/>
-                </a:solidFill>
-                <a:latin typeface="Noto Sans CJK SC"/>
-              </a:rPr>
-              <a:t>    – 学术界大量仿真/船模成果，实船落地仍少</a:t>
-            </a:r>
-          </a:p>
-        </p:txBody>
-      </p:sp>
-      <p:pic>
-        <p:nvPicPr>
-          <p:cNvPr id="6" name="Picture 5" descr="fig6_architecture.png"/>
-          <p:cNvPicPr>
-            <a:picLocks noChangeAspect="1"/>
-          </p:cNvPicPr>
-          <p:nvPr/>
-        </p:nvPicPr>
-        <p:blipFill>
-          <a:blip r:embed="rId2"/>
-          <a:stretch>
-            <a:fillRect/>
-          </a:stretch>
-        </p:blipFill>
-        <p:spPr>
-          <a:xfrm>
-            <a:off x="6492240" y="2359152"/>
-            <a:ext cx="5394960" cy="3236976"/>
-          </a:xfrm>
-          <a:prstGeom prst="rect">
-            <a:avLst/>
-          </a:prstGeom>
-        </p:spPr>
-      </p:pic>
+              <a:t>▪ 厂商已直接以「改善 CII 评级」作为产品卖点（Anschütz、Yara 等）——节能软件从「节油回本」变为「合规刚需」。</a:t>
+            </a:r>
+          </a:p>
+        </p:txBody>
+      </p:sp>
       <p:sp>
         <p:nvSpPr>
           <p:cNvPr id="7" name="TextBox 6"/>
-          <p:cNvSpPr txBox="1"/>
-          <p:nvPr/>
-        </p:nvSpPr>
-        <p:spPr>
-          <a:xfrm>
-            <a:off x="6492240" y="6309360"/>
-            <a:ext cx="5394960" cy="365760"/>
-          </a:xfrm>
-          <a:prstGeom prst="rect">
-            <a:avLst/>
-          </a:prstGeom>
-          <a:noFill/>
-        </p:spPr>
-        <p:txBody>
-          <a:bodyPr wrap="square" anchor="t">
-            <a:spAutoFit/>
-          </a:bodyPr>
-          <a:lstStyle/>
-          <a:p>
-            <a:pPr algn="ctr">
-              <a:lnSpc>
-                <a:spcPct val="115000"/>
-              </a:lnSpc>
-              <a:spcAft>
-                <a:spcPts val="600"/>
-              </a:spcAft>
-            </a:pPr>
-            <a:r>
-              <a:rPr sz="1200" b="0">
-                <a:solidFill>
-                  <a:srgbClr val="666666"/>
-                </a:solidFill>
-                <a:latin typeface="Noto Sans CJK SC"/>
-              </a:rPr>
-              <a:t>船舶节能分层架构总览</a:t>
-            </a:r>
-          </a:p>
-        </p:txBody>
-      </p:sp>
-      <p:sp>
-        <p:nvSpPr>
-          <p:cNvPr id="8" name="TextBox 7"/>
           <p:cNvSpPr txBox="1"/>
           <p:nvPr/>
         </p:nvSpPr>
@@ -6395,7 +10768,7 @@
                 </a:solidFill>
                 <a:latin typeface="Noto Sans CJK SC"/>
               </a:rPr>
-              <a:t>3 / 14</a:t>
+              <a:t>4 / 20</a:t>
             </a:r>
           </a:p>
         </p:txBody>
@@ -6408,7 +10781,7 @@
 </p:sld>
 </file>
 
-<file path=ppt/slides/slide4.xml><?xml version="1.0" encoding="utf-8"?>
+<file path=ppt/slides/slide5.xml><?xml version="1.0" encoding="utf-8"?>
 <p:sld xmlns:a="http://schemas.openxmlformats.org/drawingml/2006/main" xmlns:p="http://schemas.openxmlformats.org/presentationml/2006/main" xmlns:r="http://schemas.openxmlformats.org/officeDocument/2006/relationships">
   <p:cSld>
     <p:spTree>
@@ -6800,7 +11173,7 @@
                 </a:solidFill>
                 <a:latin typeface="Noto Sans CJK SC"/>
               </a:rPr>
-              <a:t>4 / 14</a:t>
+              <a:t>5 / 20</a:t>
             </a:r>
           </a:p>
         </p:txBody>
@@ -6813,7 +11186,7 @@
 </p:sld>
 </file>
 
-<file path=ppt/slides/slide5.xml><?xml version="1.0" encoding="utf-8"?>
+<file path=ppt/slides/slide6.xml><?xml version="1.0" encoding="utf-8"?>
 <p:sld xmlns:a="http://schemas.openxmlformats.org/drawingml/2006/main" xmlns:p="http://schemas.openxmlformats.org/presentationml/2006/main" xmlns:r="http://schemas.openxmlformats.org/officeDocument/2006/relationships">
   <p:cSld>
     <p:spTree>
@@ -7490,7 +11863,7 @@
                 </a:solidFill>
                 <a:latin typeface="Noto Sans CJK SC"/>
               </a:rPr>
-              <a:t>5 / 14</a:t>
+              <a:t>6 / 20</a:t>
             </a:r>
           </a:p>
         </p:txBody>
@@ -7503,7 +11876,7 @@
 </p:sld>
 </file>
 
-<file path=ppt/slides/slide6.xml><?xml version="1.0" encoding="utf-8"?>
+<file path=ppt/slides/slide7.xml><?xml version="1.0" encoding="utf-8"?>
 <p:sld xmlns:a="http://schemas.openxmlformats.org/drawingml/2006/main" xmlns:p="http://schemas.openxmlformats.org/presentationml/2006/main" xmlns:r="http://schemas.openxmlformats.org/officeDocument/2006/relationships">
   <p:cSld>
     <p:spTree>
@@ -7593,7 +11966,7 @@
                 </a:solidFill>
                 <a:latin typeface="Noto Sans CJK SC"/>
               </a:rPr>
-              <a:t>调试难度：MPC 上船的最大障碍</a:t>
+              <a:t>证据强度分级：本文数据的可靠性坐标</a:t>
             </a:r>
           </a:p>
         </p:txBody>
@@ -7635,35 +12008,532 @@
                 </a:solidFill>
                 <a:latin typeface="Noto Sans CJK SC"/>
               </a:rPr>
-              <a:t>「模型参数确定是实现 MPC 的最大障碍」—— He et al., 2023 原文</a:t>
-            </a:r>
-          </a:p>
-        </p:txBody>
-      </p:sp>
-      <p:pic>
-        <p:nvPicPr>
-          <p:cNvPr id="5" name="Picture 4" descr="fig3_radar.png"/>
-          <p:cNvPicPr>
-            <a:picLocks noChangeAspect="1"/>
-          </p:cNvPicPr>
+              <a:t>引用前先看数据站在哪一级</a:t>
+            </a:r>
+          </a:p>
+        </p:txBody>
+      </p:sp>
+      <p:graphicFrame>
+        <p:nvGraphicFramePr>
+          <p:cNvPr id="5" name="Table 4"/>
+          <p:cNvGraphicFramePr>
+            <a:graphicFrameLocks noGrp="1"/>
+          </p:cNvGraphicFramePr>
           <p:nvPr/>
-        </p:nvPicPr>
-        <p:blipFill>
-          <a:blip r:embed="rId2"/>
-          <a:stretch>
-            <a:fillRect/>
-          </a:stretch>
-        </p:blipFill>
-        <p:spPr>
-          <a:xfrm>
-            <a:off x="365760" y="1600200"/>
-            <a:ext cx="5486400" cy="4754880"/>
-          </a:xfrm>
-          <a:prstGeom prst="rect">
-            <a:avLst/>
-          </a:prstGeom>
-        </p:spPr>
-      </p:pic>
+        </p:nvGraphicFramePr>
+        <p:xfrm>
+          <a:off x="457200" y="1554480"/>
+          <a:ext cx="11338559" cy="3931920"/>
+        </p:xfrm>
+        <a:graphic>
+          <a:graphicData uri="http://schemas.openxmlformats.org/drawingml/2006/table">
+            <a:tbl>
+              <a:tblPr firstRow="1" bandRow="1">
+                <a:tableStyleId>{5C22544A-7EE6-4342-B048-85BDC9FD1C3A}</a:tableStyleId>
+              </a:tblPr>
+              <a:tblGrid>
+                <a:gridCol w="2616590"/>
+                <a:gridCol w="5930939"/>
+                <a:gridCol w="2791030"/>
+              </a:tblGrid>
+              <a:tr h="655320">
+                <a:tc>
+                  <a:txBody>
+                    <a:bodyPr/>
+                    <a:lstStyle/>
+                    <a:p>
+                      <a:pPr>
+                        <a:lnSpc>
+                          <a:spcPct val="105000"/>
+                        </a:lnSpc>
+                      </a:pPr>
+                      <a:r>
+                        <a:rPr sz="1250" b="1">
+                          <a:solidFill>
+                            <a:srgbClr val="FFFFFF"/>
+                          </a:solidFill>
+                          <a:latin typeface="Noto Sans CJK SC"/>
+                        </a:rPr>
+                        <a:t>证据等级</a:t>
+                      </a:r>
+                    </a:p>
+                  </a:txBody>
+                  <a:tcPr marL="54864" marR="54864" marT="27432" marB="27432" anchor="ctr">
+                    <a:solidFill>
+                      <a:srgbClr val="1F77B4"/>
+                    </a:solidFill>
+                  </a:tcPr>
+                </a:tc>
+                <a:tc>
+                  <a:txBody>
+                    <a:bodyPr/>
+                    <a:lstStyle/>
+                    <a:p>
+                      <a:pPr>
+                        <a:lnSpc>
+                          <a:spcPct val="105000"/>
+                        </a:lnSpc>
+                      </a:pPr>
+                      <a:r>
+                        <a:rPr sz="1250" b="1">
+                          <a:solidFill>
+                            <a:srgbClr val="FFFFFF"/>
+                          </a:solidFill>
+                          <a:latin typeface="Noto Sans CJK SC"/>
+                        </a:rPr>
+                        <a:t>代表数据</a:t>
+                      </a:r>
+                    </a:p>
+                  </a:txBody>
+                  <a:tcPr marL="54864" marR="54864" marT="27432" marB="27432" anchor="ctr">
+                    <a:solidFill>
+                      <a:srgbClr val="1F77B4"/>
+                    </a:solidFill>
+                  </a:tcPr>
+                </a:tc>
+                <a:tc>
+                  <a:txBody>
+                    <a:bodyPr/>
+                    <a:lstStyle/>
+                    <a:p>
+                      <a:pPr>
+                        <a:lnSpc>
+                          <a:spcPct val="105000"/>
+                        </a:lnSpc>
+                      </a:pPr>
+                      <a:r>
+                        <a:rPr sz="1250" b="1">
+                          <a:solidFill>
+                            <a:srgbClr val="FFFFFF"/>
+                          </a:solidFill>
+                          <a:latin typeface="Noto Sans CJK SC"/>
+                        </a:rPr>
+                        <a:t>可靠性评估</a:t>
+                      </a:r>
+                    </a:p>
+                  </a:txBody>
+                  <a:tcPr marL="54864" marR="54864" marT="27432" marB="27432" anchor="ctr">
+                    <a:solidFill>
+                      <a:srgbClr val="1F77B4"/>
+                    </a:solidFill>
+                  </a:tcPr>
+                </a:tc>
+              </a:tr>
+              <a:tr h="655320">
+                <a:tc>
+                  <a:txBody>
+                    <a:bodyPr/>
+                    <a:lstStyle/>
+                    <a:p>
+                      <a:pPr>
+                        <a:lnSpc>
+                          <a:spcPct val="105000"/>
+                        </a:lnSpc>
+                      </a:pPr>
+                      <a:r>
+                        <a:rPr sz="1200" b="0">
+                          <a:solidFill>
+                            <a:srgbClr val="1B2A4A"/>
+                          </a:solidFill>
+                          <a:latin typeface="Noto Sans CJK SC"/>
+                        </a:rPr>
+                        <a:t>实船试航 / 第三方实测</a:t>
+                      </a:r>
+                    </a:p>
+                  </a:txBody>
+                  <a:tcPr marL="54864" marR="54864" marT="27432" marB="27432" anchor="ctr"/>
+                </a:tc>
+                <a:tc>
+                  <a:txBody>
+                    <a:bodyPr/>
+                    <a:lstStyle/>
+                    <a:p>
+                      <a:pPr>
+                        <a:lnSpc>
+                          <a:spcPct val="105000"/>
+                        </a:lnSpc>
+                      </a:pPr>
+                      <a:r>
+                        <a:rPr sz="1200" b="0">
+                          <a:solidFill>
+                            <a:srgbClr val="1B2A4A"/>
+                          </a:solidFill>
+                          <a:latin typeface="Noto Sans CJK SC"/>
+                        </a:rPr>
+                        <a:t>ClassNK-NAPA 试航 3.8–3.9%；Yara 实测 3–5%；</a:t>
+                      </a:r>
+                    </a:p>
+                    <a:p>
+                      <a:pPr>
+                        <a:lnSpc>
+                          <a:spcPct val="105000"/>
+                        </a:lnSpc>
+                      </a:pPr>
+                      <a:r>
+                        <a:rPr sz="1200" b="0">
+                          <a:solidFill>
+                            <a:srgbClr val="1B2A4A"/>
+                          </a:solidFill>
+                          <a:latin typeface="Noto Sans CJK SC"/>
+                        </a:rPr>
+                        <a:t>Malaysia Grace 3.4%；MRAS 全尺度 1–3%</a:t>
+                      </a:r>
+                    </a:p>
+                  </a:txBody>
+                  <a:tcPr marL="54864" marR="54864" marT="27432" marB="27432" anchor="ctr"/>
+                </a:tc>
+                <a:tc>
+                  <a:txBody>
+                    <a:bodyPr/>
+                    <a:lstStyle/>
+                    <a:p>
+                      <a:pPr>
+                        <a:lnSpc>
+                          <a:spcPct val="105000"/>
+                        </a:lnSpc>
+                      </a:pPr>
+                      <a:r>
+                        <a:rPr sz="1200" b="0">
+                          <a:solidFill>
+                            <a:srgbClr val="1B2A4A"/>
+                          </a:solidFill>
+                          <a:latin typeface="Noto Sans CJK SC"/>
+                        </a:rPr>
+                        <a:t>最高，可直接引用</a:t>
+                      </a:r>
+                    </a:p>
+                  </a:txBody>
+                  <a:tcPr marL="54864" marR="54864" marT="27432" marB="27432" anchor="ctr"/>
+                </a:tc>
+              </a:tr>
+              <a:tr h="655320">
+                <a:tc>
+                  <a:txBody>
+                    <a:bodyPr/>
+                    <a:lstStyle/>
+                    <a:p>
+                      <a:pPr>
+                        <a:lnSpc>
+                          <a:spcPct val="105000"/>
+                        </a:lnSpc>
+                      </a:pPr>
+                      <a:r>
+                        <a:rPr sz="1200" b="0">
+                          <a:solidFill>
+                            <a:srgbClr val="1B2A4A"/>
+                          </a:solidFill>
+                          <a:latin typeface="Noto Sans CJK SC"/>
+                        </a:rPr>
+                        <a:t>船模实验</a:t>
+                      </a:r>
+                    </a:p>
+                  </a:txBody>
+                  <a:tcPr marL="54864" marR="54864" marT="27432" marB="27432" anchor="ctr">
+                    <a:solidFill>
+                      <a:srgbClr val="EEF3FA"/>
+                    </a:solidFill>
+                  </a:tcPr>
+                </a:tc>
+                <a:tc>
+                  <a:txBody>
+                    <a:bodyPr/>
+                    <a:lstStyle/>
+                    <a:p>
+                      <a:pPr>
+                        <a:lnSpc>
+                          <a:spcPct val="105000"/>
+                        </a:lnSpc>
+                      </a:pPr>
+                      <a:r>
+                        <a:rPr sz="1200" b="0">
+                          <a:solidFill>
+                            <a:srgbClr val="1B2A4A"/>
+                          </a:solidFill>
+                          <a:latin typeface="Noto Sans CJK SC"/>
+                        </a:rPr>
+                        <a:t>He 2023 MPC 路径跟踪（8 Hz 自由自航船模）</a:t>
+                      </a:r>
+                    </a:p>
+                  </a:txBody>
+                  <a:tcPr marL="54864" marR="54864" marT="27432" marB="27432" anchor="ctr">
+                    <a:solidFill>
+                      <a:srgbClr val="EEF3FA"/>
+                    </a:solidFill>
+                  </a:tcPr>
+                </a:tc>
+                <a:tc>
+                  <a:txBody>
+                    <a:bodyPr/>
+                    <a:lstStyle/>
+                    <a:p>
+                      <a:pPr>
+                        <a:lnSpc>
+                          <a:spcPct val="105000"/>
+                        </a:lnSpc>
+                      </a:pPr>
+                      <a:r>
+                        <a:rPr sz="1200" b="0">
+                          <a:solidFill>
+                            <a:srgbClr val="1B2A4A"/>
+                          </a:solidFill>
+                          <a:latin typeface="Noto Sans CJK SC"/>
+                        </a:rPr>
+                        <a:t>较高，注意尺度效应</a:t>
+                      </a:r>
+                    </a:p>
+                  </a:txBody>
+                  <a:tcPr marL="54864" marR="54864" marT="27432" marB="27432" anchor="ctr">
+                    <a:solidFill>
+                      <a:srgbClr val="EEF3FA"/>
+                    </a:solidFill>
+                  </a:tcPr>
+                </a:tc>
+              </a:tr>
+              <a:tr h="655320">
+                <a:tc>
+                  <a:txBody>
+                    <a:bodyPr/>
+                    <a:lstStyle/>
+                    <a:p>
+                      <a:pPr>
+                        <a:lnSpc>
+                          <a:spcPct val="105000"/>
+                        </a:lnSpc>
+                      </a:pPr>
+                      <a:r>
+                        <a:rPr sz="1200" b="0">
+                          <a:solidFill>
+                            <a:srgbClr val="1B2A4A"/>
+                          </a:solidFill>
+                          <a:latin typeface="Noto Sans CJK SC"/>
+                        </a:rPr>
+                        <a:t>试验校验的仿真</a:t>
+                      </a:r>
+                    </a:p>
+                  </a:txBody>
+                  <a:tcPr marL="54864" marR="54864" marT="27432" marB="27432" anchor="ctr"/>
+                </a:tc>
+                <a:tc>
+                  <a:txBody>
+                    <a:bodyPr/>
+                    <a:lstStyle/>
+                    <a:p>
+                      <a:pPr>
+                        <a:lnSpc>
+                          <a:spcPct val="105000"/>
+                        </a:lnSpc>
+                      </a:pPr>
+                      <a:r>
+                        <a:rPr sz="1200" b="0">
+                          <a:solidFill>
+                            <a:srgbClr val="1B2A4A"/>
+                          </a:solidFill>
+                          <a:latin typeface="Noto Sans CJK SC"/>
+                        </a:rPr>
+                        <a:t>Pelić 2023 减速 72–76%（船模+柴油机模型，偏差 &lt;2%）</a:t>
+                      </a:r>
+                    </a:p>
+                  </a:txBody>
+                  <a:tcPr marL="54864" marR="54864" marT="27432" marB="27432" anchor="ctr"/>
+                </a:tc>
+                <a:tc>
+                  <a:txBody>
+                    <a:bodyPr/>
+                    <a:lstStyle/>
+                    <a:p>
+                      <a:pPr>
+                        <a:lnSpc>
+                          <a:spcPct val="105000"/>
+                        </a:lnSpc>
+                      </a:pPr>
+                      <a:r>
+                        <a:rPr sz="1200" b="0">
+                          <a:solidFill>
+                            <a:srgbClr val="1B2A4A"/>
+                          </a:solidFill>
+                          <a:latin typeface="Noto Sans CJK SC"/>
+                        </a:rPr>
+                        <a:t>中等，模型经试验校验</a:t>
+                      </a:r>
+                    </a:p>
+                  </a:txBody>
+                  <a:tcPr marL="54864" marR="54864" marT="27432" marB="27432" anchor="ctr"/>
+                </a:tc>
+              </a:tr>
+              <a:tr h="655320">
+                <a:tc>
+                  <a:txBody>
+                    <a:bodyPr/>
+                    <a:lstStyle/>
+                    <a:p>
+                      <a:pPr>
+                        <a:lnSpc>
+                          <a:spcPct val="105000"/>
+                        </a:lnSpc>
+                      </a:pPr>
+                      <a:r>
+                        <a:rPr sz="1200" b="0">
+                          <a:solidFill>
+                            <a:srgbClr val="1B2A4A"/>
+                          </a:solidFill>
+                          <a:latin typeface="Noto Sans CJK SC"/>
+                        </a:rPr>
+                        <a:t>纯仿真</a:t>
+                      </a:r>
+                    </a:p>
+                  </a:txBody>
+                  <a:tcPr marL="54864" marR="54864" marT="27432" marB="27432" anchor="ctr">
+                    <a:solidFill>
+                      <a:srgbClr val="EEF3FA"/>
+                    </a:solidFill>
+                  </a:tcPr>
+                </a:tc>
+                <a:tc>
+                  <a:txBody>
+                    <a:bodyPr/>
+                    <a:lstStyle/>
+                    <a:p>
+                      <a:pPr>
+                        <a:lnSpc>
+                          <a:spcPct val="105000"/>
+                        </a:lnSpc>
+                      </a:pPr>
+                      <a:r>
+                        <a:rPr sz="1200" b="0">
+                          <a:solidFill>
+                            <a:srgbClr val="1B2A4A"/>
+                          </a:solidFill>
+                          <a:latin typeface="Noto Sans CJK SC"/>
+                        </a:rPr>
+                        <a:t>MPC vs PID 多数对比（4 s vs 15 s、74%）；</a:t>
+                      </a:r>
+                    </a:p>
+                    <a:p>
+                      <a:pPr>
+                        <a:lnSpc>
+                          <a:spcPct val="105000"/>
+                        </a:lnSpc>
+                      </a:pPr>
+                      <a:r>
+                        <a:rPr sz="1200" b="0">
+                          <a:solidFill>
+                            <a:srgbClr val="1B2A4A"/>
+                          </a:solidFill>
+                          <a:latin typeface="Noto Sans CJK SC"/>
+                        </a:rPr>
+                        <a:t>MPC-EMS 节油 4.85–17.2%</a:t>
+                      </a:r>
+                    </a:p>
+                  </a:txBody>
+                  <a:tcPr marL="54864" marR="54864" marT="27432" marB="27432" anchor="ctr">
+                    <a:solidFill>
+                      <a:srgbClr val="EEF3FA"/>
+                    </a:solidFill>
+                  </a:tcPr>
+                </a:tc>
+                <a:tc>
+                  <a:txBody>
+                    <a:bodyPr/>
+                    <a:lstStyle/>
+                    <a:p>
+                      <a:pPr>
+                        <a:lnSpc>
+                          <a:spcPct val="105000"/>
+                        </a:lnSpc>
+                      </a:pPr>
+                      <a:r>
+                        <a:rPr sz="1200" b="0">
+                          <a:solidFill>
+                            <a:srgbClr val="1B2A4A"/>
+                          </a:solidFill>
+                          <a:latin typeface="Noto Sans CJK SC"/>
+                        </a:rPr>
+                        <a:t>参考级，需实船/船模验证</a:t>
+                      </a:r>
+                    </a:p>
+                  </a:txBody>
+                  <a:tcPr marL="54864" marR="54864" marT="27432" marB="27432" anchor="ctr">
+                    <a:solidFill>
+                      <a:srgbClr val="EEF3FA"/>
+                    </a:solidFill>
+                  </a:tcPr>
+                </a:tc>
+              </a:tr>
+              <a:tr h="655320">
+                <a:tc>
+                  <a:txBody>
+                    <a:bodyPr/>
+                    <a:lstStyle/>
+                    <a:p>
+                      <a:pPr>
+                        <a:lnSpc>
+                          <a:spcPct val="105000"/>
+                        </a:lnSpc>
+                      </a:pPr>
+                      <a:r>
+                        <a:rPr sz="1200" b="0">
+                          <a:solidFill>
+                            <a:srgbClr val="1B2A4A"/>
+                          </a:solidFill>
+                          <a:latin typeface="Noto Sans CJK SC"/>
+                        </a:rPr>
+                        <a:t>厂商宣称</a:t>
+                      </a:r>
+                    </a:p>
+                  </a:txBody>
+                  <a:tcPr marL="54864" marR="54864" marT="27432" marB="27432" anchor="ctr"/>
+                </a:tc>
+                <a:tc>
+                  <a:txBody>
+                    <a:bodyPr/>
+                    <a:lstStyle/>
+                    <a:p>
+                      <a:pPr>
+                        <a:lnSpc>
+                          <a:spcPct val="105000"/>
+                        </a:lnSpc>
+                      </a:pPr>
+                      <a:r>
+                        <a:rPr sz="1200" b="0">
+                          <a:solidFill>
+                            <a:srgbClr val="1B2A4A"/>
+                          </a:solidFill>
+                          <a:latin typeface="Noto Sans CJK SC"/>
+                        </a:rPr>
+                        <a:t>ABB ≤9%；Anschütz ≤5%；Yara 5–15%</a:t>
+                      </a:r>
+                    </a:p>
+                  </a:txBody>
+                  <a:tcPr marL="54864" marR="54864" marT="27432" marB="27432" anchor="ctr"/>
+                </a:tc>
+                <a:tc>
+                  <a:txBody>
+                    <a:bodyPr/>
+                    <a:lstStyle/>
+                    <a:p>
+                      <a:pPr>
+                        <a:lnSpc>
+                          <a:spcPct val="105000"/>
+                        </a:lnSpc>
+                      </a:pPr>
+                      <a:r>
+                        <a:rPr sz="1200" b="0">
+                          <a:solidFill>
+                            <a:srgbClr val="1B2A4A"/>
+                          </a:solidFill>
+                          <a:latin typeface="Noto Sans CJK SC"/>
+                        </a:rPr>
+                        <a:t>注意营销偏差，以第三方复核为准</a:t>
+                      </a:r>
+                    </a:p>
+                  </a:txBody>
+                  <a:tcPr marL="54864" marR="54864" marT="27432" marB="27432" anchor="ctr"/>
+                </a:tc>
+              </a:tr>
+            </a:tbl>
+          </a:graphicData>
+        </a:graphic>
+      </p:graphicFrame>
       <p:sp>
         <p:nvSpPr>
           <p:cNvPr id="6" name="TextBox 5"/>
@@ -7672,8 +12542,8 @@
         </p:nvSpPr>
         <p:spPr>
           <a:xfrm>
-            <a:off x="6217920" y="1554480"/>
-            <a:ext cx="5669280" cy="5120640"/>
+            <a:off x="548640" y="5715000"/>
+            <a:ext cx="11155680" cy="1005840"/>
           </a:xfrm>
           <a:prstGeom prst="rect">
             <a:avLst/>
@@ -7695,165 +12565,13 @@
               </a:spcAft>
             </a:pPr>
             <a:r>
-              <a:rPr sz="1400" b="1">
+              <a:rPr sz="1400" b="0">
                 <a:solidFill>
                   <a:srgbClr val="D62728"/>
                 </a:solidFill>
                 <a:latin typeface="Noto Sans CJK SC"/>
               </a:rPr>
-              <a:t>▪ PID 侧：规则成熟、船员可整定</a:t>
-            </a:r>
-          </a:p>
-          <a:p>
-            <a:pPr algn="l">
-              <a:lnSpc>
-                <a:spcPct val="115000"/>
-              </a:lnSpc>
-              <a:spcAft>
-                <a:spcPts val="400"/>
-              </a:spcAft>
-            </a:pPr>
-            <a:r>
-              <a:rPr sz="1250" b="0">
-                <a:solidFill>
-                  <a:srgbClr val="1B2A4A"/>
-                </a:solidFill>
-                <a:latin typeface="Noto Sans CJK SC"/>
-              </a:rPr>
-              <a:t>    – Z-N 临界比例度法（无模型，步骤机械）</a:t>
-            </a:r>
-          </a:p>
-          <a:p>
-            <a:pPr algn="l">
-              <a:lnSpc>
-                <a:spcPct val="115000"/>
-              </a:lnSpc>
-              <a:spcAft>
-                <a:spcPts val="400"/>
-              </a:spcAft>
-            </a:pPr>
-            <a:r>
-              <a:rPr sz="1250" b="0">
-                <a:solidFill>
-                  <a:srgbClr val="1B2A4A"/>
-                </a:solidFill>
-                <a:latin typeface="Noto Sans CJK SC"/>
-              </a:rPr>
-              <a:t>    – Nomoto 极点配置解析公式：Kp=ωn²T/K，Kd=(2ζωnT−1)/K</a:t>
-            </a:r>
-          </a:p>
-          <a:p>
-            <a:pPr algn="l">
-              <a:lnSpc>
-                <a:spcPct val="115000"/>
-              </a:lnSpc>
-              <a:spcAft>
-                <a:spcPts val="800"/>
-              </a:spcAft>
-            </a:pPr>
-            <a:r>
-              <a:rPr sz="1400" b="1">
-                <a:solidFill>
-                  <a:srgbClr val="1F77B4"/>
-                </a:solidFill>
-                <a:latin typeface="Noto Sans CJK SC"/>
-              </a:rPr>
-              <a:t>▪ MPC 侧：模型 + 多参数双重门槛</a:t>
-            </a:r>
-          </a:p>
-          <a:p>
-            <a:pPr algn="l">
-              <a:lnSpc>
-                <a:spcPct val="115000"/>
-              </a:lnSpc>
-              <a:spcAft>
-                <a:spcPts val="400"/>
-              </a:spcAft>
-            </a:pPr>
-            <a:r>
-              <a:rPr sz="1250" b="0">
-                <a:solidFill>
-                  <a:srgbClr val="1B2A4A"/>
-                </a:solidFill>
-                <a:latin typeface="Noto Sans CJK SC"/>
-              </a:rPr>
-              <a:t>    – 需 Z 形/回转试验做系统辨识，模型随装载/污底漂移</a:t>
-            </a:r>
-          </a:p>
-          <a:p>
-            <a:pPr algn="l">
-              <a:lnSpc>
-                <a:spcPct val="115000"/>
-              </a:lnSpc>
-              <a:spcAft>
-                <a:spcPts val="400"/>
-              </a:spcAft>
-            </a:pPr>
-            <a:r>
-              <a:rPr sz="1250" b="0">
-                <a:solidFill>
-                  <a:srgbClr val="1B2A4A"/>
-                </a:solidFill>
-                <a:latin typeface="Noto Sans CJK SC"/>
-              </a:rPr>
-              <a:t>    – Np、Nc、Q、R、采样周期、约束边界多参数耦合</a:t>
-            </a:r>
-          </a:p>
-          <a:p>
-            <a:pPr algn="l">
-              <a:lnSpc>
-                <a:spcPct val="115000"/>
-              </a:lnSpc>
-              <a:spcAft>
-                <a:spcPts val="400"/>
-              </a:spcAft>
-            </a:pPr>
-            <a:r>
-              <a:rPr sz="1250" b="0">
-                <a:solidFill>
-                  <a:srgbClr val="1B2A4A"/>
-                </a:solidFill>
-                <a:latin typeface="Noto Sans CJK SC"/>
-              </a:rPr>
-              <a:t>    – 权重整定多靠 trial-and-error（DTU 2025 原文佐证）</a:t>
-            </a:r>
-          </a:p>
-          <a:p>
-            <a:pPr algn="l">
-              <a:lnSpc>
-                <a:spcPct val="115000"/>
-              </a:lnSpc>
-              <a:spcAft>
-                <a:spcPts val="400"/>
-              </a:spcAft>
-            </a:pPr>
-            <a:r>
-              <a:rPr sz="1250" b="0">
-                <a:solidFill>
-                  <a:srgbClr val="1B2A4A"/>
-                </a:solidFill>
-                <a:latin typeface="Noto Sans CJK SC"/>
-              </a:rPr>
-              <a:t>    – 稳定性需专门构造（终端约束 / Lyapunov 约束）</a:t>
-            </a:r>
-          </a:p>
-          <a:p>
-            <a:pPr algn="l">
-              <a:lnSpc>
-                <a:spcPct val="115000"/>
-              </a:lnSpc>
-              <a:spcAft>
-                <a:spcPts val="800"/>
-              </a:spcAft>
-            </a:pPr>
-            <a:r>
-              <a:rPr sz="1400" b="0">
-                <a:solidFill>
-                  <a:srgbClr val="666666"/>
-                </a:solidFill>
-                <a:latin typeface="Noto Sans CJK SC"/>
-              </a:rPr>
-              <a:t>▪ 注：雷达图为基于文献证据的主观打分示意</a:t>
+              <a:t>▪ 关键提醒：MPC vs PID 无全尺度实船公开对比；「预测模型与仿真模型同源会高估优势」（He 2023）；Li 2022（2.1–5.2%）为二手转引。</a:t>
             </a:r>
           </a:p>
         </p:txBody>
@@ -7895,7 +12613,7 @@
                 </a:solidFill>
                 <a:latin typeface="Noto Sans CJK SC"/>
               </a:rPr>
-              <a:t>6 / 14</a:t>
+              <a:t>7 / 20</a:t>
             </a:r>
           </a:p>
         </p:txBody>
@@ -7908,7 +12626,7 @@
 </p:sld>
 </file>
 
-<file path=ppt/slides/slide7.xml><?xml version="1.0" encoding="utf-8"?>
+<file path=ppt/slides/slide8.xml><?xml version="1.0" encoding="utf-8"?>
 <p:sld xmlns:a="http://schemas.openxmlformats.org/drawingml/2006/main" xmlns:p="http://schemas.openxmlformats.org/presentationml/2006/main" xmlns:r="http://schemas.openxmlformats.org/officeDocument/2006/relationships">
   <p:cSld>
     <p:spTree>
@@ -7998,510 +12716,21 @@
                 </a:solidFill>
                 <a:latin typeface="Noto Sans CJK SC"/>
               </a:rPr>
-              <a:t>MPC vs PD 部署优缺点小结</a:t>
-            </a:r>
-          </a:p>
-        </p:txBody>
-      </p:sp>
-      <p:graphicFrame>
-        <p:nvGraphicFramePr>
-          <p:cNvPr id="4" name="Table 3"/>
-          <p:cNvGraphicFramePr>
-            <a:graphicFrameLocks noGrp="1"/>
-          </p:cNvGraphicFramePr>
-          <p:nvPr/>
-        </p:nvGraphicFramePr>
-        <p:xfrm>
-          <a:off x="457200" y="1463040"/>
-          <a:ext cx="11338558" cy="3566160"/>
-        </p:xfrm>
-        <a:graphic>
-          <a:graphicData uri="http://schemas.openxmlformats.org/drawingml/2006/table">
-            <a:tbl>
-              <a:tblPr firstRow="1" bandRow="1">
-                <a:tableStyleId>{5C22544A-7EE6-4342-B048-85BDC9FD1C3A}</a:tableStyleId>
-              </a:tblPr>
-              <a:tblGrid>
-                <a:gridCol w="1790298"/>
-                <a:gridCol w="4376286"/>
-                <a:gridCol w="5171974"/>
-              </a:tblGrid>
-              <a:tr h="594360">
-                <a:tc>
-                  <a:txBody>
-                    <a:bodyPr/>
-                    <a:lstStyle/>
-                    <a:p>
-                      <a:pPr>
-                        <a:lnSpc>
-                          <a:spcPct val="105000"/>
-                        </a:lnSpc>
-                      </a:pPr>
-                      <a:r>
-                        <a:rPr sz="1350" b="1">
-                          <a:solidFill>
-                            <a:srgbClr val="FFFFFF"/>
-                          </a:solidFill>
-                          <a:latin typeface="Noto Sans CJK SC"/>
-                        </a:rPr>
-                        <a:t>维度</a:t>
-                      </a:r>
-                    </a:p>
-                  </a:txBody>
-                  <a:tcPr marL="54864" marR="54864" marT="27432" marB="27432" anchor="ctr">
-                    <a:solidFill>
-                      <a:srgbClr val="1F77B4"/>
-                    </a:solidFill>
-                  </a:tcPr>
-                </a:tc>
-                <a:tc>
-                  <a:txBody>
-                    <a:bodyPr/>
-                    <a:lstStyle/>
-                    <a:p>
-                      <a:pPr>
-                        <a:lnSpc>
-                          <a:spcPct val="105000"/>
-                        </a:lnSpc>
-                      </a:pPr>
-                      <a:r>
-                        <a:rPr sz="1350" b="1">
-                          <a:solidFill>
-                            <a:srgbClr val="FFFFFF"/>
-                          </a:solidFill>
-                          <a:latin typeface="Noto Sans CJK SC"/>
-                        </a:rPr>
-                        <a:t>传统 PD/PID</a:t>
-                      </a:r>
-                    </a:p>
-                  </a:txBody>
-                  <a:tcPr marL="54864" marR="54864" marT="27432" marB="27432" anchor="ctr">
-                    <a:solidFill>
-                      <a:srgbClr val="1F77B4"/>
-                    </a:solidFill>
-                  </a:tcPr>
-                </a:tc>
-                <a:tc>
-                  <a:txBody>
-                    <a:bodyPr/>
-                    <a:lstStyle/>
-                    <a:p>
-                      <a:pPr>
-                        <a:lnSpc>
-                          <a:spcPct val="105000"/>
-                        </a:lnSpc>
-                      </a:pPr>
-                      <a:r>
-                        <a:rPr sz="1350" b="1">
-                          <a:solidFill>
-                            <a:srgbClr val="FFFFFF"/>
-                          </a:solidFill>
-                          <a:latin typeface="Noto Sans CJK SC"/>
-                        </a:rPr>
-                        <a:t>MPC</a:t>
-                      </a:r>
-                    </a:p>
-                  </a:txBody>
-                  <a:tcPr marL="54864" marR="54864" marT="27432" marB="27432" anchor="ctr">
-                    <a:solidFill>
-                      <a:srgbClr val="1F77B4"/>
-                    </a:solidFill>
-                  </a:tcPr>
-                </a:tc>
-              </a:tr>
-              <a:tr h="594360">
-                <a:tc>
-                  <a:txBody>
-                    <a:bodyPr/>
-                    <a:lstStyle/>
-                    <a:p>
-                      <a:pPr>
-                        <a:lnSpc>
-                          <a:spcPct val="105000"/>
-                        </a:lnSpc>
-                      </a:pPr>
-                      <a:r>
-                        <a:rPr sz="1300" b="0">
-                          <a:solidFill>
-                            <a:srgbClr val="1B2A4A"/>
-                          </a:solidFill>
-                          <a:latin typeface="Noto Sans CJK SC"/>
-                        </a:rPr>
-                        <a:t>控制效果</a:t>
-                      </a:r>
-                    </a:p>
-                  </a:txBody>
-                  <a:tcPr marL="54864" marR="54864" marT="27432" marB="27432" anchor="ctr"/>
-                </a:tc>
-                <a:tc>
-                  <a:txBody>
-                    <a:bodyPr/>
-                    <a:lstStyle/>
-                    <a:p>
-                      <a:pPr>
-                        <a:lnSpc>
-                          <a:spcPct val="105000"/>
-                        </a:lnSpc>
-                      </a:pPr>
-                      <a:r>
-                        <a:rPr sz="1300" b="0">
-                          <a:solidFill>
-                            <a:srgbClr val="1B2A4A"/>
-                          </a:solidFill>
-                          <a:latin typeface="Noto Sans CJK SC"/>
-                        </a:rPr>
-                        <a:t>无前瞻、海浪下易无效操舵</a:t>
-                      </a:r>
-                    </a:p>
-                  </a:txBody>
-                  <a:tcPr marL="54864" marR="54864" marT="27432" marB="27432" anchor="ctr"/>
-                </a:tc>
-                <a:tc>
-                  <a:txBody>
-                    <a:bodyPr/>
-                    <a:lstStyle/>
-                    <a:p>
-                      <a:pPr>
-                        <a:lnSpc>
-                          <a:spcPct val="105000"/>
-                        </a:lnSpc>
-                      </a:pPr>
-                      <a:r>
-                        <a:rPr sz="1300" b="0">
-                          <a:solidFill>
-                            <a:srgbClr val="1B2A4A"/>
-                          </a:solidFill>
-                          <a:latin typeface="Noto Sans CJK SC"/>
-                        </a:rPr>
-                        <a:t>响应快、超调小、抗扰强、特定工况舵动作更少</a:t>
-                      </a:r>
-                    </a:p>
-                  </a:txBody>
-                  <a:tcPr marL="54864" marR="54864" marT="27432" marB="27432" anchor="ctr"/>
-                </a:tc>
-              </a:tr>
-              <a:tr h="594360">
-                <a:tc>
-                  <a:txBody>
-                    <a:bodyPr/>
-                    <a:lstStyle/>
-                    <a:p>
-                      <a:pPr>
-                        <a:lnSpc>
-                          <a:spcPct val="105000"/>
-                        </a:lnSpc>
-                      </a:pPr>
-                      <a:r>
-                        <a:rPr sz="1300" b="0">
-                          <a:solidFill>
-                            <a:srgbClr val="1B2A4A"/>
-                          </a:solidFill>
-                          <a:latin typeface="Noto Sans CJK SC"/>
-                        </a:rPr>
-                        <a:t>调试难度</a:t>
-                      </a:r>
-                    </a:p>
-                  </a:txBody>
-                  <a:tcPr marL="54864" marR="54864" marT="27432" marB="27432" anchor="ctr">
-                    <a:solidFill>
-                      <a:srgbClr val="EEF3FA"/>
-                    </a:solidFill>
-                  </a:tcPr>
-                </a:tc>
-                <a:tc>
-                  <a:txBody>
-                    <a:bodyPr/>
-                    <a:lstStyle/>
-                    <a:p>
-                      <a:pPr>
-                        <a:lnSpc>
-                          <a:spcPct val="105000"/>
-                        </a:lnSpc>
-                      </a:pPr>
-                      <a:r>
-                        <a:rPr sz="1300" b="0">
-                          <a:solidFill>
-                            <a:srgbClr val="1B2A4A"/>
-                          </a:solidFill>
-                          <a:latin typeface="Noto Sans CJK SC"/>
-                        </a:rPr>
-                        <a:t>整定规则成熟，船员可现场整定</a:t>
-                      </a:r>
-                    </a:p>
-                  </a:txBody>
-                  <a:tcPr marL="54864" marR="54864" marT="27432" marB="27432" anchor="ctr">
-                    <a:solidFill>
-                      <a:srgbClr val="EEF3FA"/>
-                    </a:solidFill>
-                  </a:tcPr>
-                </a:tc>
-                <a:tc>
-                  <a:txBody>
-                    <a:bodyPr/>
-                    <a:lstStyle/>
-                    <a:p>
-                      <a:pPr>
-                        <a:lnSpc>
-                          <a:spcPct val="105000"/>
-                        </a:lnSpc>
-                      </a:pPr>
-                      <a:r>
-                        <a:rPr sz="1300" b="0">
-                          <a:solidFill>
-                            <a:srgbClr val="1B2A4A"/>
-                          </a:solidFill>
-                          <a:latin typeface="Noto Sans CJK SC"/>
-                        </a:rPr>
-                        <a:t>模型辨识是硬门槛；权重多靠 trial-and-error</a:t>
-                      </a:r>
-                    </a:p>
-                  </a:txBody>
-                  <a:tcPr marL="54864" marR="54864" marT="27432" marB="27432" anchor="ctr">
-                    <a:solidFill>
-                      <a:srgbClr val="EEF3FA"/>
-                    </a:solidFill>
-                  </a:tcPr>
-                </a:tc>
-              </a:tr>
-              <a:tr h="594360">
-                <a:tc>
-                  <a:txBody>
-                    <a:bodyPr/>
-                    <a:lstStyle/>
-                    <a:p>
-                      <a:pPr>
-                        <a:lnSpc>
-                          <a:spcPct val="105000"/>
-                        </a:lnSpc>
-                      </a:pPr>
-                      <a:r>
-                        <a:rPr sz="1300" b="0">
-                          <a:solidFill>
-                            <a:srgbClr val="1B2A4A"/>
-                          </a:solidFill>
-                          <a:latin typeface="Noto Sans CJK SC"/>
-                        </a:rPr>
-                        <a:t>实时计算</a:t>
-                      </a:r>
-                    </a:p>
-                  </a:txBody>
-                  <a:tcPr marL="54864" marR="54864" marT="27432" marB="27432" anchor="ctr"/>
-                </a:tc>
-                <a:tc>
-                  <a:txBody>
-                    <a:bodyPr/>
-                    <a:lstStyle/>
-                    <a:p>
-                      <a:pPr>
-                        <a:lnSpc>
-                          <a:spcPct val="105000"/>
-                        </a:lnSpc>
-                      </a:pPr>
-                      <a:r>
-                        <a:rPr sz="1300" b="0">
-                          <a:solidFill>
-                            <a:srgbClr val="1B2A4A"/>
-                          </a:solidFill>
-                          <a:latin typeface="Noto Sans CJK SC"/>
-                        </a:rPr>
-                        <a:t>几次乘加，单片机即可</a:t>
-                      </a:r>
-                    </a:p>
-                  </a:txBody>
-                  <a:tcPr marL="54864" marR="54864" marT="27432" marB="27432" anchor="ctr"/>
-                </a:tc>
-                <a:tc>
-                  <a:txBody>
-                    <a:bodyPr/>
-                    <a:lstStyle/>
-                    <a:p>
-                      <a:pPr>
-                        <a:lnSpc>
-                          <a:spcPct val="105000"/>
-                        </a:lnSpc>
-                      </a:pPr>
-                      <a:r>
-                        <a:rPr sz="1300" b="0">
-                          <a:solidFill>
-                            <a:srgbClr val="1B2A4A"/>
-                          </a:solidFill>
-                          <a:latin typeface="Noto Sans CJK SC"/>
-                        </a:rPr>
-                        <a:t>每周期解 QP/NLP；船舶慢动态下可行（实测 7 ms）</a:t>
-                      </a:r>
-                    </a:p>
-                  </a:txBody>
-                  <a:tcPr marL="54864" marR="54864" marT="27432" marB="27432" anchor="ctr"/>
-                </a:tc>
-              </a:tr>
-              <a:tr h="594360">
-                <a:tc>
-                  <a:txBody>
-                    <a:bodyPr/>
-                    <a:lstStyle/>
-                    <a:p>
-                      <a:pPr>
-                        <a:lnSpc>
-                          <a:spcPct val="105000"/>
-                        </a:lnSpc>
-                      </a:pPr>
-                      <a:r>
-                        <a:rPr sz="1300" b="0">
-                          <a:solidFill>
-                            <a:srgbClr val="1B2A4A"/>
-                          </a:solidFill>
-                          <a:latin typeface="Noto Sans CJK SC"/>
-                        </a:rPr>
-                        <a:t>约束/安全</a:t>
-                      </a:r>
-                    </a:p>
-                  </a:txBody>
-                  <a:tcPr marL="54864" marR="54864" marT="27432" marB="27432" anchor="ctr">
-                    <a:solidFill>
-                      <a:srgbClr val="EEF3FA"/>
-                    </a:solidFill>
-                  </a:tcPr>
-                </a:tc>
-                <a:tc>
-                  <a:txBody>
-                    <a:bodyPr/>
-                    <a:lstStyle/>
-                    <a:p>
-                      <a:pPr>
-                        <a:lnSpc>
-                          <a:spcPct val="105000"/>
-                        </a:lnSpc>
-                      </a:pPr>
-                      <a:r>
-                        <a:rPr sz="1300" b="0">
-                          <a:solidFill>
-                            <a:srgbClr val="1B2A4A"/>
-                          </a:solidFill>
-                          <a:latin typeface="Noto Sans CJK SC"/>
-                        </a:rPr>
-                        <a:t>事后饱和截断，约束下退化</a:t>
-                      </a:r>
-                    </a:p>
-                  </a:txBody>
-                  <a:tcPr marL="54864" marR="54864" marT="27432" marB="27432" anchor="ctr">
-                    <a:solidFill>
-                      <a:srgbClr val="EEF3FA"/>
-                    </a:solidFill>
-                  </a:tcPr>
-                </a:tc>
-                <a:tc>
-                  <a:txBody>
-                    <a:bodyPr/>
-                    <a:lstStyle/>
-                    <a:p>
-                      <a:pPr>
-                        <a:lnSpc>
-                          <a:spcPct val="105000"/>
-                        </a:lnSpc>
-                      </a:pPr>
-                      <a:r>
-                        <a:rPr sz="1300" b="0">
-                          <a:solidFill>
-                            <a:srgbClr val="1B2A4A"/>
-                          </a:solidFill>
-                          <a:latin typeface="Noto Sans CJK SC"/>
-                        </a:rPr>
-                        <a:t>舵角/舵速约束显式满足；稳定性需专门构造</a:t>
-                      </a:r>
-                    </a:p>
-                  </a:txBody>
-                  <a:tcPr marL="54864" marR="54864" marT="27432" marB="27432" anchor="ctr">
-                    <a:solidFill>
-                      <a:srgbClr val="EEF3FA"/>
-                    </a:solidFill>
-                  </a:tcPr>
-                </a:tc>
-              </a:tr>
-              <a:tr h="594360">
-                <a:tc>
-                  <a:txBody>
-                    <a:bodyPr/>
-                    <a:lstStyle/>
-                    <a:p>
-                      <a:pPr>
-                        <a:lnSpc>
-                          <a:spcPct val="105000"/>
-                        </a:lnSpc>
-                      </a:pPr>
-                      <a:r>
-                        <a:rPr sz="1300" b="0">
-                          <a:solidFill>
-                            <a:srgbClr val="1B2A4A"/>
-                          </a:solidFill>
-                          <a:latin typeface="Noto Sans CJK SC"/>
-                        </a:rPr>
-                        <a:t>认证与维护</a:t>
-                      </a:r>
-                    </a:p>
-                  </a:txBody>
-                  <a:tcPr marL="54864" marR="54864" marT="27432" marB="27432" anchor="ctr"/>
-                </a:tc>
-                <a:tc>
-                  <a:txBody>
-                    <a:bodyPr/>
-                    <a:lstStyle/>
-                    <a:p>
-                      <a:pPr>
-                        <a:lnSpc>
-                          <a:spcPct val="105000"/>
-                        </a:lnSpc>
-                      </a:pPr>
-                      <a:r>
-                        <a:rPr sz="1300" b="0">
-                          <a:solidFill>
-                            <a:srgbClr val="1B2A4A"/>
-                          </a:solidFill>
-                          <a:latin typeface="Noto Sans CJK SC"/>
-                        </a:rPr>
-                        <a:t>工业生态与船级社认证完备</a:t>
-                      </a:r>
-                    </a:p>
-                  </a:txBody>
-                  <a:tcPr marL="54864" marR="54864" marT="27432" marB="27432" anchor="ctr"/>
-                </a:tc>
-                <a:tc>
-                  <a:txBody>
-                    <a:bodyPr/>
-                    <a:lstStyle/>
-                    <a:p>
-                      <a:pPr>
-                        <a:lnSpc>
-                          <a:spcPct val="105000"/>
-                        </a:lnSpc>
-                      </a:pPr>
-                      <a:r>
-                        <a:rPr sz="1300" b="0">
-                          <a:solidFill>
-                            <a:srgbClr val="1B2A4A"/>
-                          </a:solidFill>
-                          <a:latin typeface="Noto Sans CJK SC"/>
-                        </a:rPr>
-                        <a:t>认证路径不成熟；需控制工程师维护</a:t>
-                      </a:r>
-                    </a:p>
-                  </a:txBody>
-                  <a:tcPr marL="54864" marR="54864" marT="27432" marB="27432" anchor="ctr"/>
-                </a:tc>
-              </a:tr>
-            </a:tbl>
-          </a:graphicData>
-        </a:graphic>
-      </p:graphicFrame>
-      <p:sp>
-        <p:nvSpPr>
-          <p:cNvPr id="5" name="TextBox 4"/>
+              <a:t>调试难度：MPC 上船的最大障碍</a:t>
+            </a:r>
+          </a:p>
+        </p:txBody>
+      </p:sp>
+      <p:sp>
+        <p:nvSpPr>
+          <p:cNvPr id="4" name="TextBox 3"/>
           <p:cNvSpPr txBox="1"/>
           <p:nvPr/>
         </p:nvSpPr>
         <p:spPr>
           <a:xfrm>
-            <a:off x="457200" y="5303520"/>
-            <a:ext cx="11338560" cy="1188720"/>
+            <a:off x="475488" y="914400"/>
+            <a:ext cx="11247120" cy="457200"/>
           </a:xfrm>
           <a:prstGeom prst="rect">
             <a:avLst/>
@@ -8523,39 +12752,238 @@
               </a:spcAft>
             </a:pPr>
             <a:r>
-              <a:rPr sz="1700" b="1">
-                <a:solidFill>
-                  <a:srgbClr val="2CA02C"/>
-                </a:solidFill>
-                <a:latin typeface="Noto Sans CJK SC"/>
-              </a:rPr>
-              <a:t>结论性判断：PD/PID 打底保证可靠性，MPC 作为性能增强层；</a:t>
-            </a:r>
-          </a:p>
+              <a:rPr sz="1400" b="0">
+                <a:solidFill>
+                  <a:srgbClr val="666666"/>
+                </a:solidFill>
+                <a:latin typeface="Noto Sans CJK SC"/>
+              </a:rPr>
+              <a:t>「模型参数确定是实现 MPC 的最大障碍」—— He et al., 2023 原文</a:t>
+            </a:r>
+          </a:p>
+        </p:txBody>
+      </p:sp>
+      <p:pic>
+        <p:nvPicPr>
+          <p:cNvPr id="5" name="Picture 4" descr="fig3_radar.png"/>
+          <p:cNvPicPr>
+            <a:picLocks noChangeAspect="1"/>
+          </p:cNvPicPr>
+          <p:nvPr/>
+        </p:nvPicPr>
+        <p:blipFill>
+          <a:blip r:embed="rId2"/>
+          <a:stretch>
+            <a:fillRect/>
+          </a:stretch>
+        </p:blipFill>
+        <p:spPr>
+          <a:xfrm>
+            <a:off x="365760" y="1600200"/>
+            <a:ext cx="5486400" cy="4754880"/>
+          </a:xfrm>
+          <a:prstGeom prst="rect">
+            <a:avLst/>
+          </a:prstGeom>
+        </p:spPr>
+      </p:pic>
+      <p:sp>
+        <p:nvSpPr>
+          <p:cNvPr id="6" name="TextBox 5"/>
+          <p:cNvSpPr txBox="1"/>
+          <p:nvPr/>
+        </p:nvSpPr>
+        <p:spPr>
+          <a:xfrm>
+            <a:off x="6217920" y="1554480"/>
+            <a:ext cx="5669280" cy="5120640"/>
+          </a:xfrm>
+          <a:prstGeom prst="rect">
+            <a:avLst/>
+          </a:prstGeom>
+          <a:noFill/>
+        </p:spPr>
+        <p:txBody>
+          <a:bodyPr wrap="square" anchor="t">
+            <a:spAutoFit/>
+          </a:bodyPr>
+          <a:lstStyle/>
           <a:p>
             <a:pPr algn="l">
               <a:lnSpc>
                 <a:spcPct val="115000"/>
               </a:lnSpc>
               <a:spcAft>
-                <a:spcPts val="600"/>
-              </a:spcAft>
-            </a:pPr>
-            <a:r>
-              <a:rPr sz="1700" b="1">
-                <a:solidFill>
-                  <a:srgbClr val="2CA02C"/>
-                </a:solidFill>
-                <a:latin typeface="Noto Sans CJK SC"/>
-              </a:rPr>
-              <a:t>模型辨识与整定自动化（本仓库 auto_tuning 流程）是 MPC 能否落地的前置条件。</a:t>
-            </a:r>
-          </a:p>
-        </p:txBody>
-      </p:sp>
-      <p:sp>
-        <p:nvSpPr>
-          <p:cNvPr id="6" name="TextBox 5"/>
+                <a:spcPts val="800"/>
+              </a:spcAft>
+            </a:pPr>
+            <a:r>
+              <a:rPr sz="1400" b="1">
+                <a:solidFill>
+                  <a:srgbClr val="D62728"/>
+                </a:solidFill>
+                <a:latin typeface="Noto Sans CJK SC"/>
+              </a:rPr>
+              <a:t>▪ PID 侧：规则成熟、船员可整定</a:t>
+            </a:r>
+          </a:p>
+          <a:p>
+            <a:pPr algn="l">
+              <a:lnSpc>
+                <a:spcPct val="115000"/>
+              </a:lnSpc>
+              <a:spcAft>
+                <a:spcPts val="400"/>
+              </a:spcAft>
+            </a:pPr>
+            <a:r>
+              <a:rPr sz="1250" b="0">
+                <a:solidFill>
+                  <a:srgbClr val="1B2A4A"/>
+                </a:solidFill>
+                <a:latin typeface="Noto Sans CJK SC"/>
+              </a:rPr>
+              <a:t>    – Z-N 临界比例度法（无模型，步骤机械）</a:t>
+            </a:r>
+          </a:p>
+          <a:p>
+            <a:pPr algn="l">
+              <a:lnSpc>
+                <a:spcPct val="115000"/>
+              </a:lnSpc>
+              <a:spcAft>
+                <a:spcPts val="400"/>
+              </a:spcAft>
+            </a:pPr>
+            <a:r>
+              <a:rPr sz="1250" b="0">
+                <a:solidFill>
+                  <a:srgbClr val="1B2A4A"/>
+                </a:solidFill>
+                <a:latin typeface="Noto Sans CJK SC"/>
+              </a:rPr>
+              <a:t>    – Nomoto 极点配置解析公式：Kp=ωn²T/K，Kd=(2ζωnT−1)/K</a:t>
+            </a:r>
+          </a:p>
+          <a:p>
+            <a:pPr algn="l">
+              <a:lnSpc>
+                <a:spcPct val="115000"/>
+              </a:lnSpc>
+              <a:spcAft>
+                <a:spcPts val="800"/>
+              </a:spcAft>
+            </a:pPr>
+            <a:r>
+              <a:rPr sz="1400" b="1">
+                <a:solidFill>
+                  <a:srgbClr val="1F77B4"/>
+                </a:solidFill>
+                <a:latin typeface="Noto Sans CJK SC"/>
+              </a:rPr>
+              <a:t>▪ MPC 侧：模型 + 多参数双重门槛</a:t>
+            </a:r>
+          </a:p>
+          <a:p>
+            <a:pPr algn="l">
+              <a:lnSpc>
+                <a:spcPct val="115000"/>
+              </a:lnSpc>
+              <a:spcAft>
+                <a:spcPts val="400"/>
+              </a:spcAft>
+            </a:pPr>
+            <a:r>
+              <a:rPr sz="1250" b="0">
+                <a:solidFill>
+                  <a:srgbClr val="1B2A4A"/>
+                </a:solidFill>
+                <a:latin typeface="Noto Sans CJK SC"/>
+              </a:rPr>
+              <a:t>    – 需 Z 形/回转试验做系统辨识，模型随装载/污底漂移</a:t>
+            </a:r>
+          </a:p>
+          <a:p>
+            <a:pPr algn="l">
+              <a:lnSpc>
+                <a:spcPct val="115000"/>
+              </a:lnSpc>
+              <a:spcAft>
+                <a:spcPts val="400"/>
+              </a:spcAft>
+            </a:pPr>
+            <a:r>
+              <a:rPr sz="1250" b="0">
+                <a:solidFill>
+                  <a:srgbClr val="1B2A4A"/>
+                </a:solidFill>
+                <a:latin typeface="Noto Sans CJK SC"/>
+              </a:rPr>
+              <a:t>    – Np、Nc、Q、R、采样周期、约束边界多参数耦合</a:t>
+            </a:r>
+          </a:p>
+          <a:p>
+            <a:pPr algn="l">
+              <a:lnSpc>
+                <a:spcPct val="115000"/>
+              </a:lnSpc>
+              <a:spcAft>
+                <a:spcPts val="400"/>
+              </a:spcAft>
+            </a:pPr>
+            <a:r>
+              <a:rPr sz="1250" b="0">
+                <a:solidFill>
+                  <a:srgbClr val="1B2A4A"/>
+                </a:solidFill>
+                <a:latin typeface="Noto Sans CJK SC"/>
+              </a:rPr>
+              <a:t>    – 权重整定多靠 trial-and-error（DTU 2025 原文佐证）</a:t>
+            </a:r>
+          </a:p>
+          <a:p>
+            <a:pPr algn="l">
+              <a:lnSpc>
+                <a:spcPct val="115000"/>
+              </a:lnSpc>
+              <a:spcAft>
+                <a:spcPts val="400"/>
+              </a:spcAft>
+            </a:pPr>
+            <a:r>
+              <a:rPr sz="1250" b="0">
+                <a:solidFill>
+                  <a:srgbClr val="1B2A4A"/>
+                </a:solidFill>
+                <a:latin typeface="Noto Sans CJK SC"/>
+              </a:rPr>
+              <a:t>    – 稳定性需专门构造（终端约束 / Lyapunov 约束）</a:t>
+            </a:r>
+          </a:p>
+          <a:p>
+            <a:pPr algn="l">
+              <a:lnSpc>
+                <a:spcPct val="115000"/>
+              </a:lnSpc>
+              <a:spcAft>
+                <a:spcPts val="800"/>
+              </a:spcAft>
+            </a:pPr>
+            <a:r>
+              <a:rPr sz="1400" b="0">
+                <a:solidFill>
+                  <a:srgbClr val="666666"/>
+                </a:solidFill>
+                <a:latin typeface="Noto Sans CJK SC"/>
+              </a:rPr>
+              <a:t>▪ 注：雷达图为基于文献证据的主观打分示意</a:t>
+            </a:r>
+          </a:p>
+        </p:txBody>
+      </p:sp>
+      <p:sp>
+        <p:nvSpPr>
+          <p:cNvPr id="7" name="TextBox 6"/>
           <p:cNvSpPr txBox="1"/>
           <p:nvPr/>
         </p:nvSpPr>
@@ -8590,7 +13018,7 @@
                 </a:solidFill>
                 <a:latin typeface="Noto Sans CJK SC"/>
               </a:rPr>
-              <a:t>7 / 14</a:t>
+              <a:t>8 / 20</a:t>
             </a:r>
           </a:p>
         </p:txBody>
@@ -8603,7 +13031,7 @@
 </p:sld>
 </file>
 
-<file path=ppt/slides/slide8.xml><?xml version="1.0" encoding="utf-8"?>
+<file path=ppt/slides/slide9.xml><?xml version="1.0" encoding="utf-8"?>
 <p:sld xmlns:a="http://schemas.openxmlformats.org/drawingml/2006/main" xmlns:p="http://schemas.openxmlformats.org/presentationml/2006/main" xmlns:r="http://schemas.openxmlformats.org/officeDocument/2006/relationships">
   <p:cSld>
     <p:spTree>
@@ -8693,7 +13121,7 @@
                 </a:solidFill>
                 <a:latin typeface="Noto Sans CJK SC"/>
               </a:rPr>
-              <a:t>船舶节能五大路线：量级差异极大</a:t>
+              <a:t>MPC 工程化两个关键问题：实时性与稳定性</a:t>
             </a:r>
           </a:p>
         </p:txBody>
@@ -8735,38 +13163,307 @@
                 </a:solidFill>
                 <a:latin typeface="Noto Sans CJK SC"/>
               </a:rPr>
-              <a:t>来源：IMO / 船级社 / 实船试航，均为已核对数据</a:t>
-            </a:r>
-          </a:p>
-        </p:txBody>
-      </p:sp>
-      <p:pic>
-        <p:nvPicPr>
-          <p:cNvPr id="5" name="Picture 4" descr="fig4_energy_measures.png"/>
-          <p:cNvPicPr>
-            <a:picLocks noChangeAspect="1"/>
-          </p:cNvPicPr>
+              <a:t>均有文献实测数据支撑</a:t>
+            </a:r>
+          </a:p>
+        </p:txBody>
+      </p:sp>
+      <p:sp>
+        <p:nvSpPr>
+          <p:cNvPr id="5" name="TextBox 4"/>
+          <p:cNvSpPr txBox="1"/>
           <p:nvPr/>
-        </p:nvPicPr>
-        <p:blipFill>
-          <a:blip r:embed="rId2"/>
-          <a:stretch>
-            <a:fillRect/>
-          </a:stretch>
-        </p:blipFill>
+        </p:nvSpPr>
         <p:spPr>
           <a:xfrm>
-            <a:off x="1658389" y="1554480"/>
-            <a:ext cx="8844741" cy="5120640"/>
+            <a:off x="548640" y="1554480"/>
+            <a:ext cx="5669280" cy="5120640"/>
           </a:xfrm>
           <a:prstGeom prst="rect">
             <a:avLst/>
           </a:prstGeom>
+          <a:noFill/>
         </p:spPr>
-      </p:pic>
+        <p:txBody>
+          <a:bodyPr wrap="square" anchor="t">
+            <a:spAutoFit/>
+          </a:bodyPr>
+          <a:lstStyle/>
+          <a:p>
+            <a:pPr algn="l">
+              <a:lnSpc>
+                <a:spcPct val="115000"/>
+              </a:lnSpc>
+              <a:spcAft>
+                <a:spcPts val="800"/>
+              </a:spcAft>
+            </a:pPr>
+            <a:r>
+              <a:rPr sz="1400" b="1">
+                <a:solidFill>
+                  <a:srgbClr val="1F77B4"/>
+                </a:solidFill>
+                <a:latin typeface="Noto Sans CJK SC"/>
+              </a:rPr>
+              <a:t>▪ 实时性：船舶慢动态下可满足</a:t>
+            </a:r>
+          </a:p>
+          <a:p>
+            <a:pPr algn="l">
+              <a:lnSpc>
+                <a:spcPct val="115000"/>
+              </a:lnSpc>
+              <a:spcAft>
+                <a:spcPts val="400"/>
+              </a:spcAft>
+            </a:pPr>
+            <a:r>
+              <a:rPr sz="1250" b="0">
+                <a:solidFill>
+                  <a:srgbClr val="1B2A4A"/>
+                </a:solidFill>
+                <a:latin typeface="Noto Sans CJK SC"/>
+              </a:rPr>
+              <a:t>    – 船舶航向控制周期 0.1–0.2 s 足够（He 2023 船模 8 Hz）</a:t>
+            </a:r>
+          </a:p>
+          <a:p>
+            <a:pPr algn="l">
+              <a:lnSpc>
+                <a:spcPct val="115000"/>
+              </a:lnSpc>
+              <a:spcAft>
+                <a:spcPts val="400"/>
+              </a:spcAft>
+            </a:pPr>
+            <a:r>
+              <a:rPr sz="1250" b="0">
+                <a:solidFill>
+                  <a:srgbClr val="1B2A4A"/>
+                </a:solidFill>
+                <a:latin typeface="Noto Sans CJK SC"/>
+              </a:rPr>
+              <a:t>    – acados 实测：预测时域 60、20 Hz 下平均求解 7 ms，仅占采样周期 14%（Hu 2024，JMSE）</a:t>
+            </a:r>
+          </a:p>
+          <a:p>
+            <a:pPr algn="l">
+              <a:lnSpc>
+                <a:spcPct val="115000"/>
+              </a:lnSpc>
+              <a:spcAft>
+                <a:spcPts val="400"/>
+              </a:spcAft>
+            </a:pPr>
+            <a:r>
+              <a:rPr sz="1250" b="0">
+                <a:solidFill>
+                  <a:srgbClr val="1B2A4A"/>
+                </a:solidFill>
+                <a:latin typeface="Noto Sans CJK SC"/>
+              </a:rPr>
+              <a:t>    – 嵌入式平台（x86/ARM）QP 求解器基准：HPIPM 长时域最快；OSQP 热启动稳定可用（arXiv 2510.21773）</a:t>
+            </a:r>
+          </a:p>
+          <a:p>
+            <a:pPr algn="l">
+              <a:lnSpc>
+                <a:spcPct val="115000"/>
+              </a:lnSpc>
+              <a:spcAft>
+                <a:spcPts val="400"/>
+              </a:spcAft>
+            </a:pPr>
+            <a:r>
+              <a:rPr sz="1250" b="0">
+                <a:solidFill>
+                  <a:srgbClr val="1B2A4A"/>
+                </a:solidFill>
+                <a:latin typeface="Noto Sans CJK SC"/>
+              </a:rPr>
+              <a:t>    – 可选求解器：OSQP / qpSWIFT / acados / HPIPM</a:t>
+            </a:r>
+          </a:p>
+          <a:p>
+            <a:pPr algn="l">
+              <a:lnSpc>
+                <a:spcPct val="115000"/>
+              </a:lnSpc>
+              <a:spcAft>
+                <a:spcPts val="400"/>
+              </a:spcAft>
+            </a:pPr>
+            <a:r>
+              <a:rPr sz="1250" b="0">
+                <a:solidFill>
+                  <a:srgbClr val="1B2A4A"/>
+                </a:solidFill>
+                <a:latin typeface="Noto Sans CJK SC"/>
+              </a:rPr>
+              <a:t>    – 自主拖船 MPC 采样 0.2 s（You et al., 2024，UCL）</a:t>
+            </a:r>
+          </a:p>
+        </p:txBody>
+      </p:sp>
       <p:sp>
         <p:nvSpPr>
           <p:cNvPr id="6" name="TextBox 5"/>
+          <p:cNvSpPr txBox="1"/>
+          <p:nvPr/>
+        </p:nvSpPr>
+        <p:spPr>
+          <a:xfrm>
+            <a:off x="6400800" y="1554480"/>
+            <a:ext cx="5486400" cy="5120640"/>
+          </a:xfrm>
+          <a:prstGeom prst="rect">
+            <a:avLst/>
+          </a:prstGeom>
+          <a:noFill/>
+        </p:spPr>
+        <p:txBody>
+          <a:bodyPr wrap="square" anchor="t">
+            <a:spAutoFit/>
+          </a:bodyPr>
+          <a:lstStyle/>
+          <a:p>
+            <a:pPr algn="l">
+              <a:lnSpc>
+                <a:spcPct val="115000"/>
+              </a:lnSpc>
+              <a:spcAft>
+                <a:spcPts val="800"/>
+              </a:spcAft>
+            </a:pPr>
+            <a:r>
+              <a:rPr sz="1400" b="1">
+                <a:solidFill>
+                  <a:srgbClr val="E87D0D"/>
+                </a:solidFill>
+                <a:latin typeface="Noto Sans CJK SC"/>
+              </a:rPr>
+              <a:t>▪ 稳定性：需专门构造，不能默认获得</a:t>
+            </a:r>
+          </a:p>
+          <a:p>
+            <a:pPr algn="l">
+              <a:lnSpc>
+                <a:spcPct val="115000"/>
+              </a:lnSpc>
+              <a:spcAft>
+                <a:spcPts val="400"/>
+              </a:spcAft>
+            </a:pPr>
+            <a:r>
+              <a:rPr sz="1250" b="0">
+                <a:solidFill>
+                  <a:srgbClr val="1B2A4A"/>
+                </a:solidFill>
+                <a:latin typeface="Noto Sans CJK SC"/>
+              </a:rPr>
+              <a:t>    – PID：Nomoto 闭环分析成熟，频域裕度/极点配置直观</a:t>
+            </a:r>
+          </a:p>
+          <a:p>
+            <a:pPr algn="l">
+              <a:lnSpc>
+                <a:spcPct val="115000"/>
+              </a:lnSpc>
+              <a:spcAft>
+                <a:spcPts val="400"/>
+              </a:spcAft>
+            </a:pPr>
+            <a:r>
+              <a:rPr sz="1250" b="0">
+                <a:solidFill>
+                  <a:srgbClr val="1B2A4A"/>
+                </a:solidFill>
+                <a:latin typeface="Noto Sans CJK SC"/>
+              </a:rPr>
+              <a:t>    – MPC：有限时域优化不天然保证闭环稳定</a:t>
+            </a:r>
+          </a:p>
+          <a:p>
+            <a:pPr algn="l">
+              <a:lnSpc>
+                <a:spcPct val="115000"/>
+              </a:lnSpc>
+              <a:spcAft>
+                <a:spcPts val="400"/>
+              </a:spcAft>
+            </a:pPr>
+            <a:r>
+              <a:rPr sz="1250" b="0">
+                <a:solidFill>
+                  <a:srgbClr val="1B2A4A"/>
+                </a:solidFill>
+                <a:latin typeface="Noto Sans CJK SC"/>
+              </a:rPr>
+              <a:t>    – 经典框架：终端约束集 + 终端代价（Mayne et al., 2000, Automatica）</a:t>
+            </a:r>
+          </a:p>
+          <a:p>
+            <a:pPr algn="l">
+              <a:lnSpc>
+                <a:spcPct val="115000"/>
+              </a:lnSpc>
+              <a:spcAft>
+                <a:spcPts val="400"/>
+              </a:spcAft>
+            </a:pPr>
+            <a:r>
+              <a:rPr sz="1250" b="0">
+                <a:solidFill>
+                  <a:srgbClr val="1B2A4A"/>
+                </a:solidFill>
+                <a:latin typeface="Noto Sans CJK SC"/>
+              </a:rPr>
+              <a:t>    – 船舶落地形式：Lyapunov 约束嵌入优化问题</a:t>
+            </a:r>
+          </a:p>
+          <a:p>
+            <a:pPr algn="l">
+              <a:lnSpc>
+                <a:spcPct val="115000"/>
+              </a:lnSpc>
+              <a:spcAft>
+                <a:spcPts val="400"/>
+              </a:spcAft>
+            </a:pPr>
+            <a:r>
+              <a:rPr sz="1250" b="0">
+                <a:solidFill>
+                  <a:srgbClr val="1B2A4A"/>
+                </a:solidFill>
+                <a:latin typeface="Noto Sans CJK SC"/>
+              </a:rPr>
+              <a:t>    – Gong et al., 2021（AUV，Ocean Engineering）</a:t>
+            </a:r>
+          </a:p>
+          <a:p>
+            <a:pPr algn="l">
+              <a:lnSpc>
+                <a:spcPct val="115000"/>
+              </a:lnSpc>
+              <a:spcAft>
+                <a:spcPts val="400"/>
+              </a:spcAft>
+            </a:pPr>
+            <a:r>
+              <a:rPr sz="1250" b="0">
+                <a:solidFill>
+                  <a:srgbClr val="1B2A4A"/>
+                </a:solidFill>
+                <a:latin typeface="Noto Sans CJK SC"/>
+              </a:rPr>
+              <a:t>    – Zhang et al., 2023（DP 船，JMSE 11(2):281）</a:t>
+            </a:r>
+          </a:p>
+        </p:txBody>
+      </p:sp>
+      <p:sp>
+        <p:nvSpPr>
+          <p:cNvPr id="7" name="TextBox 6"/>
           <p:cNvSpPr txBox="1"/>
           <p:nvPr/>
         </p:nvSpPr>
@@ -8801,678 +13498,7 @@
                 </a:solidFill>
                 <a:latin typeface="Noto Sans CJK SC"/>
               </a:rPr>
-              <a:t>8 / 14</a:t>
-            </a:r>
-          </a:p>
-        </p:txBody>
-      </p:sp>
-    </p:spTree>
-  </p:cSld>
-  <p:clrMapOvr>
-    <a:masterClrMapping/>
-  </p:clrMapOvr>
-</p:sld>
-</file>
-
-<file path=ppt/slides/slide9.xml><?xml version="1.0" encoding="utf-8"?>
-<p:sld xmlns:a="http://schemas.openxmlformats.org/drawingml/2006/main" xmlns:p="http://schemas.openxmlformats.org/presentationml/2006/main" xmlns:r="http://schemas.openxmlformats.org/officeDocument/2006/relationships">
-  <p:cSld>
-    <p:spTree>
-      <p:nvGrpSpPr>
-        <p:cNvPr id="1" name=""/>
-        <p:cNvGrpSpPr/>
-        <p:nvPr/>
-      </p:nvGrpSpPr>
-      <p:grpSpPr/>
-      <p:sp>
-        <p:nvSpPr>
-          <p:cNvPr id="2" name="Rectangle 1"/>
-          <p:cNvSpPr/>
-          <p:nvPr/>
-        </p:nvSpPr>
-        <p:spPr>
-          <a:xfrm>
-            <a:off x="0" y="0"/>
-            <a:ext cx="12191695" cy="109728"/>
-          </a:xfrm>
-          <a:prstGeom prst="rect">
-            <a:avLst/>
-          </a:prstGeom>
-          <a:solidFill>
-            <a:srgbClr val="1F77B4"/>
-          </a:solidFill>
-          <a:ln>
-            <a:noFill/>
-          </a:ln>
-        </p:spPr>
-        <p:style>
-          <a:lnRef idx="1">
-            <a:schemeClr val="accent1"/>
-          </a:lnRef>
-          <a:fillRef idx="3">
-            <a:schemeClr val="accent1"/>
-          </a:fillRef>
-          <a:effectRef idx="2">
-            <a:schemeClr val="accent1"/>
-          </a:effectRef>
-          <a:fontRef idx="minor">
-            <a:schemeClr val="lt1"/>
-          </a:fontRef>
-        </p:style>
-        <p:txBody>
-          <a:bodyPr rtlCol="0" anchor="ctr"/>
-          <a:lstStyle/>
-          <a:p>
-            <a:pPr algn="ctr"/>
-          </a:p>
-        </p:txBody>
-      </p:sp>
-      <p:sp>
-        <p:nvSpPr>
-          <p:cNvPr id="3" name="TextBox 2"/>
-          <p:cNvSpPr txBox="1"/>
-          <p:nvPr/>
-        </p:nvSpPr>
-        <p:spPr>
-          <a:xfrm>
-            <a:off x="457200" y="256032"/>
-            <a:ext cx="11247120" cy="822960"/>
-          </a:xfrm>
-          <a:prstGeom prst="rect">
-            <a:avLst/>
-          </a:prstGeom>
-          <a:noFill/>
-        </p:spPr>
-        <p:txBody>
-          <a:bodyPr wrap="square" anchor="t">
-            <a:spAutoFit/>
-          </a:bodyPr>
-          <a:lstStyle/>
-          <a:p>
-            <a:pPr algn="l">
-              <a:lnSpc>
-                <a:spcPct val="115000"/>
-              </a:lnSpc>
-              <a:spcAft>
-                <a:spcPts val="600"/>
-              </a:spcAft>
-            </a:pPr>
-            <a:r>
-              <a:rPr sz="3000" b="1">
-                <a:solidFill>
-                  <a:srgbClr val="1B2A4A"/>
-                </a:solidFill>
-                <a:latin typeface="Noto Sans CJK SC"/>
-              </a:rPr>
-              <a:t>节能方案优缺点（一）：决策层</a:t>
-            </a:r>
-          </a:p>
-        </p:txBody>
-      </p:sp>
-      <p:sp>
-        <p:nvSpPr>
-          <p:cNvPr id="4" name="TextBox 3"/>
-          <p:cNvSpPr txBox="1"/>
-          <p:nvPr/>
-        </p:nvSpPr>
-        <p:spPr>
-          <a:xfrm>
-            <a:off x="475488" y="914400"/>
-            <a:ext cx="11247120" cy="457200"/>
-          </a:xfrm>
-          <a:prstGeom prst="rect">
-            <a:avLst/>
-          </a:prstGeom>
-          <a:noFill/>
-        </p:spPr>
-        <p:txBody>
-          <a:bodyPr wrap="square" anchor="t">
-            <a:spAutoFit/>
-          </a:bodyPr>
-          <a:lstStyle/>
-          <a:p>
-            <a:pPr algn="l">
-              <a:lnSpc>
-                <a:spcPct val="115000"/>
-              </a:lnSpc>
-              <a:spcAft>
-                <a:spcPts val="600"/>
-              </a:spcAft>
-            </a:pPr>
-            <a:r>
-              <a:rPr sz="1400" b="0">
-                <a:solidFill>
-                  <a:srgbClr val="666666"/>
-                </a:solidFill>
-                <a:latin typeface="Noto Sans CJK SC"/>
-              </a:rPr>
-              <a:t>节能大头所在</a:t>
-            </a:r>
-          </a:p>
-        </p:txBody>
-      </p:sp>
-      <p:graphicFrame>
-        <p:nvGraphicFramePr>
-          <p:cNvPr id="5" name="Table 4"/>
-          <p:cNvGraphicFramePr>
-            <a:graphicFrameLocks noGrp="1"/>
-          </p:cNvGraphicFramePr>
-          <p:nvPr/>
-        </p:nvGraphicFramePr>
-        <p:xfrm>
-          <a:off x="457200" y="1463040"/>
-          <a:ext cx="11338559" cy="4846320"/>
-        </p:xfrm>
-        <a:graphic>
-          <a:graphicData uri="http://schemas.openxmlformats.org/drawingml/2006/table">
-            <a:tbl>
-              <a:tblPr firstRow="1" bandRow="1">
-                <a:tableStyleId>{5C22544A-7EE6-4342-B048-85BDC9FD1C3A}</a:tableStyleId>
-              </a:tblPr>
-              <a:tblGrid>
-                <a:gridCol w="1553227"/>
-                <a:gridCol w="4038391"/>
-                <a:gridCol w="2795809"/>
-                <a:gridCol w="2951132"/>
-              </a:tblGrid>
-              <a:tr h="1211580">
-                <a:tc>
-                  <a:txBody>
-                    <a:bodyPr/>
-                    <a:lstStyle/>
-                    <a:p>
-                      <a:pPr>
-                        <a:lnSpc>
-                          <a:spcPct val="105000"/>
-                        </a:lnSpc>
-                      </a:pPr>
-                      <a:r>
-                        <a:rPr sz="1250" b="1">
-                          <a:solidFill>
-                            <a:srgbClr val="FFFFFF"/>
-                          </a:solidFill>
-                          <a:latin typeface="Noto Sans CJK SC"/>
-                        </a:rPr>
-                        <a:t>方案</a:t>
-                      </a:r>
-                    </a:p>
-                  </a:txBody>
-                  <a:tcPr marL="54864" marR="54864" marT="27432" marB="27432" anchor="ctr">
-                    <a:solidFill>
-                      <a:srgbClr val="1F77B4"/>
-                    </a:solidFill>
-                  </a:tcPr>
-                </a:tc>
-                <a:tc>
-                  <a:txBody>
-                    <a:bodyPr/>
-                    <a:lstStyle/>
-                    <a:p>
-                      <a:pPr>
-                        <a:lnSpc>
-                          <a:spcPct val="105000"/>
-                        </a:lnSpc>
-                      </a:pPr>
-                      <a:r>
-                        <a:rPr sz="1250" b="1">
-                          <a:solidFill>
-                            <a:srgbClr val="FFFFFF"/>
-                          </a:solidFill>
-                          <a:latin typeface="Noto Sans CJK SC"/>
-                        </a:rPr>
-                        <a:t>代表数据（已核对）</a:t>
-                      </a:r>
-                    </a:p>
-                  </a:txBody>
-                  <a:tcPr marL="54864" marR="54864" marT="27432" marB="27432" anchor="ctr">
-                    <a:solidFill>
-                      <a:srgbClr val="1F77B4"/>
-                    </a:solidFill>
-                  </a:tcPr>
-                </a:tc>
-                <a:tc>
-                  <a:txBody>
-                    <a:bodyPr/>
-                    <a:lstStyle/>
-                    <a:p>
-                      <a:pPr>
-                        <a:lnSpc>
-                          <a:spcPct val="105000"/>
-                        </a:lnSpc>
-                      </a:pPr>
-                      <a:r>
-                        <a:rPr sz="1250" b="1">
-                          <a:solidFill>
-                            <a:srgbClr val="FFFFFF"/>
-                          </a:solidFill>
-                          <a:latin typeface="Noto Sans CJK SC"/>
-                        </a:rPr>
-                        <a:t>优点</a:t>
-                      </a:r>
-                    </a:p>
-                  </a:txBody>
-                  <a:tcPr marL="54864" marR="54864" marT="27432" marB="27432" anchor="ctr">
-                    <a:solidFill>
-                      <a:srgbClr val="1F77B4"/>
-                    </a:solidFill>
-                  </a:tcPr>
-                </a:tc>
-                <a:tc>
-                  <a:txBody>
-                    <a:bodyPr/>
-                    <a:lstStyle/>
-                    <a:p>
-                      <a:pPr>
-                        <a:lnSpc>
-                          <a:spcPct val="105000"/>
-                        </a:lnSpc>
-                      </a:pPr>
-                      <a:r>
-                        <a:rPr sz="1250" b="1">
-                          <a:solidFill>
-                            <a:srgbClr val="FFFFFF"/>
-                          </a:solidFill>
-                          <a:latin typeface="Noto Sans CJK SC"/>
-                        </a:rPr>
-                        <a:t>缺点</a:t>
-                      </a:r>
-                    </a:p>
-                  </a:txBody>
-                  <a:tcPr marL="54864" marR="54864" marT="27432" marB="27432" anchor="ctr">
-                    <a:solidFill>
-                      <a:srgbClr val="1F77B4"/>
-                    </a:solidFill>
-                  </a:tcPr>
-                </a:tc>
-              </a:tr>
-              <a:tr h="1211580">
-                <a:tc>
-                  <a:txBody>
-                    <a:bodyPr/>
-                    <a:lstStyle/>
-                    <a:p>
-                      <a:pPr>
-                        <a:lnSpc>
-                          <a:spcPct val="105000"/>
-                        </a:lnSpc>
-                      </a:pPr>
-                      <a:r>
-                        <a:rPr sz="1200" b="0">
-                          <a:solidFill>
-                            <a:srgbClr val="1B2A4A"/>
-                          </a:solidFill>
-                          <a:latin typeface="Noto Sans CJK SC"/>
-                        </a:rPr>
-                        <a:t>减速航行</a:t>
-                      </a:r>
-                    </a:p>
-                  </a:txBody>
-                  <a:tcPr marL="54864" marR="54864" marT="27432" marB="27432" anchor="ctr"/>
-                </a:tc>
-                <a:tc>
-                  <a:txBody>
-                    <a:bodyPr/>
-                    <a:lstStyle/>
-                    <a:p>
-                      <a:pPr>
-                        <a:lnSpc>
-                          <a:spcPct val="105000"/>
-                        </a:lnSpc>
-                      </a:pPr>
-                      <a:r>
-                        <a:rPr sz="1200" b="0">
-                          <a:solidFill>
-                            <a:srgbClr val="1B2A4A"/>
-                          </a:solidFill>
-                          <a:latin typeface="Noto Sans CJK SC"/>
-                        </a:rPr>
-                        <a:t>23→12 kn 每海里油耗降 72–76%（Pelić 2023）</a:t>
-                      </a:r>
-                    </a:p>
-                    <a:p>
-                      <a:pPr>
-                        <a:lnSpc>
-                          <a:spcPct val="105000"/>
-                        </a:lnSpc>
-                      </a:pPr>
-                      <a:r>
-                        <a:rPr sz="1200" b="0">
-                          <a:solidFill>
-                            <a:srgbClr val="1B2A4A"/>
-                          </a:solidFill>
-                          <a:latin typeface="Noto Sans CJK SC"/>
-                        </a:rPr>
-                        <a:t>IMO：主机油耗潜力 10–50%，全船口径 3–12%</a:t>
-                      </a:r>
-                    </a:p>
-                  </a:txBody>
-                  <a:tcPr marL="54864" marR="54864" marT="27432" marB="27432" anchor="ctr"/>
-                </a:tc>
-                <a:tc>
-                  <a:txBody>
-                    <a:bodyPr/>
-                    <a:lstStyle/>
-                    <a:p>
-                      <a:pPr>
-                        <a:lnSpc>
-                          <a:spcPct val="105000"/>
-                        </a:lnSpc>
-                      </a:pPr>
-                      <a:r>
-                        <a:rPr sz="1200" b="0">
-                          <a:solidFill>
-                            <a:srgbClr val="1B2A4A"/>
-                          </a:solidFill>
-                          <a:latin typeface="Noto Sans CJK SC"/>
-                        </a:rPr>
-                        <a:t>杠杆最大；零硬件成本；直接改善 CII</a:t>
-                      </a:r>
-                    </a:p>
-                  </a:txBody>
-                  <a:tcPr marL="54864" marR="54864" marT="27432" marB="27432" anchor="ctr"/>
-                </a:tc>
-                <a:tc>
-                  <a:txBody>
-                    <a:bodyPr/>
-                    <a:lstStyle/>
-                    <a:p>
-                      <a:pPr>
-                        <a:lnSpc>
-                          <a:spcPct val="105000"/>
-                        </a:lnSpc>
-                      </a:pPr>
-                      <a:r>
-                        <a:rPr sz="1200" b="0">
-                          <a:solidFill>
-                            <a:srgbClr val="1B2A4A"/>
-                          </a:solidFill>
-                          <a:latin typeface="Noto Sans CJK SC"/>
-                        </a:rPr>
-                        <a:t>牺牲船期；受租约约束；低速偏离主机最佳负荷点</a:t>
-                      </a:r>
-                    </a:p>
-                  </a:txBody>
-                  <a:tcPr marL="54864" marR="54864" marT="27432" marB="27432" anchor="ctr"/>
-                </a:tc>
-              </a:tr>
-              <a:tr h="1211580">
-                <a:tc>
-                  <a:txBody>
-                    <a:bodyPr/>
-                    <a:lstStyle/>
-                    <a:p>
-                      <a:pPr>
-                        <a:lnSpc>
-                          <a:spcPct val="105000"/>
-                        </a:lnSpc>
-                      </a:pPr>
-                      <a:r>
-                        <a:rPr sz="1200" b="0">
-                          <a:solidFill>
-                            <a:srgbClr val="1B2A4A"/>
-                          </a:solidFill>
-                          <a:latin typeface="Noto Sans CJK SC"/>
-                        </a:rPr>
-                        <a:t>气象航线优化</a:t>
-                      </a:r>
-                    </a:p>
-                  </a:txBody>
-                  <a:tcPr marL="54864" marR="54864" marT="27432" marB="27432" anchor="ctr">
-                    <a:solidFill>
-                      <a:srgbClr val="EEF3FA"/>
-                    </a:solidFill>
-                  </a:tcPr>
-                </a:tc>
-                <a:tc>
-                  <a:txBody>
-                    <a:bodyPr/>
-                    <a:lstStyle/>
-                    <a:p>
-                      <a:pPr>
-                        <a:lnSpc>
-                          <a:spcPct val="105000"/>
-                        </a:lnSpc>
-                      </a:pPr>
-                      <a:r>
-                        <a:rPr sz="1200" b="0">
-                          <a:solidFill>
-                            <a:srgbClr val="1B2A4A"/>
-                          </a:solidFill>
-                          <a:latin typeface="Noto Sans CJK SC"/>
-                        </a:rPr>
-                        <a:t>IMO 口径 ≥3%，集装箱船可达 10%</a:t>
-                      </a:r>
-                    </a:p>
-                    <a:p>
-                      <a:pPr>
-                        <a:lnSpc>
-                          <a:spcPct val="105000"/>
-                        </a:lnSpc>
-                      </a:pPr>
-                      <a:r>
-                        <a:rPr sz="1200" b="0">
-                          <a:solidFill>
-                            <a:srgbClr val="1B2A4A"/>
-                          </a:solidFill>
-                          <a:latin typeface="Noto Sans CJK SC"/>
-                        </a:rPr>
-                        <a:t>Li 2022 实船 2.1–5.2%（二手转引）</a:t>
-                      </a:r>
-                    </a:p>
-                  </a:txBody>
-                  <a:tcPr marL="54864" marR="54864" marT="27432" marB="27432" anchor="ctr">
-                    <a:solidFill>
-                      <a:srgbClr val="EEF3FA"/>
-                    </a:solidFill>
-                  </a:tcPr>
-                </a:tc>
-                <a:tc>
-                  <a:txBody>
-                    <a:bodyPr/>
-                    <a:lstStyle/>
-                    <a:p>
-                      <a:pPr>
-                        <a:lnSpc>
-                          <a:spcPct val="105000"/>
-                        </a:lnSpc>
-                      </a:pPr>
-                      <a:r>
-                        <a:rPr sz="1200" b="0">
-                          <a:solidFill>
-                            <a:srgbClr val="1B2A4A"/>
-                          </a:solidFill>
-                          <a:latin typeface="Noto Sans CJK SC"/>
-                        </a:rPr>
-                        <a:t>节能+避离恶劣海况兼得；商用服务成熟</a:t>
-                      </a:r>
-                    </a:p>
-                  </a:txBody>
-                  <a:tcPr marL="54864" marR="54864" marT="27432" marB="27432" anchor="ctr">
-                    <a:solidFill>
-                      <a:srgbClr val="EEF3FA"/>
-                    </a:solidFill>
-                  </a:tcPr>
-                </a:tc>
-                <a:tc>
-                  <a:txBody>
-                    <a:bodyPr/>
-                    <a:lstStyle/>
-                    <a:p>
-                      <a:pPr>
-                        <a:lnSpc>
-                          <a:spcPct val="105000"/>
-                        </a:lnSpc>
-                      </a:pPr>
-                      <a:r>
-                        <a:rPr sz="1200" b="0">
-                          <a:solidFill>
-                            <a:srgbClr val="1B2A4A"/>
-                          </a:solidFill>
-                          <a:latin typeface="Noto Sans CJK SC"/>
-                        </a:rPr>
-                        <a:t>依赖气象预报与增阻模型精度；收益随海况波动</a:t>
-                      </a:r>
-                    </a:p>
-                  </a:txBody>
-                  <a:tcPr marL="54864" marR="54864" marT="27432" marB="27432" anchor="ctr">
-                    <a:solidFill>
-                      <a:srgbClr val="EEF3FA"/>
-                    </a:solidFill>
-                  </a:tcPr>
-                </a:tc>
-              </a:tr>
-              <a:tr h="1211580">
-                <a:tc>
-                  <a:txBody>
-                    <a:bodyPr/>
-                    <a:lstStyle/>
-                    <a:p>
-                      <a:pPr>
-                        <a:lnSpc>
-                          <a:spcPct val="105000"/>
-                        </a:lnSpc>
-                      </a:pPr>
-                      <a:r>
-                        <a:rPr sz="1200" b="0">
-                          <a:solidFill>
-                            <a:srgbClr val="1B2A4A"/>
-                          </a:solidFill>
-                          <a:latin typeface="Noto Sans CJK SC"/>
-                        </a:rPr>
-                        <a:t>纵倾优化</a:t>
-                      </a:r>
-                    </a:p>
-                  </a:txBody>
-                  <a:tcPr marL="54864" marR="54864" marT="27432" marB="27432" anchor="ctr"/>
-                </a:tc>
-                <a:tc>
-                  <a:txBody>
-                    <a:bodyPr/>
-                    <a:lstStyle/>
-                    <a:p>
-                      <a:pPr>
-                        <a:lnSpc>
-                          <a:spcPct val="105000"/>
-                        </a:lnSpc>
-                      </a:pPr>
-                      <a:r>
-                        <a:rPr sz="1200" b="0">
-                          <a:solidFill>
-                            <a:srgbClr val="1B2A4A"/>
-                          </a:solidFill>
-                          <a:latin typeface="Noto Sans CJK SC"/>
-                        </a:rPr>
-                        <a:t>ClassNK-NAPA 实船试航：纵倾贡献 1.2%</a:t>
-                      </a:r>
-                    </a:p>
-                    <a:p>
-                      <a:pPr>
-                        <a:lnSpc>
-                          <a:spcPct val="105000"/>
-                        </a:lnSpc>
-                      </a:pPr>
-                      <a:r>
-                        <a:rPr sz="1200" b="0">
-                          <a:solidFill>
-                            <a:srgbClr val="1B2A4A"/>
-                          </a:solidFill>
-                          <a:latin typeface="Noto Sans CJK SC"/>
-                        </a:rPr>
-                        <a:t>专项研究最多 4%；Eniram 实测 1–5%</a:t>
-                      </a:r>
-                    </a:p>
-                  </a:txBody>
-                  <a:tcPr marL="54864" marR="54864" marT="27432" marB="27432" anchor="ctr"/>
-                </a:tc>
-                <a:tc>
-                  <a:txBody>
-                    <a:bodyPr/>
-                    <a:lstStyle/>
-                    <a:p>
-                      <a:pPr>
-                        <a:lnSpc>
-                          <a:spcPct val="105000"/>
-                        </a:lnSpc>
-                      </a:pPr>
-                      <a:r>
-                        <a:rPr sz="1200" b="0">
-                          <a:solidFill>
-                            <a:srgbClr val="1B2A4A"/>
-                          </a:solidFill>
-                          <a:latin typeface="Noto Sans CJK SC"/>
-                        </a:rPr>
-                        <a:t>几乎零成本（调压载水）；实船背书强</a:t>
-                      </a:r>
-                    </a:p>
-                  </a:txBody>
-                  <a:tcPr marL="54864" marR="54864" marT="27432" marB="27432" anchor="ctr"/>
-                </a:tc>
-                <a:tc>
-                  <a:txBody>
-                    <a:bodyPr/>
-                    <a:lstStyle/>
-                    <a:p>
-                      <a:pPr>
-                        <a:lnSpc>
-                          <a:spcPct val="105000"/>
-                        </a:lnSpc>
-                      </a:pPr>
-                      <a:r>
-                        <a:rPr sz="1200" b="0">
-                          <a:solidFill>
-                            <a:srgbClr val="1B2A4A"/>
-                          </a:solidFill>
-                          <a:latin typeface="Noto Sans CJK SC"/>
-                        </a:rPr>
-                        <a:t>最优纵倾随工况变化；受稳性/装卸约束；幅度偏小</a:t>
-                      </a:r>
-                    </a:p>
-                  </a:txBody>
-                  <a:tcPr marL="54864" marR="54864" marT="27432" marB="27432" anchor="ctr"/>
-                </a:tc>
-              </a:tr>
-            </a:tbl>
-          </a:graphicData>
-        </a:graphic>
-      </p:graphicFrame>
-      <p:sp>
-        <p:nvSpPr>
-          <p:cNvPr id="6" name="TextBox 5"/>
-          <p:cNvSpPr txBox="1"/>
-          <p:nvPr/>
-        </p:nvSpPr>
-        <p:spPr>
-          <a:xfrm>
-            <a:off x="11475720" y="6473952"/>
-            <a:ext cx="640080" cy="320040"/>
-          </a:xfrm>
-          <a:prstGeom prst="rect">
-            <a:avLst/>
-          </a:prstGeom>
-          <a:noFill/>
-        </p:spPr>
-        <p:txBody>
-          <a:bodyPr wrap="square" anchor="t">
-            <a:spAutoFit/>
-          </a:bodyPr>
-          <a:lstStyle/>
-          <a:p>
-            <a:pPr algn="r">
-              <a:lnSpc>
-                <a:spcPct val="115000"/>
-              </a:lnSpc>
-              <a:spcAft>
-                <a:spcPts val="600"/>
-              </a:spcAft>
-            </a:pPr>
-            <a:r>
-              <a:rPr sz="1100" b="0">
-                <a:solidFill>
-                  <a:srgbClr val="666666"/>
-                </a:solidFill>
-                <a:latin typeface="Noto Sans CJK SC"/>
-              </a:rPr>
-              <a:t>9 / 14</a:t>
+              <a:t>9 / 20</a:t>
             </a:r>
           </a:p>
         </p:txBody>
